--- a/v2/research/editable/Protein_antibody_workflow_editable.pptx
+++ b/v2/research/editable/Protein_antibody_workflow_editable.pptx
@@ -2,13 +2,13 @@
 <file path=ppt/presentation.xml><?xml version="1.0" encoding="utf-8"?>
 <p:presentation xmlns:p="http://schemas.openxmlformats.org/presentationml/2006/main">
   <p:sldMasterIdLst>
-    <p:sldMasterId xmlns:r="http://schemas.openxmlformats.org/officeDocument/2006/relationships" id="2147483648" r:id="Rca786ee47b8248a8"/>
+    <p:sldMasterId xmlns:r="http://schemas.openxmlformats.org/officeDocument/2006/relationships" id="2147483648" r:id="Rebe2ecc1de9c4f7f"/>
   </p:sldMasterIdLst>
   <p:notesMasterIdLst>
-    <p:notesMasterId xmlns:r="http://schemas.openxmlformats.org/officeDocument/2006/relationships" r:id="R81be71b272054c71"/>
+    <p:notesMasterId xmlns:r="http://schemas.openxmlformats.org/officeDocument/2006/relationships" r:id="Rf9501bbaf5564ebf"/>
   </p:notesMasterIdLst>
   <p:sldIdLst>
-    <p:sldId xmlns:r="http://schemas.openxmlformats.org/officeDocument/2006/relationships" id="256" r:id="R76d628e388024fe7"/>
+    <p:sldId xmlns:r="http://schemas.openxmlformats.org/officeDocument/2006/relationships" id="256" r:id="R4813932ff1ff445a"/>
   </p:sldIdLst>
   <p:sldSz cx="22860000" cy="12858750"/>
   <p:notesSz cx="6858000" cy="9144000"/>
@@ -627,7 +627,7 @@
           </a:p>
           <a:p xmlns:a="http://schemas.openxmlformats.org/drawingml/2006/main">
             <a:r>
-              <a:t>Original artwork is embedded without redrawing, with aspect ratios preserved. Whitespace-trimmed versions already exist in this project's asset library. Company names are additionally editable native text. Logos remain images in the PowerPoint; all diagram text, frames and arrows are native editable objects.</a:t>
+              <a:t>Original artwork is embedded without redrawing, with aspect ratios preserved. Whitespace-trimmed versions already exist in this project's asset library. Company-name text labels are editable native text; original logo artwork remains an image. Logos remain images in the PowerPoint; all diagram text, frames and arrows are native editable objects.</a:t>
             </a:r>
           </a:p>
           <a:p xmlns:a="http://schemas.openxmlformats.org/drawingml/2006/main">
@@ -683,6 +683,21 @@
           <a:p xmlns:a="http://schemas.openxmlformats.org/drawingml/2006/main">
             <a:r>
               <a:t>No market sizes, unit prices, empirical throughput values or company revenue forecasts are introduced in this figure.</a:t>
+            </a:r>
+          </a:p>
+          <a:p xmlns:a="http://schemas.openxmlformats.org/drawingml/2006/main">
+            <a:r>
+              <a:t/>
+            </a:r>
+          </a:p>
+          <a:p xmlns:a="http://schemas.openxmlformats.org/drawingml/2006/main">
+            <a:r>
+              <a:t/>
+            </a:r>
+          </a:p>
+          <a:p xmlns:a="http://schemas.openxmlformats.org/drawingml/2006/main">
+            <a:r>
+              <a:t>Palette updated to the user's eight RGB colors on 13 October 2026. Original company marks retain their brand colors.</a:t>
             </a:r>
           </a:p>
           <a:p xmlns:a="http://schemas.openxmlformats.org/drawingml/2006/main">
@@ -734,7 +749,7 @@
           <p:cNvPr id="3" name="Title">
             <a:extLst xmlns:a="http://schemas.openxmlformats.org/drawingml/2006/main">
               <a:ext uri="{FF2B5EF4-FFF2-40B4-BE49-F238E27FC236}">
-                <a16:creationId xmlns:a16="http://schemas.microsoft.com/office/drawing/2014/main" id="{CBF813FA-BBCB-42BB-8F7D-E5700A3C0EB1}"/>
+                <a16:creationId xmlns:a16="http://schemas.microsoft.com/office/drawing/2014/main" id="{60A31BB4-C3C3-4A5D-8221-D7ACFC770FFE}"/>
               </a:ext>
             </a:extLst>
           </p:cNvPr>
@@ -891,7 +906,7 @@
           <p:cNvPr id="2" name="Subtitle">
             <a:extLst xmlns:a="http://schemas.openxmlformats.org/drawingml/2006/main">
               <a:ext uri="{FF2B5EF4-FFF2-40B4-BE49-F238E27FC236}">
-                <a16:creationId xmlns:a16="http://schemas.microsoft.com/office/drawing/2014/main" id="{8AA0B9FD-2007-4959-AC09-E748E0F6B114}"/>
+                <a16:creationId xmlns:a16="http://schemas.microsoft.com/office/drawing/2014/main" id="{9875E5AD-EBCA-4036-9388-68483CAF6A0A}"/>
               </a:ext>
             </a:extLst>
           </p:cNvPr>
@@ -1065,7 +1080,7 @@
           <p:cNvPr id="2" name="Section title">
             <a:extLst xmlns:a="http://schemas.openxmlformats.org/drawingml/2006/main">
               <a:ext uri="{FF2B5EF4-FFF2-40B4-BE49-F238E27FC236}">
-                <a16:creationId xmlns:a16="http://schemas.microsoft.com/office/drawing/2014/main" id="{BD5B4014-3B49-4136-82A5-332496F25F62}"/>
+                <a16:creationId xmlns:a16="http://schemas.microsoft.com/office/drawing/2014/main" id="{DCFFAC9C-D3A9-4CDE-A8BA-B5A67D2CDA5A}"/>
               </a:ext>
             </a:extLst>
           </p:cNvPr>
@@ -1239,7 +1254,7 @@
           <p:cNvPr id="3" name="Title">
             <a:extLst xmlns:a="http://schemas.openxmlformats.org/drawingml/2006/main">
               <a:ext uri="{FF2B5EF4-FFF2-40B4-BE49-F238E27FC236}">
-                <a16:creationId xmlns:a16="http://schemas.microsoft.com/office/drawing/2014/main" id="{F5A3D268-3C8D-4057-9DD8-7A2B8F2A84C9}"/>
+                <a16:creationId xmlns:a16="http://schemas.microsoft.com/office/drawing/2014/main" id="{F57327D1-F10F-4BD3-ACB6-EC54A7B9EFC5}"/>
               </a:ext>
             </a:extLst>
           </p:cNvPr>
@@ -1396,7 +1411,7 @@
           <p:cNvPr id="2" name="Body">
             <a:extLst xmlns:a="http://schemas.openxmlformats.org/drawingml/2006/main">
               <a:ext uri="{FF2B5EF4-FFF2-40B4-BE49-F238E27FC236}">
-                <a16:creationId xmlns:a16="http://schemas.microsoft.com/office/drawing/2014/main" id="{702FCC02-9B63-47F6-8D85-E8E3115687AB}"/>
+                <a16:creationId xmlns:a16="http://schemas.microsoft.com/office/drawing/2014/main" id="{D4562593-95EA-4858-9481-2A9FC90F453D}"/>
               </a:ext>
             </a:extLst>
           </p:cNvPr>
@@ -1570,7 +1585,7 @@
           <p:cNvPr id="4" name="Title">
             <a:extLst xmlns:a="http://schemas.openxmlformats.org/drawingml/2006/main">
               <a:ext uri="{FF2B5EF4-FFF2-40B4-BE49-F238E27FC236}">
-                <a16:creationId xmlns:a16="http://schemas.microsoft.com/office/drawing/2014/main" id="{426C1936-ABF8-4DF5-AB40-0BF480A9B577}"/>
+                <a16:creationId xmlns:a16="http://schemas.microsoft.com/office/drawing/2014/main" id="{17D389EA-41E9-4838-A800-2E72DF79FA15}"/>
               </a:ext>
             </a:extLst>
           </p:cNvPr>
@@ -1727,7 +1742,7 @@
           <p:cNvPr id="2" name="Left column">
             <a:extLst xmlns:a="http://schemas.openxmlformats.org/drawingml/2006/main">
               <a:ext uri="{FF2B5EF4-FFF2-40B4-BE49-F238E27FC236}">
-                <a16:creationId xmlns:a16="http://schemas.microsoft.com/office/drawing/2014/main" id="{638C3987-BD60-4907-81A5-A604861E5419}"/>
+                <a16:creationId xmlns:a16="http://schemas.microsoft.com/office/drawing/2014/main" id="{76B086E8-68D6-4D38-B306-D72F6C44ED94}"/>
               </a:ext>
             </a:extLst>
           </p:cNvPr>
@@ -1884,7 +1899,7 @@
           <p:cNvPr id="3" name="Right column">
             <a:extLst xmlns:a="http://schemas.openxmlformats.org/drawingml/2006/main">
               <a:ext uri="{FF2B5EF4-FFF2-40B4-BE49-F238E27FC236}">
-                <a16:creationId xmlns:a16="http://schemas.microsoft.com/office/drawing/2014/main" id="{ABEF33FE-B463-49AA-AA59-37D6DC3684A4}"/>
+                <a16:creationId xmlns:a16="http://schemas.microsoft.com/office/drawing/2014/main" id="{24E17081-71B1-4F00-A6A0-353526293934}"/>
               </a:ext>
             </a:extLst>
           </p:cNvPr>
@@ -2058,7 +2073,7 @@
           <p:cNvPr id="3" name="Title">
             <a:extLst xmlns:a="http://schemas.openxmlformats.org/drawingml/2006/main">
               <a:ext uri="{FF2B5EF4-FFF2-40B4-BE49-F238E27FC236}">
-                <a16:creationId xmlns:a16="http://schemas.microsoft.com/office/drawing/2014/main" id="{B67E632C-E827-40D4-B63A-59E390620AC4}"/>
+                <a16:creationId xmlns:a16="http://schemas.microsoft.com/office/drawing/2014/main" id="{AE211391-3145-49B8-8DC0-4D0F8A20B326}"/>
               </a:ext>
             </a:extLst>
           </p:cNvPr>
@@ -2215,7 +2230,7 @@
           <p:cNvPr id="2" name="Left column">
             <a:extLst xmlns:a="http://schemas.openxmlformats.org/drawingml/2006/main">
               <a:ext uri="{FF2B5EF4-FFF2-40B4-BE49-F238E27FC236}">
-                <a16:creationId xmlns:a16="http://schemas.microsoft.com/office/drawing/2014/main" id="{C7346B0A-83C8-48A3-92CF-26904B68923A}"/>
+                <a16:creationId xmlns:a16="http://schemas.microsoft.com/office/drawing/2014/main" id="{C57988D1-43CE-4D04-8F75-5006DBB21209}"/>
               </a:ext>
             </a:extLst>
           </p:cNvPr>
@@ -2410,12 +2425,12 @@
   </p:cSld>
   <p:clrMap bg1="lt1" tx1="dk1" bg2="lt2" tx2="dk2" accent1="accent1" accent2="accent2" accent3="accent3" accent4="accent4" accent5="accent5" accent6="accent6" hlink="hlink" folHlink="folHlink"/>
   <p:sldLayoutIdLst>
-    <p:sldLayoutId xmlns:r="http://schemas.openxmlformats.org/officeDocument/2006/relationships" id="2147483649" r:id="R34e119f069e04702"/>
-    <p:sldLayoutId xmlns:r="http://schemas.openxmlformats.org/officeDocument/2006/relationships" id="2147483650" r:id="Rfd428dcc1d064ee5"/>
-    <p:sldLayoutId xmlns:r="http://schemas.openxmlformats.org/officeDocument/2006/relationships" id="2147483651" r:id="R6150bb8aff16416b"/>
-    <p:sldLayoutId xmlns:r="http://schemas.openxmlformats.org/officeDocument/2006/relationships" id="2147483652" r:id="R19c8a6944c28409d"/>
-    <p:sldLayoutId xmlns:r="http://schemas.openxmlformats.org/officeDocument/2006/relationships" id="2147483653" r:id="Rc5a5c97182f74194"/>
-    <p:sldLayoutId xmlns:r="http://schemas.openxmlformats.org/officeDocument/2006/relationships" id="2147483654" r:id="R2e8bf1fca75d4602"/>
+    <p:sldLayoutId xmlns:r="http://schemas.openxmlformats.org/officeDocument/2006/relationships" id="2147483649" r:id="R33b2f62d5c7a4f90"/>
+    <p:sldLayoutId xmlns:r="http://schemas.openxmlformats.org/officeDocument/2006/relationships" id="2147483650" r:id="R5397c0e7be4f43e7"/>
+    <p:sldLayoutId xmlns:r="http://schemas.openxmlformats.org/officeDocument/2006/relationships" id="2147483651" r:id="R92ef5e9faf9146f0"/>
+    <p:sldLayoutId xmlns:r="http://schemas.openxmlformats.org/officeDocument/2006/relationships" id="2147483652" r:id="Rdb49db79ff774546"/>
+    <p:sldLayoutId xmlns:r="http://schemas.openxmlformats.org/officeDocument/2006/relationships" id="2147483653" r:id="R4833de945d464e0b"/>
+    <p:sldLayoutId xmlns:r="http://schemas.openxmlformats.org/officeDocument/2006/relationships" id="2147483654" r:id="Rb0882d76dccd42f2"/>
   </p:sldLayoutIdLst>
   <p:txStyles>
     <p:titleStyle>
@@ -2966,7 +2981,7 @@
           <p:cNvPr id="153" name="">
             <a:extLst xmlns:a="http://schemas.openxmlformats.org/drawingml/2006/main">
               <a:ext uri="{FF2B5EF4-FFF2-40B4-BE49-F238E27FC236}">
-                <a16:creationId xmlns:a16="http://schemas.microsoft.com/office/drawing/2014/main" id="{74D00C97-9274-492D-AD93-49AB266C19C5}"/>
+                <a16:creationId xmlns:a16="http://schemas.microsoft.com/office/drawing/2014/main" id="{7A3AED5F-E45A-4330-884E-EF835A65708D}"/>
               </a:ext>
             </a:extLst>
           </p:cNvPr>
@@ -2984,7 +2999,7 @@
             <a:avLst/>
           </a:prstGeom>
           <a:solidFill xmlns:a="http://schemas.openxmlformats.org/drawingml/2006/main">
-            <a:srgbClr val="007D80"/>
+            <a:srgbClr val="00355F"/>
           </a:solidFill>
           <a:ln xmlns:a="http://schemas.openxmlformats.org/drawingml/2006/main" w="9525">
             <a:noFill/>
@@ -2996,7 +3011,7 @@
           <p:cNvPr id="2" name="Typical protein / antibody screening workflow">
             <a:extLst xmlns:a="http://schemas.openxmlformats.org/drawingml/2006/main">
               <a:ext uri="{FF2B5EF4-FFF2-40B4-BE49-F238E27FC236}">
-                <a16:creationId xmlns:a16="http://schemas.microsoft.com/office/drawing/2014/main" id="{4C74E288-B3E4-45D4-8938-C2204A6D5425}"/>
+                <a16:creationId xmlns:a16="http://schemas.microsoft.com/office/drawing/2014/main" id="{DC1EA54E-2B09-42DD-8753-C3A56058F10B}"/>
               </a:ext>
             </a:extLst>
           </p:cNvPr>
@@ -3024,7 +3039,7 @@
             <a:defPPr algn="l">
               <a:defRPr sz="4200" b="1">
                 <a:solidFill>
-                  <a:srgbClr val="152C3A"/>
+                  <a:srgbClr val="00355F"/>
                 </a:solidFill>
                 <a:latin typeface="Arial"/>
                 <a:ea typeface="Arial"/>
@@ -3040,7 +3055,7 @@
               <a:buNone/>
               <a:defRPr sz="4200" b="1">
                 <a:solidFill>
-                  <a:srgbClr val="152C3A"/>
+                  <a:srgbClr val="00355F"/>
                 </a:solidFill>
                 <a:latin typeface="Arial"/>
                 <a:ea typeface="Arial"/>
@@ -3050,7 +3065,7 @@
             <a:r>
               <a:rPr sz="4200" b="1">
                 <a:solidFill>
-                  <a:srgbClr val="152C3A"/>
+                  <a:srgbClr val="00355F"/>
                 </a:solidFill>
                 <a:latin typeface="Arial"/>
                 <a:ea typeface="Arial"/>
@@ -3066,7 +3081,7 @@
           <p:cNvPr id="3" name="From DNA constructs to functional evidence: the life science tools behind each step">
             <a:extLst xmlns:a="http://schemas.openxmlformats.org/drawingml/2006/main">
               <a:ext uri="{FF2B5EF4-FFF2-40B4-BE49-F238E27FC236}">
-                <a16:creationId xmlns:a16="http://schemas.microsoft.com/office/drawing/2014/main" id="{4B5B01AC-A5A9-4D67-94F8-E3554D747882}"/>
+                <a16:creationId xmlns:a16="http://schemas.microsoft.com/office/drawing/2014/main" id="{6231324B-5773-4FB2-8A18-46ECAB23D2F9}"/>
               </a:ext>
             </a:extLst>
           </p:cNvPr>
@@ -3094,7 +3109,7 @@
             <a:defPPr algn="l">
               <a:defRPr sz="2175" b="0">
                 <a:solidFill>
-                  <a:srgbClr val="647887"/>
+                  <a:srgbClr val="00355F"/>
                 </a:solidFill>
                 <a:latin typeface="Arial"/>
                 <a:ea typeface="Arial"/>
@@ -3110,7 +3125,7 @@
               <a:buNone/>
               <a:defRPr sz="2175" b="0">
                 <a:solidFill>
-                  <a:srgbClr val="647887"/>
+                  <a:srgbClr val="00355F"/>
                 </a:solidFill>
                 <a:latin typeface="Arial"/>
                 <a:ea typeface="Arial"/>
@@ -3120,7 +3135,7 @@
             <a:r>
               <a:rPr sz="2175" b="0">
                 <a:solidFill>
-                  <a:srgbClr val="647887"/>
+                  <a:srgbClr val="00355F"/>
                 </a:solidFill>
                 <a:latin typeface="Arial"/>
                 <a:ea typeface="Arial"/>
@@ -3136,7 +3151,7 @@
           <p:cNvPr id="4" name="Example: sequence-defined antibody candidates screened against a protein target">
             <a:extLst xmlns:a="http://schemas.openxmlformats.org/drawingml/2006/main">
               <a:ext uri="{FF2B5EF4-FFF2-40B4-BE49-F238E27FC236}">
-                <a16:creationId xmlns:a16="http://schemas.microsoft.com/office/drawing/2014/main" id="{27439540-23EE-43FB-8941-97F1F1806EDB}"/>
+                <a16:creationId xmlns:a16="http://schemas.microsoft.com/office/drawing/2014/main" id="{471400D9-D105-4E05-9DF6-A61A53D9DC20}"/>
               </a:ext>
             </a:extLst>
           </p:cNvPr>
@@ -3164,7 +3179,7 @@
             <a:defPPr algn="l">
               <a:defRPr sz="1650" b="0">
                 <a:solidFill>
-                  <a:srgbClr val="647887"/>
+                  <a:srgbClr val="00355F"/>
                 </a:solidFill>
                 <a:latin typeface="Arial"/>
                 <a:ea typeface="Arial"/>
@@ -3180,7 +3195,7 @@
               <a:buNone/>
               <a:defRPr sz="1650" b="0">
                 <a:solidFill>
-                  <a:srgbClr val="647887"/>
+                  <a:srgbClr val="00355F"/>
                 </a:solidFill>
                 <a:latin typeface="Arial"/>
                 <a:ea typeface="Arial"/>
@@ -3190,7 +3205,7 @@
             <a:r>
               <a:rPr sz="1650" b="0">
                 <a:solidFill>
-                  <a:srgbClr val="647887"/>
+                  <a:srgbClr val="00355F"/>
                 </a:solidFill>
                 <a:latin typeface="Arial"/>
                 <a:ea typeface="Arial"/>
@@ -3206,7 +3221,7 @@
           <p:cNvPr id="5" name="">
             <a:extLst xmlns:a="http://schemas.openxmlformats.org/drawingml/2006/main">
               <a:ext uri="{FF2B5EF4-FFF2-40B4-BE49-F238E27FC236}">
-                <a16:creationId xmlns:a16="http://schemas.microsoft.com/office/drawing/2014/main" id="{9AB1D5BD-C311-40DD-835F-5D5CACC0B018}"/>
+                <a16:creationId xmlns:a16="http://schemas.microsoft.com/office/drawing/2014/main" id="{F2CE3E7E-A289-4575-B532-4D98E50D6F3D}"/>
               </a:ext>
             </a:extLst>
           </p:cNvPr>
@@ -3235,7 +3250,7 @@
           <a:noFill xmlns:a="http://schemas.openxmlformats.org/drawingml/2006/main"/>
           <a:ln xmlns:a="http://schemas.openxmlformats.org/drawingml/2006/main" w="9525">
             <a:solidFill>
-              <a:srgbClr val="D7E3E8"/>
+              <a:srgbClr val="A5A5A5"/>
             </a:solidFill>
           </a:ln>
         </p:spPr>
@@ -3245,7 +3260,7 @@
           <p:cNvPr id="6" name="">
             <a:extLst xmlns:a="http://schemas.openxmlformats.org/drawingml/2006/main">
               <a:ext uri="{FF2B5EF4-FFF2-40B4-BE49-F238E27FC236}">
-                <a16:creationId xmlns:a16="http://schemas.microsoft.com/office/drawing/2014/main" id="{BC272146-AABA-42BD-8FF9-065772B75E73}"/>
+                <a16:creationId xmlns:a16="http://schemas.microsoft.com/office/drawing/2014/main" id="{D2F2A9FA-00BC-4FAE-945D-83D2D91D2A21}"/>
               </a:ext>
             </a:extLst>
           </p:cNvPr>
@@ -3265,11 +3280,11 @@
             </a:avLst>
           </a:prstGeom>
           <a:solidFill xmlns:a="http://schemas.openxmlformats.org/drawingml/2006/main">
-            <a:srgbClr val="F0F8F6"/>
+            <a:srgbClr val="EEF6FC"/>
           </a:solidFill>
           <a:ln xmlns:a="http://schemas.openxmlformats.org/drawingml/2006/main" w="14288">
             <a:solidFill>
-              <a:srgbClr val="A4CEC7"/>
+              <a:srgbClr val="7399C6"/>
             </a:solidFill>
           </a:ln>
         </p:spPr>
@@ -3279,7 +3294,7 @@
           <p:cNvPr id="7" name="BUILD  ·  Make physical samples">
             <a:extLst xmlns:a="http://schemas.openxmlformats.org/drawingml/2006/main">
               <a:ext uri="{FF2B5EF4-FFF2-40B4-BE49-F238E27FC236}">
-                <a16:creationId xmlns:a16="http://schemas.microsoft.com/office/drawing/2014/main" id="{31D83601-208F-4A98-AFEF-99D24E7A9B0F}"/>
+                <a16:creationId xmlns:a16="http://schemas.microsoft.com/office/drawing/2014/main" id="{5E5DEFD3-17AA-49E3-9130-4E68307B61F1}"/>
               </a:ext>
             </a:extLst>
           </p:cNvPr>
@@ -3307,7 +3322,7 @@
             <a:defPPr algn="l">
               <a:defRPr sz="1725" b="1">
                 <a:solidFill>
-                  <a:srgbClr val="2B62B1"/>
+                  <a:srgbClr val="00355F"/>
                 </a:solidFill>
                 <a:latin typeface="Arial"/>
                 <a:ea typeface="Arial"/>
@@ -3323,7 +3338,7 @@
               <a:buNone/>
               <a:defRPr sz="1725" b="1">
                 <a:solidFill>
-                  <a:srgbClr val="2B62B1"/>
+                  <a:srgbClr val="00355F"/>
                 </a:solidFill>
                 <a:latin typeface="Arial"/>
                 <a:ea typeface="Arial"/>
@@ -3333,7 +3348,7 @@
             <a:r>
               <a:rPr sz="1725" b="1">
                 <a:solidFill>
-                  <a:srgbClr val="2B62B1"/>
+                  <a:srgbClr val="00355F"/>
                 </a:solidFill>
                 <a:latin typeface="Arial"/>
                 <a:ea typeface="Arial"/>
@@ -3349,7 +3364,7 @@
           <p:cNvPr id="8" name="TEST  ·  Find binders">
             <a:extLst xmlns:a="http://schemas.openxmlformats.org/drawingml/2006/main">
               <a:ext uri="{FF2B5EF4-FFF2-40B4-BE49-F238E27FC236}">
-                <a16:creationId xmlns:a16="http://schemas.microsoft.com/office/drawing/2014/main" id="{F570AC51-3DAA-4C96-91A9-210D7FB735F6}"/>
+                <a16:creationId xmlns:a16="http://schemas.microsoft.com/office/drawing/2014/main" id="{4CCED74E-21DA-4BCC-A0A5-A9FFA5EFBF58}"/>
               </a:ext>
             </a:extLst>
           </p:cNvPr>
@@ -3377,7 +3392,7 @@
             <a:defPPr algn="l">
               <a:defRPr sz="1725" b="1">
                 <a:solidFill>
-                  <a:srgbClr val="007D80"/>
+                  <a:srgbClr val="00355F"/>
                 </a:solidFill>
                 <a:latin typeface="Arial"/>
                 <a:ea typeface="Arial"/>
@@ -3393,7 +3408,7 @@
               <a:buNone/>
               <a:defRPr sz="1725" b="1">
                 <a:solidFill>
-                  <a:srgbClr val="007D80"/>
+                  <a:srgbClr val="00355F"/>
                 </a:solidFill>
                 <a:latin typeface="Arial"/>
                 <a:ea typeface="Arial"/>
@@ -3403,7 +3418,7 @@
             <a:r>
               <a:rPr sz="1725" b="1">
                 <a:solidFill>
-                  <a:srgbClr val="007D80"/>
+                  <a:srgbClr val="00355F"/>
                 </a:solidFill>
                 <a:latin typeface="Arial"/>
                 <a:ea typeface="Arial"/>
@@ -3419,7 +3434,7 @@
           <p:cNvPr id="9" name="AI learning needs depth per molecule">
             <a:extLst xmlns:a="http://schemas.openxmlformats.org/drawingml/2006/main">
               <a:ext uri="{FF2B5EF4-FFF2-40B4-BE49-F238E27FC236}">
-                <a16:creationId xmlns:a16="http://schemas.microsoft.com/office/drawing/2014/main" id="{CF5F3606-EE2B-4337-99FC-4E2E5431C1ED}"/>
+                <a16:creationId xmlns:a16="http://schemas.microsoft.com/office/drawing/2014/main" id="{6E2EE95B-9B63-49B0-8C3B-EC6BAF510916}"/>
               </a:ext>
             </a:extLst>
           </p:cNvPr>
@@ -3447,7 +3462,7 @@
             <a:defPPr algn="l">
               <a:defRPr sz="1800" b="1">
                 <a:solidFill>
-                  <a:srgbClr val="007D80"/>
+                  <a:srgbClr val="00355F"/>
                 </a:solidFill>
                 <a:latin typeface="Arial"/>
                 <a:ea typeface="Arial"/>
@@ -3463,7 +3478,7 @@
               <a:buNone/>
               <a:defRPr sz="1800" b="1">
                 <a:solidFill>
-                  <a:srgbClr val="007D80"/>
+                  <a:srgbClr val="00355F"/>
                 </a:solidFill>
                 <a:latin typeface="Arial"/>
                 <a:ea typeface="Arial"/>
@@ -3473,7 +3488,7 @@
             <a:r>
               <a:rPr sz="1800" b="1">
                 <a:solidFill>
-                  <a:srgbClr val="007D80"/>
+                  <a:srgbClr val="00355F"/>
                 </a:solidFill>
                 <a:latin typeface="Arial"/>
                 <a:ea typeface="Arial"/>
@@ -3489,7 +3504,7 @@
           <p:cNvPr id="10" name="Potential constraint: comparable, reproducible assay data">
             <a:extLst xmlns:a="http://schemas.openxmlformats.org/drawingml/2006/main">
               <a:ext uri="{FF2B5EF4-FFF2-40B4-BE49-F238E27FC236}">
-                <a16:creationId xmlns:a16="http://schemas.microsoft.com/office/drawing/2014/main" id="{7CBE0BFF-E256-4342-AB5D-DB928F566024}"/>
+                <a16:creationId xmlns:a16="http://schemas.microsoft.com/office/drawing/2014/main" id="{191BF634-9544-450E-8D80-F6C2FDABC9AD}"/>
               </a:ext>
             </a:extLst>
           </p:cNvPr>
@@ -3517,7 +3532,7 @@
             <a:defPPr algn="l">
               <a:defRPr sz="1425" b="0">
                 <a:solidFill>
-                  <a:srgbClr val="647887"/>
+                  <a:srgbClr val="00355F"/>
                 </a:solidFill>
                 <a:latin typeface="Arial"/>
                 <a:ea typeface="Arial"/>
@@ -3533,7 +3548,7 @@
               <a:buNone/>
               <a:defRPr sz="1425" b="0">
                 <a:solidFill>
-                  <a:srgbClr val="647887"/>
+                  <a:srgbClr val="00355F"/>
                 </a:solidFill>
                 <a:latin typeface="Arial"/>
                 <a:ea typeface="Arial"/>
@@ -3543,7 +3558,7 @@
             <a:r>
               <a:rPr sz="1425" b="0">
                 <a:solidFill>
-                  <a:srgbClr val="647887"/>
+                  <a:srgbClr val="00355F"/>
                 </a:solidFill>
                 <a:latin typeface="Arial"/>
                 <a:ea typeface="Arial"/>
@@ -3559,7 +3574,7 @@
           <p:cNvPr id="11" name="LEARN  ·  Iterate">
             <a:extLst xmlns:a="http://schemas.openxmlformats.org/drawingml/2006/main">
               <a:ext uri="{FF2B5EF4-FFF2-40B4-BE49-F238E27FC236}">
-                <a16:creationId xmlns:a16="http://schemas.microsoft.com/office/drawing/2014/main" id="{5257D5B8-95E4-4B22-8D1A-458DDAF2005B}"/>
+                <a16:creationId xmlns:a16="http://schemas.microsoft.com/office/drawing/2014/main" id="{872438D9-6278-47CA-B3C0-CB7C9CDB5D25}"/>
               </a:ext>
             </a:extLst>
           </p:cNvPr>
@@ -3587,7 +3602,7 @@
             <a:defPPr algn="l">
               <a:defRPr sz="1725" b="1">
                 <a:solidFill>
-                  <a:srgbClr val="4D8574"/>
+                  <a:srgbClr val="00355F"/>
                 </a:solidFill>
                 <a:latin typeface="Arial"/>
                 <a:ea typeface="Arial"/>
@@ -3603,7 +3618,7 @@
               <a:buNone/>
               <a:defRPr sz="1725" b="1">
                 <a:solidFill>
-                  <a:srgbClr val="4D8574"/>
+                  <a:srgbClr val="00355F"/>
                 </a:solidFill>
                 <a:latin typeface="Arial"/>
                 <a:ea typeface="Arial"/>
@@ -3613,7 +3628,7 @@
             <a:r>
               <a:rPr sz="1725" b="1">
                 <a:solidFill>
-                  <a:srgbClr val="4D8574"/>
+                  <a:srgbClr val="00355F"/>
                 </a:solidFill>
                 <a:latin typeface="Arial"/>
                 <a:ea typeface="Arial"/>
@@ -3629,7 +3644,7 @@
           <p:cNvPr id="12" name="">
             <a:extLst xmlns:a="http://schemas.openxmlformats.org/drawingml/2006/main">
               <a:ext uri="{FF2B5EF4-FFF2-40B4-BE49-F238E27FC236}">
-                <a16:creationId xmlns:a16="http://schemas.microsoft.com/office/drawing/2014/main" id="{2508DCC6-1052-4743-B69E-A568A3C7EFF3}"/>
+                <a16:creationId xmlns:a16="http://schemas.microsoft.com/office/drawing/2014/main" id="{F3C72EF3-25C6-4241-8A04-96FB5E72C528}"/>
               </a:ext>
             </a:extLst>
           </p:cNvPr>
@@ -3649,7 +3664,7 @@
             </a:avLst>
           </a:prstGeom>
           <a:solidFill xmlns:a="http://schemas.openxmlformats.org/drawingml/2006/main">
-            <a:srgbClr val="EEF3F4"/>
+            <a:srgbClr val="EEF6FC"/>
           </a:solidFill>
           <a:ln xmlns:a="http://schemas.openxmlformats.org/drawingml/2006/main" w="9525">
             <a:noFill/>
@@ -3661,7 +3676,7 @@
           <p:cNvPr id="13" name="">
             <a:extLst xmlns:a="http://schemas.openxmlformats.org/drawingml/2006/main">
               <a:ext uri="{FF2B5EF4-FFF2-40B4-BE49-F238E27FC236}">
-                <a16:creationId xmlns:a16="http://schemas.microsoft.com/office/drawing/2014/main" id="{3BDC2BCF-7CAE-4ACD-BD6B-4B9ACF1296FC}"/>
+                <a16:creationId xmlns:a16="http://schemas.microsoft.com/office/drawing/2014/main" id="{FECBE7A6-318C-4D03-8C76-293C84578AD7}"/>
               </a:ext>
             </a:extLst>
           </p:cNvPr>
@@ -3685,7 +3700,7 @@
           </a:solidFill>
           <a:ln xmlns:a="http://schemas.openxmlformats.org/drawingml/2006/main" w="10478">
             <a:solidFill>
-              <a:srgbClr val="D7E3E8"/>
+              <a:srgbClr val="A5A5A5"/>
             </a:solidFill>
           </a:ln>
         </p:spPr>
@@ -3695,7 +3710,7 @@
           <p:cNvPr id="14" name="">
             <a:extLst xmlns:a="http://schemas.openxmlformats.org/drawingml/2006/main">
               <a:ext uri="{FF2B5EF4-FFF2-40B4-BE49-F238E27FC236}">
-                <a16:creationId xmlns:a16="http://schemas.microsoft.com/office/drawing/2014/main" id="{BEDB7FF0-2FF8-470F-BDAF-F6DA732F51BE}"/>
+                <a16:creationId xmlns:a16="http://schemas.microsoft.com/office/drawing/2014/main" id="{69F3CB49-9F83-41A9-B743-5D391DE2A184}"/>
               </a:ext>
             </a:extLst>
           </p:cNvPr>
@@ -3713,7 +3728,7 @@
             <a:avLst/>
           </a:prstGeom>
           <a:solidFill xmlns:a="http://schemas.openxmlformats.org/drawingml/2006/main">
-            <a:srgbClr val="2B62B1"/>
+            <a:srgbClr val="00355F"/>
           </a:solidFill>
           <a:ln xmlns:a="http://schemas.openxmlformats.org/drawingml/2006/main" w="9525">
             <a:noFill/>
@@ -3725,7 +3740,7 @@
           <p:cNvPr id="15" name="01  /  BUILD">
             <a:extLst xmlns:a="http://schemas.openxmlformats.org/drawingml/2006/main">
               <a:ext uri="{FF2B5EF4-FFF2-40B4-BE49-F238E27FC236}">
-                <a16:creationId xmlns:a16="http://schemas.microsoft.com/office/drawing/2014/main" id="{88E580B6-D94B-469A-A51A-7F8C9E7BD3B4}"/>
+                <a16:creationId xmlns:a16="http://schemas.microsoft.com/office/drawing/2014/main" id="{2D0FA129-D063-4F18-BDAF-6A49642DF080}"/>
               </a:ext>
             </a:extLst>
           </p:cNvPr>
@@ -3753,7 +3768,7 @@
             <a:defPPr algn="l">
               <a:defRPr sz="1500" b="1">
                 <a:solidFill>
-                  <a:srgbClr val="647887"/>
+                  <a:srgbClr val="00355F"/>
                 </a:solidFill>
                 <a:latin typeface="Arial"/>
                 <a:ea typeface="Arial"/>
@@ -3769,7 +3784,7 @@
               <a:buNone/>
               <a:defRPr sz="1500" b="1">
                 <a:solidFill>
-                  <a:srgbClr val="647887"/>
+                  <a:srgbClr val="00355F"/>
                 </a:solidFill>
                 <a:latin typeface="Arial"/>
                 <a:ea typeface="Arial"/>
@@ -3779,7 +3794,7 @@
             <a:r>
               <a:rPr sz="1500" b="1">
                 <a:solidFill>
-                  <a:srgbClr val="647887"/>
+                  <a:srgbClr val="00355F"/>
                 </a:solidFill>
                 <a:latin typeface="Arial"/>
                 <a:ea typeface="Arial"/>
@@ -3795,7 +3810,7 @@
           <p:cNvPr id="16" name="">
             <a:extLst xmlns:a="http://schemas.openxmlformats.org/drawingml/2006/main">
               <a:ext uri="{FF2B5EF4-FFF2-40B4-BE49-F238E27FC236}">
-                <a16:creationId xmlns:a16="http://schemas.microsoft.com/office/drawing/2014/main" id="{F0A2665E-F776-4B82-9005-2084052C84EB}"/>
+                <a16:creationId xmlns:a16="http://schemas.microsoft.com/office/drawing/2014/main" id="{43333BC8-8DB0-483C-B282-584B4139B45D}"/>
               </a:ext>
             </a:extLst>
           </p:cNvPr>
@@ -3805,10 +3820,10 @@
           <p:nvPr/>
         </p:nvPicPr>
         <p:blipFill>
-          <a:blip xmlns:r="http://schemas.openxmlformats.org/officeDocument/2006/relationships" xmlns:a="http://schemas.openxmlformats.org/drawingml/2006/main" r:embed="Rbd32539961964bbe">
+          <a:blip xmlns:r="http://schemas.openxmlformats.org/officeDocument/2006/relationships" xmlns:a="http://schemas.openxmlformats.org/drawingml/2006/main" r:embed="R251ea93518e843d6">
             <a:extLst>
               <a:ext uri="{96DAC541-7B7A-43D3-8B79-37D633B846F1}">
-                <asvg:svgBlip xmlns:asvg="http://schemas.microsoft.com/office/drawing/2016/SVG/main" r:embed="Reea144451cac46b6"/>
+                <asvg:svgBlip xmlns:asvg="http://schemas.microsoft.com/office/drawing/2016/SVG/main" r:embed="Re8d8ae6169ab49ee"/>
               </a:ext>
             </a:extLst>
           </a:blip>
@@ -3829,7 +3844,7 @@
           <p:cNvPr id="17" name="Construct design /">
             <a:extLst xmlns:a="http://schemas.openxmlformats.org/drawingml/2006/main">
               <a:ext uri="{FF2B5EF4-FFF2-40B4-BE49-F238E27FC236}">
-                <a16:creationId xmlns:a16="http://schemas.microsoft.com/office/drawing/2014/main" id="{B81CB8DC-835E-4F16-AD7D-0B9B2CE89D97}"/>
+                <a16:creationId xmlns:a16="http://schemas.microsoft.com/office/drawing/2014/main" id="{61788A14-F318-4139-8EB8-C382E10A1D01}"/>
               </a:ext>
             </a:extLst>
           </p:cNvPr>
@@ -3857,7 +3872,7 @@
             <a:defPPr algn="l">
               <a:defRPr sz="2325" b="1">
                 <a:solidFill>
-                  <a:srgbClr val="152C3A"/>
+                  <a:srgbClr val="00355F"/>
                 </a:solidFill>
                 <a:latin typeface="Arial"/>
                 <a:ea typeface="Arial"/>
@@ -3873,7 +3888,7 @@
               <a:buNone/>
               <a:defRPr sz="2325" b="1">
                 <a:solidFill>
-                  <a:srgbClr val="152C3A"/>
+                  <a:srgbClr val="00355F"/>
                 </a:solidFill>
                 <a:latin typeface="Arial"/>
                 <a:ea typeface="Arial"/>
@@ -3883,7 +3898,7 @@
             <a:r>
               <a:rPr sz="2325" b="1">
                 <a:solidFill>
-                  <a:srgbClr val="152C3A"/>
+                  <a:srgbClr val="00355F"/>
                 </a:solidFill>
                 <a:latin typeface="Arial"/>
                 <a:ea typeface="Arial"/>
@@ -3900,7 +3915,7 @@
               <a:buNone/>
               <a:defRPr sz="2325" b="1">
                 <a:solidFill>
-                  <a:srgbClr val="152C3A"/>
+                  <a:srgbClr val="00355F"/>
                 </a:solidFill>
                 <a:latin typeface="Arial"/>
                 <a:ea typeface="Arial"/>
@@ -3910,7 +3925,7 @@
             <a:r>
               <a:rPr sz="2325" b="1">
                 <a:solidFill>
-                  <a:srgbClr val="152C3A"/>
+                  <a:srgbClr val="00355F"/>
                 </a:solidFill>
                 <a:latin typeface="Arial"/>
                 <a:ea typeface="Arial"/>
@@ -3926,7 +3941,7 @@
           <p:cNvPr id="18" name="Encode antibody candidates">
             <a:extLst xmlns:a="http://schemas.openxmlformats.org/drawingml/2006/main">
               <a:ext uri="{FF2B5EF4-FFF2-40B4-BE49-F238E27FC236}">
-                <a16:creationId xmlns:a16="http://schemas.microsoft.com/office/drawing/2014/main" id="{CA8BB0FC-AE5A-4DEE-951B-E5F0ACB516B6}"/>
+                <a16:creationId xmlns:a16="http://schemas.microsoft.com/office/drawing/2014/main" id="{0D153260-5E23-400D-998E-4A7B8264C027}"/>
               </a:ext>
             </a:extLst>
           </p:cNvPr>
@@ -3954,7 +3969,7 @@
             <a:defPPr algn="l">
               <a:defRPr sz="1575" b="0">
                 <a:solidFill>
-                  <a:srgbClr val="647887"/>
+                  <a:srgbClr val="00355F"/>
                 </a:solidFill>
                 <a:latin typeface="Arial"/>
                 <a:ea typeface="Arial"/>
@@ -3970,7 +3985,7 @@
               <a:buNone/>
               <a:defRPr sz="1575" b="0">
                 <a:solidFill>
-                  <a:srgbClr val="647887"/>
+                  <a:srgbClr val="00355F"/>
                 </a:solidFill>
                 <a:latin typeface="Arial"/>
                 <a:ea typeface="Arial"/>
@@ -3980,7 +3995,7 @@
             <a:r>
               <a:rPr sz="1575" b="0">
                 <a:solidFill>
-                  <a:srgbClr val="647887"/>
+                  <a:srgbClr val="00355F"/>
                 </a:solidFill>
                 <a:latin typeface="Arial"/>
                 <a:ea typeface="Arial"/>
@@ -3997,7 +4012,7 @@
               <a:buNone/>
               <a:defRPr sz="1575" b="0">
                 <a:solidFill>
-                  <a:srgbClr val="647887"/>
+                  <a:srgbClr val="00355F"/>
                 </a:solidFill>
                 <a:latin typeface="Arial"/>
                 <a:ea typeface="Arial"/>
@@ -4007,7 +4022,7 @@
             <a:r>
               <a:rPr sz="1575" b="0">
                 <a:solidFill>
-                  <a:srgbClr val="647887"/>
+                  <a:srgbClr val="00355F"/>
                 </a:solidFill>
                 <a:latin typeface="Arial"/>
                 <a:ea typeface="Arial"/>
@@ -4023,7 +4038,7 @@
           <p:cNvPr id="19" name="">
             <a:extLst xmlns:a="http://schemas.openxmlformats.org/drawingml/2006/main">
               <a:ext uri="{FF2B5EF4-FFF2-40B4-BE49-F238E27FC236}">
-                <a16:creationId xmlns:a16="http://schemas.microsoft.com/office/drawing/2014/main" id="{D8D383D1-94AD-4D92-B1E9-1FF38258D694}"/>
+                <a16:creationId xmlns:a16="http://schemas.microsoft.com/office/drawing/2014/main" id="{E0985A32-BF6F-45C0-8DE4-70E512FDD16E}"/>
               </a:ext>
             </a:extLst>
           </p:cNvPr>
@@ -4043,7 +4058,7 @@
             </a:avLst>
           </a:prstGeom>
           <a:solidFill xmlns:a="http://schemas.openxmlformats.org/drawingml/2006/main">
-            <a:srgbClr val="F5F8F9"/>
+            <a:srgbClr val="F4F9FD"/>
           </a:solidFill>
           <a:ln xmlns:a="http://schemas.openxmlformats.org/drawingml/2006/main" w="9525">
             <a:noFill/>
@@ -4055,7 +4070,7 @@
           <p:cNvPr id="20" name="OUTPUT">
             <a:extLst xmlns:a="http://schemas.openxmlformats.org/drawingml/2006/main">
               <a:ext uri="{FF2B5EF4-FFF2-40B4-BE49-F238E27FC236}">
-                <a16:creationId xmlns:a16="http://schemas.microsoft.com/office/drawing/2014/main" id="{1B9605F3-DA2A-4AA3-82EC-0C780EBA2C1B}"/>
+                <a16:creationId xmlns:a16="http://schemas.microsoft.com/office/drawing/2014/main" id="{15E459B7-F2E9-429B-B5E2-646C8953003C}"/>
               </a:ext>
             </a:extLst>
           </p:cNvPr>
@@ -4083,7 +4098,7 @@
             <a:defPPr algn="l">
               <a:defRPr sz="1088" b="1">
                 <a:solidFill>
-                  <a:srgbClr val="647887"/>
+                  <a:srgbClr val="00355F"/>
                 </a:solidFill>
                 <a:latin typeface="Arial"/>
                 <a:ea typeface="Arial"/>
@@ -4099,7 +4114,7 @@
               <a:buNone/>
               <a:defRPr sz="1088" b="1">
                 <a:solidFill>
-                  <a:srgbClr val="647887"/>
+                  <a:srgbClr val="00355F"/>
                 </a:solidFill>
                 <a:latin typeface="Arial"/>
                 <a:ea typeface="Arial"/>
@@ -4109,7 +4124,7 @@
             <a:r>
               <a:rPr sz="1088" b="1">
                 <a:solidFill>
-                  <a:srgbClr val="647887"/>
+                  <a:srgbClr val="00355F"/>
                 </a:solidFill>
                 <a:latin typeface="Arial"/>
                 <a:ea typeface="Arial"/>
@@ -4125,7 +4140,7 @@
           <p:cNvPr id="21" name="Sequence + construct">
             <a:extLst xmlns:a="http://schemas.openxmlformats.org/drawingml/2006/main">
               <a:ext uri="{FF2B5EF4-FFF2-40B4-BE49-F238E27FC236}">
-                <a16:creationId xmlns:a16="http://schemas.microsoft.com/office/drawing/2014/main" id="{460E9F4B-F981-48E0-9655-306399D7C660}"/>
+                <a16:creationId xmlns:a16="http://schemas.microsoft.com/office/drawing/2014/main" id="{25657E3E-6FFD-4CD9-80EC-50DCF5E19DAF}"/>
               </a:ext>
             </a:extLst>
           </p:cNvPr>
@@ -4153,7 +4168,7 @@
             <a:defPPr algn="l">
               <a:defRPr sz="1500" b="1">
                 <a:solidFill>
-                  <a:srgbClr val="007D80"/>
+                  <a:srgbClr val="00355F"/>
                 </a:solidFill>
                 <a:latin typeface="Arial"/>
                 <a:ea typeface="Arial"/>
@@ -4169,7 +4184,7 @@
               <a:buNone/>
               <a:defRPr sz="1500" b="1">
                 <a:solidFill>
-                  <a:srgbClr val="007D80"/>
+                  <a:srgbClr val="00355F"/>
                 </a:solidFill>
                 <a:latin typeface="Arial"/>
                 <a:ea typeface="Arial"/>
@@ -4179,7 +4194,7 @@
             <a:r>
               <a:rPr sz="1500" b="1">
                 <a:solidFill>
-                  <a:srgbClr val="007D80"/>
+                  <a:srgbClr val="00355F"/>
                 </a:solidFill>
                 <a:latin typeface="Arial"/>
                 <a:ea typeface="Arial"/>
@@ -4195,7 +4210,7 @@
           <p:cNvPr id="22" name="REAGENTS">
             <a:extLst xmlns:a="http://schemas.openxmlformats.org/drawingml/2006/main">
               <a:ext uri="{FF2B5EF4-FFF2-40B4-BE49-F238E27FC236}">
-                <a16:creationId xmlns:a16="http://schemas.microsoft.com/office/drawing/2014/main" id="{57F12EF6-EF7A-4583-9421-80B810242990}"/>
+                <a16:creationId xmlns:a16="http://schemas.microsoft.com/office/drawing/2014/main" id="{FD51A4C9-24CF-431E-AE57-6AD73576F89F}"/>
               </a:ext>
             </a:extLst>
           </p:cNvPr>
@@ -4223,7 +4238,7 @@
             <a:defPPr algn="l">
               <a:defRPr sz="1238" b="1">
                 <a:solidFill>
-                  <a:srgbClr val="647887"/>
+                  <a:srgbClr val="00355F"/>
                 </a:solidFill>
                 <a:latin typeface="Arial"/>
                 <a:ea typeface="Arial"/>
@@ -4239,7 +4254,7 @@
               <a:buNone/>
               <a:defRPr sz="1238" b="1">
                 <a:solidFill>
-                  <a:srgbClr val="647887"/>
+                  <a:srgbClr val="00355F"/>
                 </a:solidFill>
                 <a:latin typeface="Arial"/>
                 <a:ea typeface="Arial"/>
@@ -4249,7 +4264,7 @@
             <a:r>
               <a:rPr sz="1238" b="1">
                 <a:solidFill>
-                  <a:srgbClr val="647887"/>
+                  <a:srgbClr val="00355F"/>
                 </a:solidFill>
                 <a:latin typeface="Arial"/>
                 <a:ea typeface="Arial"/>
@@ -4265,7 +4280,7 @@
           <p:cNvPr id="23" name="Oligos / gene fragments">
             <a:extLst xmlns:a="http://schemas.openxmlformats.org/drawingml/2006/main">
               <a:ext uri="{FF2B5EF4-FFF2-40B4-BE49-F238E27FC236}">
-                <a16:creationId xmlns:a16="http://schemas.microsoft.com/office/drawing/2014/main" id="{769EC3FF-B135-4861-8322-C2023996975D}"/>
+                <a16:creationId xmlns:a16="http://schemas.microsoft.com/office/drawing/2014/main" id="{2D73D25A-3515-4123-9EEC-8D2F306CB8C7}"/>
               </a:ext>
             </a:extLst>
           </p:cNvPr>
@@ -4293,7 +4308,7 @@
             <a:defPPr algn="l">
               <a:defRPr sz="1463" b="0">
                 <a:solidFill>
-                  <a:srgbClr val="152C3A"/>
+                  <a:srgbClr val="00355F"/>
                 </a:solidFill>
                 <a:latin typeface="Arial"/>
                 <a:ea typeface="Arial"/>
@@ -4309,7 +4324,7 @@
               <a:buNone/>
               <a:defRPr sz="1463" b="0">
                 <a:solidFill>
-                  <a:srgbClr val="152C3A"/>
+                  <a:srgbClr val="00355F"/>
                 </a:solidFill>
                 <a:latin typeface="Arial"/>
                 <a:ea typeface="Arial"/>
@@ -4319,7 +4334,7 @@
             <a:r>
               <a:rPr sz="1463" b="0">
                 <a:solidFill>
-                  <a:srgbClr val="152C3A"/>
+                  <a:srgbClr val="00355F"/>
                 </a:solidFill>
                 <a:latin typeface="Arial"/>
                 <a:ea typeface="Arial"/>
@@ -4336,7 +4351,7 @@
               <a:buNone/>
               <a:defRPr sz="1463" b="0">
                 <a:solidFill>
-                  <a:srgbClr val="152C3A"/>
+                  <a:srgbClr val="00355F"/>
                 </a:solidFill>
                 <a:latin typeface="Arial"/>
                 <a:ea typeface="Arial"/>
@@ -4346,7 +4361,7 @@
             <a:r>
               <a:rPr sz="1463" b="0">
                 <a:solidFill>
-                  <a:srgbClr val="152C3A"/>
+                  <a:srgbClr val="00355F"/>
                 </a:solidFill>
                 <a:latin typeface="Arial"/>
                 <a:ea typeface="Arial"/>
@@ -4363,7 +4378,7 @@
               <a:buNone/>
               <a:defRPr sz="1463" b="0">
                 <a:solidFill>
-                  <a:srgbClr val="152C3A"/>
+                  <a:srgbClr val="00355F"/>
                 </a:solidFill>
                 <a:latin typeface="Arial"/>
                 <a:ea typeface="Arial"/>
@@ -4373,7 +4388,7 @@
             <a:r>
               <a:rPr sz="1463" b="0">
                 <a:solidFill>
-                  <a:srgbClr val="152C3A"/>
+                  <a:srgbClr val="00355F"/>
                 </a:solidFill>
                 <a:latin typeface="Arial"/>
                 <a:ea typeface="Arial"/>
@@ -4389,7 +4404,7 @@
           <p:cNvPr id="24" name="INSTRUMENTS">
             <a:extLst xmlns:a="http://schemas.openxmlformats.org/drawingml/2006/main">
               <a:ext uri="{FF2B5EF4-FFF2-40B4-BE49-F238E27FC236}">
-                <a16:creationId xmlns:a16="http://schemas.microsoft.com/office/drawing/2014/main" id="{E55B55A5-E6ED-4484-B4D3-ABDFD18F0CC3}"/>
+                <a16:creationId xmlns:a16="http://schemas.microsoft.com/office/drawing/2014/main" id="{547FD7DE-4D66-4677-A7C2-B61782743E18}"/>
               </a:ext>
             </a:extLst>
           </p:cNvPr>
@@ -4417,7 +4432,7 @@
             <a:defPPr algn="l">
               <a:defRPr sz="1238" b="1">
                 <a:solidFill>
-                  <a:srgbClr val="647887"/>
+                  <a:srgbClr val="00355F"/>
                 </a:solidFill>
                 <a:latin typeface="Arial"/>
                 <a:ea typeface="Arial"/>
@@ -4433,7 +4448,7 @@
               <a:buNone/>
               <a:defRPr sz="1238" b="1">
                 <a:solidFill>
-                  <a:srgbClr val="647887"/>
+                  <a:srgbClr val="00355F"/>
                 </a:solidFill>
                 <a:latin typeface="Arial"/>
                 <a:ea typeface="Arial"/>
@@ -4443,7 +4458,7 @@
             <a:r>
               <a:rPr sz="1238" b="1">
                 <a:solidFill>
-                  <a:srgbClr val="647887"/>
+                  <a:srgbClr val="00355F"/>
                 </a:solidFill>
                 <a:latin typeface="Arial"/>
                 <a:ea typeface="Arial"/>
@@ -4459,7 +4474,7 @@
           <p:cNvPr id="25" name="Thermocycler">
             <a:extLst xmlns:a="http://schemas.openxmlformats.org/drawingml/2006/main">
               <a:ext uri="{FF2B5EF4-FFF2-40B4-BE49-F238E27FC236}">
-                <a16:creationId xmlns:a16="http://schemas.microsoft.com/office/drawing/2014/main" id="{5656FB97-B743-42F1-8EAC-09CC47E92264}"/>
+                <a16:creationId xmlns:a16="http://schemas.microsoft.com/office/drawing/2014/main" id="{E100B80B-ED00-4AA0-B02A-22AFDDD4D64C}"/>
               </a:ext>
             </a:extLst>
           </p:cNvPr>
@@ -4487,7 +4502,7 @@
             <a:defPPr algn="l">
               <a:defRPr sz="1463" b="0">
                 <a:solidFill>
-                  <a:srgbClr val="152C3A"/>
+                  <a:srgbClr val="00355F"/>
                 </a:solidFill>
                 <a:latin typeface="Arial"/>
                 <a:ea typeface="Arial"/>
@@ -4503,7 +4518,7 @@
               <a:buNone/>
               <a:defRPr sz="1463" b="0">
                 <a:solidFill>
-                  <a:srgbClr val="152C3A"/>
+                  <a:srgbClr val="00355F"/>
                 </a:solidFill>
                 <a:latin typeface="Arial"/>
                 <a:ea typeface="Arial"/>
@@ -4513,7 +4528,7 @@
             <a:r>
               <a:rPr sz="1463" b="0">
                 <a:solidFill>
-                  <a:srgbClr val="152C3A"/>
+                  <a:srgbClr val="00355F"/>
                 </a:solidFill>
                 <a:latin typeface="Arial"/>
                 <a:ea typeface="Arial"/>
@@ -4530,7 +4545,7 @@
               <a:buNone/>
               <a:defRPr sz="1463" b="0">
                 <a:solidFill>
-                  <a:srgbClr val="152C3A"/>
+                  <a:srgbClr val="00355F"/>
                 </a:solidFill>
                 <a:latin typeface="Arial"/>
                 <a:ea typeface="Arial"/>
@@ -4540,7 +4555,7 @@
             <a:r>
               <a:rPr sz="1463" b="0">
                 <a:solidFill>
-                  <a:srgbClr val="152C3A"/>
+                  <a:srgbClr val="00355F"/>
                 </a:solidFill>
                 <a:latin typeface="Arial"/>
                 <a:ea typeface="Arial"/>
@@ -4557,7 +4572,7 @@
               <a:buNone/>
               <a:defRPr sz="1463" b="0">
                 <a:solidFill>
-                  <a:srgbClr val="152C3A"/>
+                  <a:srgbClr val="00355F"/>
                 </a:solidFill>
                 <a:latin typeface="Arial"/>
                 <a:ea typeface="Arial"/>
@@ -4567,7 +4582,7 @@
             <a:r>
               <a:rPr sz="1463" b="0">
                 <a:solidFill>
-                  <a:srgbClr val="152C3A"/>
+                  <a:srgbClr val="00355F"/>
                 </a:solidFill>
                 <a:latin typeface="Arial"/>
                 <a:ea typeface="Arial"/>
@@ -4583,7 +4598,7 @@
           <p:cNvPr id="26" name="CONSUMABLES">
             <a:extLst xmlns:a="http://schemas.openxmlformats.org/drawingml/2006/main">
               <a:ext uri="{FF2B5EF4-FFF2-40B4-BE49-F238E27FC236}">
-                <a16:creationId xmlns:a16="http://schemas.microsoft.com/office/drawing/2014/main" id="{3A9522C4-BDC4-4389-9BBE-FF45161719F5}"/>
+                <a16:creationId xmlns:a16="http://schemas.microsoft.com/office/drawing/2014/main" id="{9D31D676-97CD-4390-9E97-33D1C7047020}"/>
               </a:ext>
             </a:extLst>
           </p:cNvPr>
@@ -4611,7 +4626,7 @@
             <a:defPPr algn="l">
               <a:defRPr sz="1238" b="1">
                 <a:solidFill>
-                  <a:srgbClr val="647887"/>
+                  <a:srgbClr val="00355F"/>
                 </a:solidFill>
                 <a:latin typeface="Arial"/>
                 <a:ea typeface="Arial"/>
@@ -4627,7 +4642,7 @@
               <a:buNone/>
               <a:defRPr sz="1238" b="1">
                 <a:solidFill>
-                  <a:srgbClr val="647887"/>
+                  <a:srgbClr val="00355F"/>
                 </a:solidFill>
                 <a:latin typeface="Arial"/>
                 <a:ea typeface="Arial"/>
@@ -4637,7 +4652,7 @@
             <a:r>
               <a:rPr sz="1238" b="1">
                 <a:solidFill>
-                  <a:srgbClr val="647887"/>
+                  <a:srgbClr val="00355F"/>
                 </a:solidFill>
                 <a:latin typeface="Arial"/>
                 <a:ea typeface="Arial"/>
@@ -4653,7 +4668,7 @@
           <p:cNvPr id="27" name="PCR / deep-well plates">
             <a:extLst xmlns:a="http://schemas.openxmlformats.org/drawingml/2006/main">
               <a:ext uri="{FF2B5EF4-FFF2-40B4-BE49-F238E27FC236}">
-                <a16:creationId xmlns:a16="http://schemas.microsoft.com/office/drawing/2014/main" id="{65E67D35-5E16-4FE0-905D-2566008272C9}"/>
+                <a16:creationId xmlns:a16="http://schemas.microsoft.com/office/drawing/2014/main" id="{3884935D-04E3-4973-A0AD-5A977B8F3689}"/>
               </a:ext>
             </a:extLst>
           </p:cNvPr>
@@ -4681,7 +4696,7 @@
             <a:defPPr algn="l">
               <a:defRPr sz="1463" b="0">
                 <a:solidFill>
-                  <a:srgbClr val="152C3A"/>
+                  <a:srgbClr val="00355F"/>
                 </a:solidFill>
                 <a:latin typeface="Arial"/>
                 <a:ea typeface="Arial"/>
@@ -4697,7 +4712,7 @@
               <a:buNone/>
               <a:defRPr sz="1463" b="0">
                 <a:solidFill>
-                  <a:srgbClr val="152C3A"/>
+                  <a:srgbClr val="00355F"/>
                 </a:solidFill>
                 <a:latin typeface="Arial"/>
                 <a:ea typeface="Arial"/>
@@ -4707,7 +4722,7 @@
             <a:r>
               <a:rPr sz="1463" b="0">
                 <a:solidFill>
-                  <a:srgbClr val="152C3A"/>
+                  <a:srgbClr val="00355F"/>
                 </a:solidFill>
                 <a:latin typeface="Arial"/>
                 <a:ea typeface="Arial"/>
@@ -4724,7 +4739,7 @@
               <a:buNone/>
               <a:defRPr sz="1463" b="0">
                 <a:solidFill>
-                  <a:srgbClr val="152C3A"/>
+                  <a:srgbClr val="00355F"/>
                 </a:solidFill>
                 <a:latin typeface="Arial"/>
                 <a:ea typeface="Arial"/>
@@ -4734,7 +4749,7 @@
             <a:r>
               <a:rPr sz="1463" b="0">
                 <a:solidFill>
-                  <a:srgbClr val="152C3A"/>
+                  <a:srgbClr val="00355F"/>
                 </a:solidFill>
                 <a:latin typeface="Arial"/>
                 <a:ea typeface="Arial"/>
@@ -4750,7 +4765,7 @@
           <p:cNvPr id="28" name="">
             <a:extLst xmlns:a="http://schemas.openxmlformats.org/drawingml/2006/main">
               <a:ext uri="{FF2B5EF4-FFF2-40B4-BE49-F238E27FC236}">
-                <a16:creationId xmlns:a16="http://schemas.microsoft.com/office/drawing/2014/main" id="{9453BCDA-2388-460A-AB00-FDE5420DA99A}"/>
+                <a16:creationId xmlns:a16="http://schemas.microsoft.com/office/drawing/2014/main" id="{FCBCEF9C-EAF2-4593-AE3B-ABB61B71F7E2}"/>
               </a:ext>
             </a:extLst>
           </p:cNvPr>
@@ -4779,7 +4794,7 @@
           <a:noFill xmlns:a="http://schemas.openxmlformats.org/drawingml/2006/main"/>
           <a:ln xmlns:a="http://schemas.openxmlformats.org/drawingml/2006/main" w="9525">
             <a:solidFill>
-              <a:srgbClr val="D7E3E8"/>
+              <a:srgbClr val="A5A5A5"/>
             </a:solidFill>
           </a:ln>
         </p:spPr>
@@ -4789,7 +4804,7 @@
           <p:cNvPr id="29" name="REPRESENTATIVE SUPPLIERS">
             <a:extLst xmlns:a="http://schemas.openxmlformats.org/drawingml/2006/main">
               <a:ext uri="{FF2B5EF4-FFF2-40B4-BE49-F238E27FC236}">
-                <a16:creationId xmlns:a16="http://schemas.microsoft.com/office/drawing/2014/main" id="{3D1321AD-F256-4041-ACB9-95F7792A2A28}"/>
+                <a16:creationId xmlns:a16="http://schemas.microsoft.com/office/drawing/2014/main" id="{013FB253-DB02-4DD4-8A01-C194A0C31273}"/>
               </a:ext>
             </a:extLst>
           </p:cNvPr>
@@ -4817,7 +4832,7 @@
             <a:defPPr algn="l">
               <a:defRPr sz="1163" b="1">
                 <a:solidFill>
-                  <a:srgbClr val="647887"/>
+                  <a:srgbClr val="00355F"/>
                 </a:solidFill>
                 <a:latin typeface="Arial"/>
                 <a:ea typeface="Arial"/>
@@ -4833,7 +4848,7 @@
               <a:buNone/>
               <a:defRPr sz="1163" b="1">
                 <a:solidFill>
-                  <a:srgbClr val="647887"/>
+                  <a:srgbClr val="00355F"/>
                 </a:solidFill>
                 <a:latin typeface="Arial"/>
                 <a:ea typeface="Arial"/>
@@ -4843,7 +4858,7 @@
             <a:r>
               <a:rPr sz="1163" b="1">
                 <a:solidFill>
-                  <a:srgbClr val="647887"/>
+                  <a:srgbClr val="00355F"/>
                 </a:solidFill>
                 <a:latin typeface="Arial"/>
                 <a:ea typeface="Arial"/>
@@ -4859,7 +4874,7 @@
           <p:cNvPr id="30" name="">
             <a:extLst xmlns:a="http://schemas.openxmlformats.org/drawingml/2006/main">
               <a:ext uri="{FF2B5EF4-FFF2-40B4-BE49-F238E27FC236}">
-                <a16:creationId xmlns:a16="http://schemas.microsoft.com/office/drawing/2014/main" id="{346DBFF1-13BF-4172-AB80-91C4F587916A}"/>
+                <a16:creationId xmlns:a16="http://schemas.microsoft.com/office/drawing/2014/main" id="{C3A4D06B-4105-4A47-A3AA-AF05D6B94342}"/>
               </a:ext>
             </a:extLst>
           </p:cNvPr>
@@ -4869,7 +4884,7 @@
           <p:nvPr/>
         </p:nvPicPr>
         <p:blipFill>
-          <a:blip xmlns:r="http://schemas.openxmlformats.org/officeDocument/2006/relationships" xmlns:a="http://schemas.openxmlformats.org/drawingml/2006/main" r:embed="Rf449c52044fa4021"/>
+          <a:blip xmlns:r="http://schemas.openxmlformats.org/officeDocument/2006/relationships" xmlns:a="http://schemas.openxmlformats.org/drawingml/2006/main" r:embed="R1057b9b5ac8a4464"/>
           <a:stretch xmlns:a="http://schemas.openxmlformats.org/drawingml/2006/main"/>
         </p:blipFill>
         <p:spPr>
@@ -4887,7 +4902,7 @@
           <p:cNvPr id="31" name="">
             <a:extLst xmlns:a="http://schemas.openxmlformats.org/drawingml/2006/main">
               <a:ext uri="{FF2B5EF4-FFF2-40B4-BE49-F238E27FC236}">
-                <a16:creationId xmlns:a16="http://schemas.microsoft.com/office/drawing/2014/main" id="{E8049837-B07B-4BD8-A156-021568A2BB77}"/>
+                <a16:creationId xmlns:a16="http://schemas.microsoft.com/office/drawing/2014/main" id="{DD3C1D87-469E-41A0-A3B3-7B562BD406F4}"/>
               </a:ext>
             </a:extLst>
           </p:cNvPr>
@@ -4897,7 +4912,7 @@
           <p:nvPr/>
         </p:nvPicPr>
         <p:blipFill>
-          <a:blip xmlns:r="http://schemas.openxmlformats.org/officeDocument/2006/relationships" xmlns:a="http://schemas.openxmlformats.org/drawingml/2006/main" r:embed="R0f5c612c079f4851"/>
+          <a:blip xmlns:r="http://schemas.openxmlformats.org/officeDocument/2006/relationships" xmlns:a="http://schemas.openxmlformats.org/drawingml/2006/main" r:embed="Rb5e949b90c404a9e"/>
           <a:stretch xmlns:a="http://schemas.openxmlformats.org/drawingml/2006/main"/>
         </p:blipFill>
         <p:spPr>
@@ -4915,7 +4930,7 @@
           <p:cNvPr id="32" name="Tsingke · Vazyme">
             <a:extLst xmlns:a="http://schemas.openxmlformats.org/drawingml/2006/main">
               <a:ext uri="{FF2B5EF4-FFF2-40B4-BE49-F238E27FC236}">
-                <a16:creationId xmlns:a16="http://schemas.microsoft.com/office/drawing/2014/main" id="{076E9612-5AF0-4851-975E-47B962E8437C}"/>
+                <a16:creationId xmlns:a16="http://schemas.microsoft.com/office/drawing/2014/main" id="{A1C5F813-5052-468E-A3A0-E61B94A00097}"/>
               </a:ext>
             </a:extLst>
           </p:cNvPr>
@@ -4943,7 +4958,7 @@
             <a:defPPr algn="l">
               <a:defRPr sz="1275" b="0">
                 <a:solidFill>
-                  <a:srgbClr val="647887"/>
+                  <a:srgbClr val="00355F"/>
                 </a:solidFill>
                 <a:latin typeface="Arial"/>
                 <a:ea typeface="Arial"/>
@@ -4959,7 +4974,7 @@
               <a:buNone/>
               <a:defRPr sz="1275" b="0">
                 <a:solidFill>
-                  <a:srgbClr val="647887"/>
+                  <a:srgbClr val="00355F"/>
                 </a:solidFill>
                 <a:latin typeface="Arial"/>
                 <a:ea typeface="Arial"/>
@@ -4969,7 +4984,7 @@
             <a:r>
               <a:rPr sz="1275" b="0">
                 <a:solidFill>
-                  <a:srgbClr val="647887"/>
+                  <a:srgbClr val="00355F"/>
                 </a:solidFill>
                 <a:latin typeface="Arial"/>
                 <a:ea typeface="Arial"/>
@@ -4986,7 +5001,7 @@
               <a:buNone/>
               <a:defRPr sz="1275" b="0">
                 <a:solidFill>
-                  <a:srgbClr val="647887"/>
+                  <a:srgbClr val="00355F"/>
                 </a:solidFill>
                 <a:latin typeface="Arial"/>
                 <a:ea typeface="Arial"/>
@@ -4996,7 +5011,7 @@
             <a:r>
               <a:rPr sz="1275" b="0">
                 <a:solidFill>
-                  <a:srgbClr val="647887"/>
+                  <a:srgbClr val="00355F"/>
                 </a:solidFill>
                 <a:latin typeface="Arial"/>
                 <a:ea typeface="Arial"/>
@@ -5012,7 +5027,7 @@
           <p:cNvPr id="33" name="">
             <a:extLst xmlns:a="http://schemas.openxmlformats.org/drawingml/2006/main">
               <a:ext uri="{FF2B5EF4-FFF2-40B4-BE49-F238E27FC236}">
-                <a16:creationId xmlns:a16="http://schemas.microsoft.com/office/drawing/2014/main" id="{D2BC6B5B-AADF-4C7F-B856-7A79A2F64C81}"/>
+                <a16:creationId xmlns:a16="http://schemas.microsoft.com/office/drawing/2014/main" id="{03613DA0-5584-4190-987A-822C05B198D7}"/>
               </a:ext>
             </a:extLst>
           </p:cNvPr>
@@ -5032,7 +5047,7 @@
             </a:avLst>
           </a:prstGeom>
           <a:solidFill xmlns:a="http://schemas.openxmlformats.org/drawingml/2006/main">
-            <a:srgbClr val="EEF3F4"/>
+            <a:srgbClr val="EEF6FC"/>
           </a:solidFill>
           <a:ln xmlns:a="http://schemas.openxmlformats.org/drawingml/2006/main" w="9525">
             <a:noFill/>
@@ -5044,7 +5059,7 @@
           <p:cNvPr id="34" name="">
             <a:extLst xmlns:a="http://schemas.openxmlformats.org/drawingml/2006/main">
               <a:ext uri="{FF2B5EF4-FFF2-40B4-BE49-F238E27FC236}">
-                <a16:creationId xmlns:a16="http://schemas.microsoft.com/office/drawing/2014/main" id="{2F0AF960-6E52-463E-8A10-09BDC237BCCF}"/>
+                <a16:creationId xmlns:a16="http://schemas.microsoft.com/office/drawing/2014/main" id="{27EC5BAB-AC29-4B4A-80BC-D605DB7DA7B4}"/>
               </a:ext>
             </a:extLst>
           </p:cNvPr>
@@ -5068,7 +5083,7 @@
           </a:solidFill>
           <a:ln xmlns:a="http://schemas.openxmlformats.org/drawingml/2006/main" w="10478">
             <a:solidFill>
-              <a:srgbClr val="D7E3E8"/>
+              <a:srgbClr val="A5A5A5"/>
             </a:solidFill>
           </a:ln>
         </p:spPr>
@@ -5078,7 +5093,7 @@
           <p:cNvPr id="35" name="">
             <a:extLst xmlns:a="http://schemas.openxmlformats.org/drawingml/2006/main">
               <a:ext uri="{FF2B5EF4-FFF2-40B4-BE49-F238E27FC236}">
-                <a16:creationId xmlns:a16="http://schemas.microsoft.com/office/drawing/2014/main" id="{B01392BD-241C-471F-B4DC-B4EC77CC502F}"/>
+                <a16:creationId xmlns:a16="http://schemas.microsoft.com/office/drawing/2014/main" id="{5DBF13DA-C5E9-4D21-8C1D-B6D87F938EC8}"/>
               </a:ext>
             </a:extLst>
           </p:cNvPr>
@@ -5096,7 +5111,7 @@
             <a:avLst/>
           </a:prstGeom>
           <a:solidFill xmlns:a="http://schemas.openxmlformats.org/drawingml/2006/main">
-            <a:srgbClr val="2B62B1"/>
+            <a:srgbClr val="00355F"/>
           </a:solidFill>
           <a:ln xmlns:a="http://schemas.openxmlformats.org/drawingml/2006/main" w="9525">
             <a:noFill/>
@@ -5108,7 +5123,7 @@
           <p:cNvPr id="36" name="02  /  BUILD">
             <a:extLst xmlns:a="http://schemas.openxmlformats.org/drawingml/2006/main">
               <a:ext uri="{FF2B5EF4-FFF2-40B4-BE49-F238E27FC236}">
-                <a16:creationId xmlns:a16="http://schemas.microsoft.com/office/drawing/2014/main" id="{99DE8608-8D34-49EE-B182-DB5535BFDD9D}"/>
+                <a16:creationId xmlns:a16="http://schemas.microsoft.com/office/drawing/2014/main" id="{8F36E7E6-116C-4A7F-8E88-38A18A2D9513}"/>
               </a:ext>
             </a:extLst>
           </p:cNvPr>
@@ -5136,7 +5151,7 @@
             <a:defPPr algn="l">
               <a:defRPr sz="1500" b="1">
                 <a:solidFill>
-                  <a:srgbClr val="647887"/>
+                  <a:srgbClr val="00355F"/>
                 </a:solidFill>
                 <a:latin typeface="Arial"/>
                 <a:ea typeface="Arial"/>
@@ -5152,7 +5167,7 @@
               <a:buNone/>
               <a:defRPr sz="1500" b="1">
                 <a:solidFill>
-                  <a:srgbClr val="647887"/>
+                  <a:srgbClr val="00355F"/>
                 </a:solidFill>
                 <a:latin typeface="Arial"/>
                 <a:ea typeface="Arial"/>
@@ -5162,7 +5177,7 @@
             <a:r>
               <a:rPr sz="1500" b="1">
                 <a:solidFill>
-                  <a:srgbClr val="647887"/>
+                  <a:srgbClr val="00355F"/>
                 </a:solidFill>
                 <a:latin typeface="Arial"/>
                 <a:ea typeface="Arial"/>
@@ -5178,7 +5193,7 @@
           <p:cNvPr id="37" name="">
             <a:extLst xmlns:a="http://schemas.openxmlformats.org/drawingml/2006/main">
               <a:ext uri="{FF2B5EF4-FFF2-40B4-BE49-F238E27FC236}">
-                <a16:creationId xmlns:a16="http://schemas.microsoft.com/office/drawing/2014/main" id="{EC74D402-922A-4BB2-887E-534F32B41DAD}"/>
+                <a16:creationId xmlns:a16="http://schemas.microsoft.com/office/drawing/2014/main" id="{E02ECC79-5C93-4BD8-B4AC-6EF01A709F57}"/>
               </a:ext>
             </a:extLst>
           </p:cNvPr>
@@ -5188,10 +5203,10 @@
           <p:nvPr/>
         </p:nvPicPr>
         <p:blipFill>
-          <a:blip xmlns:r="http://schemas.openxmlformats.org/officeDocument/2006/relationships" xmlns:a="http://schemas.openxmlformats.org/drawingml/2006/main" r:embed="Rd203d78771554afe">
+          <a:blip xmlns:r="http://schemas.openxmlformats.org/officeDocument/2006/relationships" xmlns:a="http://schemas.openxmlformats.org/drawingml/2006/main" r:embed="R40950b02b0014438">
             <a:extLst>
               <a:ext uri="{96DAC541-7B7A-43D3-8B79-37D633B846F1}">
-                <asvg:svgBlip xmlns:asvg="http://schemas.microsoft.com/office/drawing/2016/SVG/main" r:embed="R585d4fc4272c4b16"/>
+                <asvg:svgBlip xmlns:asvg="http://schemas.microsoft.com/office/drawing/2016/SVG/main" r:embed="R3a7215ed734649d7"/>
               </a:ext>
             </a:extLst>
           </a:blip>
@@ -5212,7 +5227,7 @@
           <p:cNvPr id="38" name="Protein expression">
             <a:extLst xmlns:a="http://schemas.openxmlformats.org/drawingml/2006/main">
               <a:ext uri="{FF2B5EF4-FFF2-40B4-BE49-F238E27FC236}">
-                <a16:creationId xmlns:a16="http://schemas.microsoft.com/office/drawing/2014/main" id="{27CA168B-CDCC-496F-A69A-5F7F14B9024B}"/>
+                <a16:creationId xmlns:a16="http://schemas.microsoft.com/office/drawing/2014/main" id="{1242124B-C233-4B21-BFEC-5494805CDBA4}"/>
               </a:ext>
             </a:extLst>
           </p:cNvPr>
@@ -5240,7 +5255,7 @@
             <a:defPPr algn="l">
               <a:defRPr sz="2325" b="1">
                 <a:solidFill>
-                  <a:srgbClr val="152C3A"/>
+                  <a:srgbClr val="00355F"/>
                 </a:solidFill>
                 <a:latin typeface="Arial"/>
                 <a:ea typeface="Arial"/>
@@ -5256,7 +5271,7 @@
               <a:buNone/>
               <a:defRPr sz="2325" b="1">
                 <a:solidFill>
-                  <a:srgbClr val="152C3A"/>
+                  <a:srgbClr val="00355F"/>
                 </a:solidFill>
                 <a:latin typeface="Arial"/>
                 <a:ea typeface="Arial"/>
@@ -5266,7 +5281,7 @@
             <a:r>
               <a:rPr sz="2325" b="1">
                 <a:solidFill>
-                  <a:srgbClr val="152C3A"/>
+                  <a:srgbClr val="00355F"/>
                 </a:solidFill>
                 <a:latin typeface="Arial"/>
                 <a:ea typeface="Arial"/>
@@ -5283,7 +5298,7 @@
               <a:buNone/>
               <a:defRPr sz="2325" b="1">
                 <a:solidFill>
-                  <a:srgbClr val="152C3A"/>
+                  <a:srgbClr val="00355F"/>
                 </a:solidFill>
                 <a:latin typeface="Arial"/>
                 <a:ea typeface="Arial"/>
@@ -5293,7 +5308,7 @@
             <a:r>
               <a:rPr sz="2325" b="1">
                 <a:solidFill>
-                  <a:srgbClr val="152C3A"/>
+                  <a:srgbClr val="00355F"/>
                 </a:solidFill>
                 <a:latin typeface="Arial"/>
                 <a:ea typeface="Arial"/>
@@ -5309,7 +5324,7 @@
           <p:cNvPr id="39" name="Produce candidate antibodies">
             <a:extLst xmlns:a="http://schemas.openxmlformats.org/drawingml/2006/main">
               <a:ext uri="{FF2B5EF4-FFF2-40B4-BE49-F238E27FC236}">
-                <a16:creationId xmlns:a16="http://schemas.microsoft.com/office/drawing/2014/main" id="{E7C8DC11-8C70-412A-ACA5-BBE2FAEB5A56}"/>
+                <a16:creationId xmlns:a16="http://schemas.microsoft.com/office/drawing/2014/main" id="{1C80A8F6-06C1-40F9-8B7D-3A1D828B4A3A}"/>
               </a:ext>
             </a:extLst>
           </p:cNvPr>
@@ -5337,7 +5352,7 @@
             <a:defPPr algn="l">
               <a:defRPr sz="1575" b="0">
                 <a:solidFill>
-                  <a:srgbClr val="647887"/>
+                  <a:srgbClr val="00355F"/>
                 </a:solidFill>
                 <a:latin typeface="Arial"/>
                 <a:ea typeface="Arial"/>
@@ -5353,7 +5368,7 @@
               <a:buNone/>
               <a:defRPr sz="1575" b="0">
                 <a:solidFill>
-                  <a:srgbClr val="647887"/>
+                  <a:srgbClr val="00355F"/>
                 </a:solidFill>
                 <a:latin typeface="Arial"/>
                 <a:ea typeface="Arial"/>
@@ -5363,7 +5378,7 @@
             <a:r>
               <a:rPr sz="1575" b="0">
                 <a:solidFill>
-                  <a:srgbClr val="647887"/>
+                  <a:srgbClr val="00355F"/>
                 </a:solidFill>
                 <a:latin typeface="Arial"/>
                 <a:ea typeface="Arial"/>
@@ -5380,7 +5395,7 @@
               <a:buNone/>
               <a:defRPr sz="1575" b="0">
                 <a:solidFill>
-                  <a:srgbClr val="647887"/>
+                  <a:srgbClr val="00355F"/>
                 </a:solidFill>
                 <a:latin typeface="Arial"/>
                 <a:ea typeface="Arial"/>
@@ -5390,7 +5405,7 @@
             <a:r>
               <a:rPr sz="1575" b="0">
                 <a:solidFill>
-                  <a:srgbClr val="647887"/>
+                  <a:srgbClr val="00355F"/>
                 </a:solidFill>
                 <a:latin typeface="Arial"/>
                 <a:ea typeface="Arial"/>
@@ -5406,7 +5421,7 @@
           <p:cNvPr id="40" name="">
             <a:extLst xmlns:a="http://schemas.openxmlformats.org/drawingml/2006/main">
               <a:ext uri="{FF2B5EF4-FFF2-40B4-BE49-F238E27FC236}">
-                <a16:creationId xmlns:a16="http://schemas.microsoft.com/office/drawing/2014/main" id="{29AE2665-D8E7-4623-86A2-32141FC294BC}"/>
+                <a16:creationId xmlns:a16="http://schemas.microsoft.com/office/drawing/2014/main" id="{A5DA23E7-993F-4976-AC8B-EE1292D8C0DA}"/>
               </a:ext>
             </a:extLst>
           </p:cNvPr>
@@ -5426,7 +5441,7 @@
             </a:avLst>
           </a:prstGeom>
           <a:solidFill xmlns:a="http://schemas.openxmlformats.org/drawingml/2006/main">
-            <a:srgbClr val="F5F8F9"/>
+            <a:srgbClr val="F4F9FD"/>
           </a:solidFill>
           <a:ln xmlns:a="http://schemas.openxmlformats.org/drawingml/2006/main" w="9525">
             <a:noFill/>
@@ -5438,7 +5453,7 @@
           <p:cNvPr id="41" name="OUTPUT">
             <a:extLst xmlns:a="http://schemas.openxmlformats.org/drawingml/2006/main">
               <a:ext uri="{FF2B5EF4-FFF2-40B4-BE49-F238E27FC236}">
-                <a16:creationId xmlns:a16="http://schemas.microsoft.com/office/drawing/2014/main" id="{31B1A08C-0844-41D2-8AEA-2E8B6CDC1FCA}"/>
+                <a16:creationId xmlns:a16="http://schemas.microsoft.com/office/drawing/2014/main" id="{C04AE4EE-C0FD-4ACA-8BEB-884B58173A95}"/>
               </a:ext>
             </a:extLst>
           </p:cNvPr>
@@ -5466,7 +5481,7 @@
             <a:defPPr algn="l">
               <a:defRPr sz="1088" b="1">
                 <a:solidFill>
-                  <a:srgbClr val="647887"/>
+                  <a:srgbClr val="00355F"/>
                 </a:solidFill>
                 <a:latin typeface="Arial"/>
                 <a:ea typeface="Arial"/>
@@ -5482,7 +5497,7 @@
               <a:buNone/>
               <a:defRPr sz="1088" b="1">
                 <a:solidFill>
-                  <a:srgbClr val="647887"/>
+                  <a:srgbClr val="00355F"/>
                 </a:solidFill>
                 <a:latin typeface="Arial"/>
                 <a:ea typeface="Arial"/>
@@ -5492,7 +5507,7 @@
             <a:r>
               <a:rPr sz="1088" b="1">
                 <a:solidFill>
-                  <a:srgbClr val="647887"/>
+                  <a:srgbClr val="00355F"/>
                 </a:solidFill>
                 <a:latin typeface="Arial"/>
                 <a:ea typeface="Arial"/>
@@ -5508,7 +5523,7 @@
           <p:cNvPr id="42" name="Purified samples + yield">
             <a:extLst xmlns:a="http://schemas.openxmlformats.org/drawingml/2006/main">
               <a:ext uri="{FF2B5EF4-FFF2-40B4-BE49-F238E27FC236}">
-                <a16:creationId xmlns:a16="http://schemas.microsoft.com/office/drawing/2014/main" id="{D8F7F9B1-8853-40DF-B09B-E1844884AC54}"/>
+                <a16:creationId xmlns:a16="http://schemas.microsoft.com/office/drawing/2014/main" id="{DE2BAFC8-B6B5-4228-A21F-02C5719984CB}"/>
               </a:ext>
             </a:extLst>
           </p:cNvPr>
@@ -5536,7 +5551,7 @@
             <a:defPPr algn="l">
               <a:defRPr sz="1500" b="1">
                 <a:solidFill>
-                  <a:srgbClr val="007D80"/>
+                  <a:srgbClr val="00355F"/>
                 </a:solidFill>
                 <a:latin typeface="Arial"/>
                 <a:ea typeface="Arial"/>
@@ -5552,7 +5567,7 @@
               <a:buNone/>
               <a:defRPr sz="1500" b="1">
                 <a:solidFill>
-                  <a:srgbClr val="007D80"/>
+                  <a:srgbClr val="00355F"/>
                 </a:solidFill>
                 <a:latin typeface="Arial"/>
                 <a:ea typeface="Arial"/>
@@ -5562,7 +5577,7 @@
             <a:r>
               <a:rPr sz="1500" b="1">
                 <a:solidFill>
-                  <a:srgbClr val="007D80"/>
+                  <a:srgbClr val="00355F"/>
                 </a:solidFill>
                 <a:latin typeface="Arial"/>
                 <a:ea typeface="Arial"/>
@@ -5578,7 +5593,7 @@
           <p:cNvPr id="43" name="REAGENTS">
             <a:extLst xmlns:a="http://schemas.openxmlformats.org/drawingml/2006/main">
               <a:ext uri="{FF2B5EF4-FFF2-40B4-BE49-F238E27FC236}">
-                <a16:creationId xmlns:a16="http://schemas.microsoft.com/office/drawing/2014/main" id="{DC786CB3-583B-462A-8B63-720DDAFAF974}"/>
+                <a16:creationId xmlns:a16="http://schemas.microsoft.com/office/drawing/2014/main" id="{CDA101C8-2500-42AF-95E2-7092F3784161}"/>
               </a:ext>
             </a:extLst>
           </p:cNvPr>
@@ -5606,7 +5621,7 @@
             <a:defPPr algn="l">
               <a:defRPr sz="1238" b="1">
                 <a:solidFill>
-                  <a:srgbClr val="647887"/>
+                  <a:srgbClr val="00355F"/>
                 </a:solidFill>
                 <a:latin typeface="Arial"/>
                 <a:ea typeface="Arial"/>
@@ -5622,7 +5637,7 @@
               <a:buNone/>
               <a:defRPr sz="1238" b="1">
                 <a:solidFill>
-                  <a:srgbClr val="647887"/>
+                  <a:srgbClr val="00355F"/>
                 </a:solidFill>
                 <a:latin typeface="Arial"/>
                 <a:ea typeface="Arial"/>
@@ -5632,7 +5647,7 @@
             <a:r>
               <a:rPr sz="1238" b="1">
                 <a:solidFill>
-                  <a:srgbClr val="647887"/>
+                  <a:srgbClr val="00355F"/>
                 </a:solidFill>
                 <a:latin typeface="Arial"/>
                 <a:ea typeface="Arial"/>
@@ -5648,7 +5663,7 @@
           <p:cNvPr id="44" name="Cells, media, transfection">
             <a:extLst xmlns:a="http://schemas.openxmlformats.org/drawingml/2006/main">
               <a:ext uri="{FF2B5EF4-FFF2-40B4-BE49-F238E27FC236}">
-                <a16:creationId xmlns:a16="http://schemas.microsoft.com/office/drawing/2014/main" id="{328FC5DB-5C75-41E1-BEBF-1DB05BFD4086}"/>
+                <a16:creationId xmlns:a16="http://schemas.microsoft.com/office/drawing/2014/main" id="{BB28A74E-D9E6-4267-A01B-941651C980AA}"/>
               </a:ext>
             </a:extLst>
           </p:cNvPr>
@@ -5676,7 +5691,7 @@
             <a:defPPr algn="l">
               <a:defRPr sz="1463" b="0">
                 <a:solidFill>
-                  <a:srgbClr val="152C3A"/>
+                  <a:srgbClr val="00355F"/>
                 </a:solidFill>
                 <a:latin typeface="Arial"/>
                 <a:ea typeface="Arial"/>
@@ -5692,7 +5707,7 @@
               <a:buNone/>
               <a:defRPr sz="1463" b="0">
                 <a:solidFill>
-                  <a:srgbClr val="152C3A"/>
+                  <a:srgbClr val="00355F"/>
                 </a:solidFill>
                 <a:latin typeface="Arial"/>
                 <a:ea typeface="Arial"/>
@@ -5702,7 +5717,7 @@
             <a:r>
               <a:rPr sz="1463" b="0">
                 <a:solidFill>
-                  <a:srgbClr val="152C3A"/>
+                  <a:srgbClr val="00355F"/>
                 </a:solidFill>
                 <a:latin typeface="Arial"/>
                 <a:ea typeface="Arial"/>
@@ -5719,7 +5734,7 @@
               <a:buNone/>
               <a:defRPr sz="1463" b="0">
                 <a:solidFill>
-                  <a:srgbClr val="152C3A"/>
+                  <a:srgbClr val="00355F"/>
                 </a:solidFill>
                 <a:latin typeface="Arial"/>
                 <a:ea typeface="Arial"/>
@@ -5729,7 +5744,7 @@
             <a:r>
               <a:rPr sz="1463" b="0">
                 <a:solidFill>
-                  <a:srgbClr val="152C3A"/>
+                  <a:srgbClr val="00355F"/>
                 </a:solidFill>
                 <a:latin typeface="Arial"/>
                 <a:ea typeface="Arial"/>
@@ -5745,7 +5760,7 @@
           <p:cNvPr id="45" name="INSTRUMENTS">
             <a:extLst xmlns:a="http://schemas.openxmlformats.org/drawingml/2006/main">
               <a:ext uri="{FF2B5EF4-FFF2-40B4-BE49-F238E27FC236}">
-                <a16:creationId xmlns:a16="http://schemas.microsoft.com/office/drawing/2014/main" id="{EAA30613-CDBF-4314-A75D-FD006843FEA7}"/>
+                <a16:creationId xmlns:a16="http://schemas.microsoft.com/office/drawing/2014/main" id="{C6A23875-5C23-48AD-849E-98194A6EED6F}"/>
               </a:ext>
             </a:extLst>
           </p:cNvPr>
@@ -5773,7 +5788,7 @@
             <a:defPPr algn="l">
               <a:defRPr sz="1238" b="1">
                 <a:solidFill>
-                  <a:srgbClr val="647887"/>
+                  <a:srgbClr val="00355F"/>
                 </a:solidFill>
                 <a:latin typeface="Arial"/>
                 <a:ea typeface="Arial"/>
@@ -5789,7 +5804,7 @@
               <a:buNone/>
               <a:defRPr sz="1238" b="1">
                 <a:solidFill>
-                  <a:srgbClr val="647887"/>
+                  <a:srgbClr val="00355F"/>
                 </a:solidFill>
                 <a:latin typeface="Arial"/>
                 <a:ea typeface="Arial"/>
@@ -5799,7 +5814,7 @@
             <a:r>
               <a:rPr sz="1238" b="1">
                 <a:solidFill>
-                  <a:srgbClr val="647887"/>
+                  <a:srgbClr val="00355F"/>
                 </a:solidFill>
                 <a:latin typeface="Arial"/>
                 <a:ea typeface="Arial"/>
@@ -5815,7 +5830,7 @@
           <p:cNvPr id="46" name="Shaker / bioreactor*">
             <a:extLst xmlns:a="http://schemas.openxmlformats.org/drawingml/2006/main">
               <a:ext uri="{FF2B5EF4-FFF2-40B4-BE49-F238E27FC236}">
-                <a16:creationId xmlns:a16="http://schemas.microsoft.com/office/drawing/2014/main" id="{66F566D5-1B94-4734-9774-4DF3642E68A4}"/>
+                <a16:creationId xmlns:a16="http://schemas.microsoft.com/office/drawing/2014/main" id="{FF96F4B8-7F13-448D-BD97-E31709196669}"/>
               </a:ext>
             </a:extLst>
           </p:cNvPr>
@@ -5843,7 +5858,7 @@
             <a:defPPr algn="l">
               <a:defRPr sz="1463" b="0">
                 <a:solidFill>
-                  <a:srgbClr val="152C3A"/>
+                  <a:srgbClr val="00355F"/>
                 </a:solidFill>
                 <a:latin typeface="Arial"/>
                 <a:ea typeface="Arial"/>
@@ -5859,7 +5874,7 @@
               <a:buNone/>
               <a:defRPr sz="1463" b="0">
                 <a:solidFill>
-                  <a:srgbClr val="152C3A"/>
+                  <a:srgbClr val="00355F"/>
                 </a:solidFill>
                 <a:latin typeface="Arial"/>
                 <a:ea typeface="Arial"/>
@@ -5869,7 +5884,7 @@
             <a:r>
               <a:rPr sz="1463" b="0">
                 <a:solidFill>
-                  <a:srgbClr val="152C3A"/>
+                  <a:srgbClr val="00355F"/>
                 </a:solidFill>
                 <a:latin typeface="Arial"/>
                 <a:ea typeface="Arial"/>
@@ -5886,7 +5901,7 @@
               <a:buNone/>
               <a:defRPr sz="1463" b="0">
                 <a:solidFill>
-                  <a:srgbClr val="152C3A"/>
+                  <a:srgbClr val="00355F"/>
                 </a:solidFill>
                 <a:latin typeface="Arial"/>
                 <a:ea typeface="Arial"/>
@@ -5896,7 +5911,7 @@
             <a:r>
               <a:rPr sz="1463" b="0">
                 <a:solidFill>
-                  <a:srgbClr val="152C3A"/>
+                  <a:srgbClr val="00355F"/>
                 </a:solidFill>
                 <a:latin typeface="Arial"/>
                 <a:ea typeface="Arial"/>
@@ -5913,7 +5928,7 @@
               <a:buNone/>
               <a:defRPr sz="1463" b="0">
                 <a:solidFill>
-                  <a:srgbClr val="152C3A"/>
+                  <a:srgbClr val="00355F"/>
                 </a:solidFill>
                 <a:latin typeface="Arial"/>
                 <a:ea typeface="Arial"/>
@@ -5923,7 +5938,7 @@
             <a:r>
               <a:rPr sz="1463" b="0">
                 <a:solidFill>
-                  <a:srgbClr val="152C3A"/>
+                  <a:srgbClr val="00355F"/>
                 </a:solidFill>
                 <a:latin typeface="Arial"/>
                 <a:ea typeface="Arial"/>
@@ -5939,7 +5954,7 @@
           <p:cNvPr id="47" name="CONSUMABLES">
             <a:extLst xmlns:a="http://schemas.openxmlformats.org/drawingml/2006/main">
               <a:ext uri="{FF2B5EF4-FFF2-40B4-BE49-F238E27FC236}">
-                <a16:creationId xmlns:a16="http://schemas.microsoft.com/office/drawing/2014/main" id="{C899967A-575C-4671-BB61-7F4336E9F018}"/>
+                <a16:creationId xmlns:a16="http://schemas.microsoft.com/office/drawing/2014/main" id="{6C3F3ADA-D28A-42BB-8312-C037B418E192}"/>
               </a:ext>
             </a:extLst>
           </p:cNvPr>
@@ -5967,7 +5982,7 @@
             <a:defPPr algn="l">
               <a:defRPr sz="1238" b="1">
                 <a:solidFill>
-                  <a:srgbClr val="647887"/>
+                  <a:srgbClr val="00355F"/>
                 </a:solidFill>
                 <a:latin typeface="Arial"/>
                 <a:ea typeface="Arial"/>
@@ -5983,7 +5998,7 @@
               <a:buNone/>
               <a:defRPr sz="1238" b="1">
                 <a:solidFill>
-                  <a:srgbClr val="647887"/>
+                  <a:srgbClr val="00355F"/>
                 </a:solidFill>
                 <a:latin typeface="Arial"/>
                 <a:ea typeface="Arial"/>
@@ -5993,7 +6008,7 @@
             <a:r>
               <a:rPr sz="1238" b="1">
                 <a:solidFill>
-                  <a:srgbClr val="647887"/>
+                  <a:srgbClr val="00355F"/>
                 </a:solidFill>
                 <a:latin typeface="Arial"/>
                 <a:ea typeface="Arial"/>
@@ -6009,7 +6024,7 @@
           <p:cNvPr id="48" name="Flasks / culture bags*">
             <a:extLst xmlns:a="http://schemas.openxmlformats.org/drawingml/2006/main">
               <a:ext uri="{FF2B5EF4-FFF2-40B4-BE49-F238E27FC236}">
-                <a16:creationId xmlns:a16="http://schemas.microsoft.com/office/drawing/2014/main" id="{F29BF2B5-8C04-481D-84AE-B57682AC74F9}"/>
+                <a16:creationId xmlns:a16="http://schemas.microsoft.com/office/drawing/2014/main" id="{24844E86-BF56-4B66-8812-DEA23D416059}"/>
               </a:ext>
             </a:extLst>
           </p:cNvPr>
@@ -6037,7 +6052,7 @@
             <a:defPPr algn="l">
               <a:defRPr sz="1463" b="0">
                 <a:solidFill>
-                  <a:srgbClr val="152C3A"/>
+                  <a:srgbClr val="00355F"/>
                 </a:solidFill>
                 <a:latin typeface="Arial"/>
                 <a:ea typeface="Arial"/>
@@ -6053,7 +6068,7 @@
               <a:buNone/>
               <a:defRPr sz="1463" b="0">
                 <a:solidFill>
-                  <a:srgbClr val="152C3A"/>
+                  <a:srgbClr val="00355F"/>
                 </a:solidFill>
                 <a:latin typeface="Arial"/>
                 <a:ea typeface="Arial"/>
@@ -6063,7 +6078,7 @@
             <a:r>
               <a:rPr sz="1463" b="0">
                 <a:solidFill>
-                  <a:srgbClr val="152C3A"/>
+                  <a:srgbClr val="00355F"/>
                 </a:solidFill>
                 <a:latin typeface="Arial"/>
                 <a:ea typeface="Arial"/>
@@ -6080,7 +6095,7 @@
               <a:buNone/>
               <a:defRPr sz="1463" b="0">
                 <a:solidFill>
-                  <a:srgbClr val="152C3A"/>
+                  <a:srgbClr val="00355F"/>
                 </a:solidFill>
                 <a:latin typeface="Arial"/>
                 <a:ea typeface="Arial"/>
@@ -6090,7 +6105,7 @@
             <a:r>
               <a:rPr sz="1463" b="0">
                 <a:solidFill>
-                  <a:srgbClr val="152C3A"/>
+                  <a:srgbClr val="00355F"/>
                 </a:solidFill>
                 <a:latin typeface="Arial"/>
                 <a:ea typeface="Arial"/>
@@ -6106,7 +6121,7 @@
           <p:cNvPr id="49" name="">
             <a:extLst xmlns:a="http://schemas.openxmlformats.org/drawingml/2006/main">
               <a:ext uri="{FF2B5EF4-FFF2-40B4-BE49-F238E27FC236}">
-                <a16:creationId xmlns:a16="http://schemas.microsoft.com/office/drawing/2014/main" id="{3D84F1C0-087C-4010-BE68-4B2B39BBEBC2}"/>
+                <a16:creationId xmlns:a16="http://schemas.microsoft.com/office/drawing/2014/main" id="{9FA2C16F-D2FF-4B4C-8F39-AF1DB7C52BD1}"/>
               </a:ext>
             </a:extLst>
           </p:cNvPr>
@@ -6135,7 +6150,7 @@
           <a:noFill xmlns:a="http://schemas.openxmlformats.org/drawingml/2006/main"/>
           <a:ln xmlns:a="http://schemas.openxmlformats.org/drawingml/2006/main" w="9525">
             <a:solidFill>
-              <a:srgbClr val="D7E3E8"/>
+              <a:srgbClr val="A5A5A5"/>
             </a:solidFill>
           </a:ln>
         </p:spPr>
@@ -6145,7 +6160,7 @@
           <p:cNvPr id="50" name="REPRESENTATIVE SUPPLIERS">
             <a:extLst xmlns:a="http://schemas.openxmlformats.org/drawingml/2006/main">
               <a:ext uri="{FF2B5EF4-FFF2-40B4-BE49-F238E27FC236}">
-                <a16:creationId xmlns:a16="http://schemas.microsoft.com/office/drawing/2014/main" id="{2721CB4A-E92D-4A2C-96C7-5B57024FB6A9}"/>
+                <a16:creationId xmlns:a16="http://schemas.microsoft.com/office/drawing/2014/main" id="{02787960-A549-49CE-85F8-CC856CE38227}"/>
               </a:ext>
             </a:extLst>
           </p:cNvPr>
@@ -6173,7 +6188,7 @@
             <a:defPPr algn="l">
               <a:defRPr sz="1163" b="1">
                 <a:solidFill>
-                  <a:srgbClr val="647887"/>
+                  <a:srgbClr val="00355F"/>
                 </a:solidFill>
                 <a:latin typeface="Arial"/>
                 <a:ea typeface="Arial"/>
@@ -6189,7 +6204,7 @@
               <a:buNone/>
               <a:defRPr sz="1163" b="1">
                 <a:solidFill>
-                  <a:srgbClr val="647887"/>
+                  <a:srgbClr val="00355F"/>
                 </a:solidFill>
                 <a:latin typeface="Arial"/>
                 <a:ea typeface="Arial"/>
@@ -6199,7 +6214,7 @@
             <a:r>
               <a:rPr sz="1163" b="1">
                 <a:solidFill>
-                  <a:srgbClr val="647887"/>
+                  <a:srgbClr val="00355F"/>
                 </a:solidFill>
                 <a:latin typeface="Arial"/>
                 <a:ea typeface="Arial"/>
@@ -6215,7 +6230,7 @@
           <p:cNvPr id="51" name="">
             <a:extLst xmlns:a="http://schemas.openxmlformats.org/drawingml/2006/main">
               <a:ext uri="{FF2B5EF4-FFF2-40B4-BE49-F238E27FC236}">
-                <a16:creationId xmlns:a16="http://schemas.microsoft.com/office/drawing/2014/main" id="{3788C8B1-CBFB-4A6B-836C-2DCD3142DF49}"/>
+                <a16:creationId xmlns:a16="http://schemas.microsoft.com/office/drawing/2014/main" id="{E17C6356-ED39-44F0-B0D9-4AFE318BE4E2}"/>
               </a:ext>
             </a:extLst>
           </p:cNvPr>
@@ -6225,7 +6240,7 @@
           <p:nvPr/>
         </p:nvPicPr>
         <p:blipFill>
-          <a:blip xmlns:r="http://schemas.openxmlformats.org/officeDocument/2006/relationships" xmlns:a="http://schemas.openxmlformats.org/drawingml/2006/main" r:embed="Rcd3d0293d8d74b14"/>
+          <a:blip xmlns:r="http://schemas.openxmlformats.org/officeDocument/2006/relationships" xmlns:a="http://schemas.openxmlformats.org/drawingml/2006/main" r:embed="R574878eb8b3c4323"/>
           <a:stretch xmlns:a="http://schemas.openxmlformats.org/drawingml/2006/main"/>
         </p:blipFill>
         <p:spPr>
@@ -6243,7 +6258,7 @@
           <p:cNvPr id="52" name="GenScript · ACROBiosystems">
             <a:extLst xmlns:a="http://schemas.openxmlformats.org/drawingml/2006/main">
               <a:ext uri="{FF2B5EF4-FFF2-40B4-BE49-F238E27FC236}">
-                <a16:creationId xmlns:a16="http://schemas.microsoft.com/office/drawing/2014/main" id="{7DB99DE3-FB9A-44B7-9117-D72F3C94F1E2}"/>
+                <a16:creationId xmlns:a16="http://schemas.microsoft.com/office/drawing/2014/main" id="{C71AA9B3-DAAD-4476-AFC9-7F664EF0AC89}"/>
               </a:ext>
             </a:extLst>
           </p:cNvPr>
@@ -6271,7 +6286,7 @@
             <a:defPPr algn="l">
               <a:defRPr sz="1275" b="0">
                 <a:solidFill>
-                  <a:srgbClr val="647887"/>
+                  <a:srgbClr val="00355F"/>
                 </a:solidFill>
                 <a:latin typeface="Arial"/>
                 <a:ea typeface="Arial"/>
@@ -6287,7 +6302,7 @@
               <a:buNone/>
               <a:defRPr sz="1275" b="0">
                 <a:solidFill>
-                  <a:srgbClr val="647887"/>
+                  <a:srgbClr val="00355F"/>
                 </a:solidFill>
                 <a:latin typeface="Arial"/>
                 <a:ea typeface="Arial"/>
@@ -6297,7 +6312,7 @@
             <a:r>
               <a:rPr sz="1275" b="0">
                 <a:solidFill>
-                  <a:srgbClr val="647887"/>
+                  <a:srgbClr val="00355F"/>
                 </a:solidFill>
                 <a:latin typeface="Arial"/>
                 <a:ea typeface="Arial"/>
@@ -6314,7 +6329,7 @@
               <a:buNone/>
               <a:defRPr sz="1275" b="0">
                 <a:solidFill>
-                  <a:srgbClr val="647887"/>
+                  <a:srgbClr val="00355F"/>
                 </a:solidFill>
                 <a:latin typeface="Arial"/>
                 <a:ea typeface="Arial"/>
@@ -6324,7 +6339,7 @@
             <a:r>
               <a:rPr sz="1275" b="0">
                 <a:solidFill>
-                  <a:srgbClr val="647887"/>
+                  <a:srgbClr val="00355F"/>
                 </a:solidFill>
                 <a:latin typeface="Arial"/>
                 <a:ea typeface="Arial"/>
@@ -6341,7 +6356,7 @@
               <a:buNone/>
               <a:defRPr sz="1275" b="0">
                 <a:solidFill>
-                  <a:srgbClr val="647887"/>
+                  <a:srgbClr val="00355F"/>
                 </a:solidFill>
                 <a:latin typeface="Arial"/>
                 <a:ea typeface="Arial"/>
@@ -6351,7 +6366,7 @@
             <a:r>
               <a:rPr sz="1275" b="0">
                 <a:solidFill>
-                  <a:srgbClr val="647887"/>
+                  <a:srgbClr val="00355F"/>
                 </a:solidFill>
                 <a:latin typeface="Arial"/>
                 <a:ea typeface="Arial"/>
@@ -6367,7 +6382,7 @@
           <p:cNvPr id="53" name="">
             <a:extLst xmlns:a="http://schemas.openxmlformats.org/drawingml/2006/main">
               <a:ext uri="{FF2B5EF4-FFF2-40B4-BE49-F238E27FC236}">
-                <a16:creationId xmlns:a16="http://schemas.microsoft.com/office/drawing/2014/main" id="{65DC4087-4175-4405-9C31-E51BA7B21FF1}"/>
+                <a16:creationId xmlns:a16="http://schemas.microsoft.com/office/drawing/2014/main" id="{13783DE0-C12E-4680-8701-2E1F01BE40B7}"/>
               </a:ext>
             </a:extLst>
           </p:cNvPr>
@@ -6387,7 +6402,7 @@
             </a:avLst>
           </a:prstGeom>
           <a:solidFill xmlns:a="http://schemas.openxmlformats.org/drawingml/2006/main">
-            <a:srgbClr val="EEF3F4"/>
+            <a:srgbClr val="EEF6FC"/>
           </a:solidFill>
           <a:ln xmlns:a="http://schemas.openxmlformats.org/drawingml/2006/main" w="9525">
             <a:noFill/>
@@ -6399,7 +6414,7 @@
           <p:cNvPr id="54" name="">
             <a:extLst xmlns:a="http://schemas.openxmlformats.org/drawingml/2006/main">
               <a:ext uri="{FF2B5EF4-FFF2-40B4-BE49-F238E27FC236}">
-                <a16:creationId xmlns:a16="http://schemas.microsoft.com/office/drawing/2014/main" id="{48E14948-4BD0-4C2F-90D7-6D583BBC3176}"/>
+                <a16:creationId xmlns:a16="http://schemas.microsoft.com/office/drawing/2014/main" id="{5CED8449-79C1-4694-9FBF-A9F30A8874E5}"/>
               </a:ext>
             </a:extLst>
           </p:cNvPr>
@@ -6423,7 +6438,7 @@
           </a:solidFill>
           <a:ln xmlns:a="http://schemas.openxmlformats.org/drawingml/2006/main" w="10478">
             <a:solidFill>
-              <a:srgbClr val="D7E3E8"/>
+              <a:srgbClr val="A5A5A5"/>
             </a:solidFill>
           </a:ln>
         </p:spPr>
@@ -6433,7 +6448,7 @@
           <p:cNvPr id="55" name="">
             <a:extLst xmlns:a="http://schemas.openxmlformats.org/drawingml/2006/main">
               <a:ext uri="{FF2B5EF4-FFF2-40B4-BE49-F238E27FC236}">
-                <a16:creationId xmlns:a16="http://schemas.microsoft.com/office/drawing/2014/main" id="{59FD0E39-E197-46AC-972F-F69FF505465A}"/>
+                <a16:creationId xmlns:a16="http://schemas.microsoft.com/office/drawing/2014/main" id="{753447E6-1404-4858-A2E0-80BACC18C8E9}"/>
               </a:ext>
             </a:extLst>
           </p:cNvPr>
@@ -6451,7 +6466,7 @@
             <a:avLst/>
           </a:prstGeom>
           <a:solidFill xmlns:a="http://schemas.openxmlformats.org/drawingml/2006/main">
-            <a:srgbClr val="4D8574"/>
+            <a:srgbClr val="00355F"/>
           </a:solidFill>
           <a:ln xmlns:a="http://schemas.openxmlformats.org/drawingml/2006/main" w="9525">
             <a:noFill/>
@@ -6463,7 +6478,7 @@
           <p:cNvPr id="56" name="03  /  TEST">
             <a:extLst xmlns:a="http://schemas.openxmlformats.org/drawingml/2006/main">
               <a:ext uri="{FF2B5EF4-FFF2-40B4-BE49-F238E27FC236}">
-                <a16:creationId xmlns:a16="http://schemas.microsoft.com/office/drawing/2014/main" id="{D64C9AC9-395F-459A-AE4F-BB8AD9A6DC72}"/>
+                <a16:creationId xmlns:a16="http://schemas.microsoft.com/office/drawing/2014/main" id="{8EC48EA1-7C26-465F-9819-BE07C9EFA501}"/>
               </a:ext>
             </a:extLst>
           </p:cNvPr>
@@ -6491,7 +6506,7 @@
             <a:defPPr algn="l">
               <a:defRPr sz="1500" b="1">
                 <a:solidFill>
-                  <a:srgbClr val="647887"/>
+                  <a:srgbClr val="00355F"/>
                 </a:solidFill>
                 <a:latin typeface="Arial"/>
                 <a:ea typeface="Arial"/>
@@ -6507,7 +6522,7 @@
               <a:buNone/>
               <a:defRPr sz="1500" b="1">
                 <a:solidFill>
-                  <a:srgbClr val="647887"/>
+                  <a:srgbClr val="00355F"/>
                 </a:solidFill>
                 <a:latin typeface="Arial"/>
                 <a:ea typeface="Arial"/>
@@ -6517,7 +6532,7 @@
             <a:r>
               <a:rPr sz="1500" b="1">
                 <a:solidFill>
-                  <a:srgbClr val="647887"/>
+                  <a:srgbClr val="00355F"/>
                 </a:solidFill>
                 <a:latin typeface="Arial"/>
                 <a:ea typeface="Arial"/>
@@ -6533,7 +6548,7 @@
           <p:cNvPr id="57" name="">
             <a:extLst xmlns:a="http://schemas.openxmlformats.org/drawingml/2006/main">
               <a:ext uri="{FF2B5EF4-FFF2-40B4-BE49-F238E27FC236}">
-                <a16:creationId xmlns:a16="http://schemas.microsoft.com/office/drawing/2014/main" id="{DE293141-E47B-4E2C-BDEB-E0B3793E1153}"/>
+                <a16:creationId xmlns:a16="http://schemas.microsoft.com/office/drawing/2014/main" id="{ED1144D8-23A2-40FB-8E9C-BC197B8D81FC}"/>
               </a:ext>
             </a:extLst>
           </p:cNvPr>
@@ -6543,10 +6558,10 @@
           <p:nvPr/>
         </p:nvPicPr>
         <p:blipFill>
-          <a:blip xmlns:r="http://schemas.openxmlformats.org/officeDocument/2006/relationships" xmlns:a="http://schemas.openxmlformats.org/drawingml/2006/main" r:embed="R6a7d6c134a0f4b79">
+          <a:blip xmlns:r="http://schemas.openxmlformats.org/officeDocument/2006/relationships" xmlns:a="http://schemas.openxmlformats.org/drawingml/2006/main" r:embed="Rdd9cb776969a4a9d">
             <a:extLst>
               <a:ext uri="{96DAC541-7B7A-43D3-8B79-37D633B846F1}">
-                <asvg:svgBlip xmlns:asvg="http://schemas.microsoft.com/office/drawing/2016/SVG/main" r:embed="R529aa45b22ba4ea4"/>
+                <asvg:svgBlip xmlns:asvg="http://schemas.microsoft.com/office/drawing/2016/SVG/main" r:embed="R5df60d407a1a49e2"/>
               </a:ext>
             </a:extLst>
           </a:blip>
@@ -6567,7 +6582,7 @@
           <p:cNvPr id="58" name="Primary binding">
             <a:extLst xmlns:a="http://schemas.openxmlformats.org/drawingml/2006/main">
               <a:ext uri="{FF2B5EF4-FFF2-40B4-BE49-F238E27FC236}">
-                <a16:creationId xmlns:a16="http://schemas.microsoft.com/office/drawing/2014/main" id="{48DA6F27-34D2-40B6-BC6C-78A43E8FE117}"/>
+                <a16:creationId xmlns:a16="http://schemas.microsoft.com/office/drawing/2014/main" id="{F5A4D727-2580-4338-AB0D-0EA292317D62}"/>
               </a:ext>
             </a:extLst>
           </p:cNvPr>
@@ -6595,7 +6610,7 @@
             <a:defPPr algn="l">
               <a:defRPr sz="2325" b="1">
                 <a:solidFill>
-                  <a:srgbClr val="152C3A"/>
+                  <a:srgbClr val="00355F"/>
                 </a:solidFill>
                 <a:latin typeface="Arial"/>
                 <a:ea typeface="Arial"/>
@@ -6611,7 +6626,7 @@
               <a:buNone/>
               <a:defRPr sz="2325" b="1">
                 <a:solidFill>
-                  <a:srgbClr val="152C3A"/>
+                  <a:srgbClr val="00355F"/>
                 </a:solidFill>
                 <a:latin typeface="Arial"/>
                 <a:ea typeface="Arial"/>
@@ -6621,7 +6636,7 @@
             <a:r>
               <a:rPr sz="2325" b="1">
                 <a:solidFill>
-                  <a:srgbClr val="152C3A"/>
+                  <a:srgbClr val="00355F"/>
                 </a:solidFill>
                 <a:latin typeface="Arial"/>
                 <a:ea typeface="Arial"/>
@@ -6638,7 +6653,7 @@
               <a:buNone/>
               <a:defRPr sz="2325" b="1">
                 <a:solidFill>
-                  <a:srgbClr val="152C3A"/>
+                  <a:srgbClr val="00355F"/>
                 </a:solidFill>
                 <a:latin typeface="Arial"/>
                 <a:ea typeface="Arial"/>
@@ -6648,7 +6663,7 @@
             <a:r>
               <a:rPr sz="2325" b="1">
                 <a:solidFill>
-                  <a:srgbClr val="152C3A"/>
+                  <a:srgbClr val="00355F"/>
                 </a:solidFill>
                 <a:latin typeface="Arial"/>
                 <a:ea typeface="Arial"/>
@@ -6664,7 +6679,7 @@
           <p:cNvPr id="59" name="Identify binders and">
             <a:extLst xmlns:a="http://schemas.openxmlformats.org/drawingml/2006/main">
               <a:ext uri="{FF2B5EF4-FFF2-40B4-BE49-F238E27FC236}">
-                <a16:creationId xmlns:a16="http://schemas.microsoft.com/office/drawing/2014/main" id="{654C2590-B073-4045-9093-FF7E520B6166}"/>
+                <a16:creationId xmlns:a16="http://schemas.microsoft.com/office/drawing/2014/main" id="{0D3ADB83-899B-47A8-AEC8-6F8CBAF772BA}"/>
               </a:ext>
             </a:extLst>
           </p:cNvPr>
@@ -6692,7 +6707,7 @@
             <a:defPPr algn="l">
               <a:defRPr sz="1575" b="0">
                 <a:solidFill>
-                  <a:srgbClr val="647887"/>
+                  <a:srgbClr val="00355F"/>
                 </a:solidFill>
                 <a:latin typeface="Arial"/>
                 <a:ea typeface="Arial"/>
@@ -6708,7 +6723,7 @@
               <a:buNone/>
               <a:defRPr sz="1575" b="0">
                 <a:solidFill>
-                  <a:srgbClr val="647887"/>
+                  <a:srgbClr val="00355F"/>
                 </a:solidFill>
                 <a:latin typeface="Arial"/>
                 <a:ea typeface="Arial"/>
@@ -6718,7 +6733,7 @@
             <a:r>
               <a:rPr sz="1575" b="0">
                 <a:solidFill>
-                  <a:srgbClr val="647887"/>
+                  <a:srgbClr val="00355F"/>
                 </a:solidFill>
                 <a:latin typeface="Arial"/>
                 <a:ea typeface="Arial"/>
@@ -6735,7 +6750,7 @@
               <a:buNone/>
               <a:defRPr sz="1575" b="0">
                 <a:solidFill>
-                  <a:srgbClr val="647887"/>
+                  <a:srgbClr val="00355F"/>
                 </a:solidFill>
                 <a:latin typeface="Arial"/>
                 <a:ea typeface="Arial"/>
@@ -6745,7 +6760,7 @@
             <a:r>
               <a:rPr sz="1575" b="0">
                 <a:solidFill>
-                  <a:srgbClr val="647887"/>
+                  <a:srgbClr val="00355F"/>
                 </a:solidFill>
                 <a:latin typeface="Arial"/>
                 <a:ea typeface="Arial"/>
@@ -6761,7 +6776,7 @@
           <p:cNvPr id="60" name="">
             <a:extLst xmlns:a="http://schemas.openxmlformats.org/drawingml/2006/main">
               <a:ext uri="{FF2B5EF4-FFF2-40B4-BE49-F238E27FC236}">
-                <a16:creationId xmlns:a16="http://schemas.microsoft.com/office/drawing/2014/main" id="{990D6753-CA67-4D2C-B2D9-8730BD8C5304}"/>
+                <a16:creationId xmlns:a16="http://schemas.microsoft.com/office/drawing/2014/main" id="{098E70E3-4A7F-442C-95B9-C8F95135AC46}"/>
               </a:ext>
             </a:extLst>
           </p:cNvPr>
@@ -6781,7 +6796,7 @@
             </a:avLst>
           </a:prstGeom>
           <a:solidFill xmlns:a="http://schemas.openxmlformats.org/drawingml/2006/main">
-            <a:srgbClr val="F5F8F9"/>
+            <a:srgbClr val="F4F9FD"/>
           </a:solidFill>
           <a:ln xmlns:a="http://schemas.openxmlformats.org/drawingml/2006/main" w="9525">
             <a:noFill/>
@@ -6793,7 +6808,7 @@
           <p:cNvPr id="61" name="OUTPUT">
             <a:extLst xmlns:a="http://schemas.openxmlformats.org/drawingml/2006/main">
               <a:ext uri="{FF2B5EF4-FFF2-40B4-BE49-F238E27FC236}">
-                <a16:creationId xmlns:a16="http://schemas.microsoft.com/office/drawing/2014/main" id="{FE0AC1DE-084C-43F8-8B34-D3343DCC7BDC}"/>
+                <a16:creationId xmlns:a16="http://schemas.microsoft.com/office/drawing/2014/main" id="{D3AC713E-8FCA-4115-9EE3-90DA25011552}"/>
               </a:ext>
             </a:extLst>
           </p:cNvPr>
@@ -6821,7 +6836,7 @@
             <a:defPPr algn="l">
               <a:defRPr sz="1088" b="1">
                 <a:solidFill>
-                  <a:srgbClr val="647887"/>
+                  <a:srgbClr val="00355F"/>
                 </a:solidFill>
                 <a:latin typeface="Arial"/>
                 <a:ea typeface="Arial"/>
@@ -6837,7 +6852,7 @@
               <a:buNone/>
               <a:defRPr sz="1088" b="1">
                 <a:solidFill>
-                  <a:srgbClr val="647887"/>
+                  <a:srgbClr val="00355F"/>
                 </a:solidFill>
                 <a:latin typeface="Arial"/>
                 <a:ea typeface="Arial"/>
@@ -6847,7 +6862,7 @@
             <a:r>
               <a:rPr sz="1088" b="1">
                 <a:solidFill>
-                  <a:srgbClr val="647887"/>
+                  <a:srgbClr val="00355F"/>
                 </a:solidFill>
                 <a:latin typeface="Arial"/>
                 <a:ea typeface="Arial"/>
@@ -6863,7 +6878,7 @@
           <p:cNvPr id="62" name="Hit / binding signal">
             <a:extLst xmlns:a="http://schemas.openxmlformats.org/drawingml/2006/main">
               <a:ext uri="{FF2B5EF4-FFF2-40B4-BE49-F238E27FC236}">
-                <a16:creationId xmlns:a16="http://schemas.microsoft.com/office/drawing/2014/main" id="{D3B52D94-2284-4438-8B86-73A94DCA1137}"/>
+                <a16:creationId xmlns:a16="http://schemas.microsoft.com/office/drawing/2014/main" id="{B94159D5-9563-4C4B-8806-C352A4F46170}"/>
               </a:ext>
             </a:extLst>
           </p:cNvPr>
@@ -6891,7 +6906,7 @@
             <a:defPPr algn="l">
               <a:defRPr sz="1500" b="1">
                 <a:solidFill>
-                  <a:srgbClr val="007D80"/>
+                  <a:srgbClr val="00355F"/>
                 </a:solidFill>
                 <a:latin typeface="Arial"/>
                 <a:ea typeface="Arial"/>
@@ -6907,7 +6922,7 @@
               <a:buNone/>
               <a:defRPr sz="1500" b="1">
                 <a:solidFill>
-                  <a:srgbClr val="007D80"/>
+                  <a:srgbClr val="00355F"/>
                 </a:solidFill>
                 <a:latin typeface="Arial"/>
                 <a:ea typeface="Arial"/>
@@ -6917,7 +6932,7 @@
             <a:r>
               <a:rPr sz="1500" b="1">
                 <a:solidFill>
-                  <a:srgbClr val="007D80"/>
+                  <a:srgbClr val="00355F"/>
                 </a:solidFill>
                 <a:latin typeface="Arial"/>
                 <a:ea typeface="Arial"/>
@@ -6933,7 +6948,7 @@
           <p:cNvPr id="63" name="REAGENTS">
             <a:extLst xmlns:a="http://schemas.openxmlformats.org/drawingml/2006/main">
               <a:ext uri="{FF2B5EF4-FFF2-40B4-BE49-F238E27FC236}">
-                <a16:creationId xmlns:a16="http://schemas.microsoft.com/office/drawing/2014/main" id="{8236A229-1A90-4962-B9BE-AFA36904F95A}"/>
+                <a16:creationId xmlns:a16="http://schemas.microsoft.com/office/drawing/2014/main" id="{3F7FD422-30ED-46E5-98E8-F4363614E6D4}"/>
               </a:ext>
             </a:extLst>
           </p:cNvPr>
@@ -6961,7 +6976,7 @@
             <a:defPPr algn="l">
               <a:defRPr sz="1238" b="1">
                 <a:solidFill>
-                  <a:srgbClr val="647887"/>
+                  <a:srgbClr val="00355F"/>
                 </a:solidFill>
                 <a:latin typeface="Arial"/>
                 <a:ea typeface="Arial"/>
@@ -6977,7 +6992,7 @@
               <a:buNone/>
               <a:defRPr sz="1238" b="1">
                 <a:solidFill>
-                  <a:srgbClr val="647887"/>
+                  <a:srgbClr val="00355F"/>
                 </a:solidFill>
                 <a:latin typeface="Arial"/>
                 <a:ea typeface="Arial"/>
@@ -6987,7 +7002,7 @@
             <a:r>
               <a:rPr sz="1238" b="1">
                 <a:solidFill>
-                  <a:srgbClr val="647887"/>
+                  <a:srgbClr val="00355F"/>
                 </a:solidFill>
                 <a:latin typeface="Arial"/>
                 <a:ea typeface="Arial"/>
@@ -7003,7 +7018,7 @@
           <p:cNvPr id="64" name="Recombinant target proteins">
             <a:extLst xmlns:a="http://schemas.openxmlformats.org/drawingml/2006/main">
               <a:ext uri="{FF2B5EF4-FFF2-40B4-BE49-F238E27FC236}">
-                <a16:creationId xmlns:a16="http://schemas.microsoft.com/office/drawing/2014/main" id="{D83A6C26-52F7-4685-85A6-4E17482A5455}"/>
+                <a16:creationId xmlns:a16="http://schemas.microsoft.com/office/drawing/2014/main" id="{4946D803-E71B-4024-BB8D-46DB5F51A560}"/>
               </a:ext>
             </a:extLst>
           </p:cNvPr>
@@ -7031,7 +7046,7 @@
             <a:defPPr algn="l">
               <a:defRPr sz="1463" b="0">
                 <a:solidFill>
-                  <a:srgbClr val="152C3A"/>
+                  <a:srgbClr val="00355F"/>
                 </a:solidFill>
                 <a:latin typeface="Arial"/>
                 <a:ea typeface="Arial"/>
@@ -7047,7 +7062,7 @@
               <a:buNone/>
               <a:defRPr sz="1463" b="0">
                 <a:solidFill>
-                  <a:srgbClr val="152C3A"/>
+                  <a:srgbClr val="00355F"/>
                 </a:solidFill>
                 <a:latin typeface="Arial"/>
                 <a:ea typeface="Arial"/>
@@ -7057,7 +7072,7 @@
             <a:r>
               <a:rPr sz="1463" b="0">
                 <a:solidFill>
-                  <a:srgbClr val="152C3A"/>
+                  <a:srgbClr val="00355F"/>
                 </a:solidFill>
                 <a:latin typeface="Arial"/>
                 <a:ea typeface="Arial"/>
@@ -7074,7 +7089,7 @@
               <a:buNone/>
               <a:defRPr sz="1463" b="0">
                 <a:solidFill>
-                  <a:srgbClr val="152C3A"/>
+                  <a:srgbClr val="00355F"/>
                 </a:solidFill>
                 <a:latin typeface="Arial"/>
                 <a:ea typeface="Arial"/>
@@ -7084,7 +7099,7 @@
             <a:r>
               <a:rPr sz="1463" b="0">
                 <a:solidFill>
-                  <a:srgbClr val="152C3A"/>
+                  <a:srgbClr val="00355F"/>
                 </a:solidFill>
                 <a:latin typeface="Arial"/>
                 <a:ea typeface="Arial"/>
@@ -7101,7 +7116,7 @@
               <a:buNone/>
               <a:defRPr sz="1463" b="0">
                 <a:solidFill>
-                  <a:srgbClr val="152C3A"/>
+                  <a:srgbClr val="00355F"/>
                 </a:solidFill>
                 <a:latin typeface="Arial"/>
                 <a:ea typeface="Arial"/>
@@ -7111,7 +7126,7 @@
             <a:r>
               <a:rPr sz="1463" b="0">
                 <a:solidFill>
-                  <a:srgbClr val="152C3A"/>
+                  <a:srgbClr val="00355F"/>
                 </a:solidFill>
                 <a:latin typeface="Arial"/>
                 <a:ea typeface="Arial"/>
@@ -7127,7 +7142,7 @@
           <p:cNvPr id="65" name="INSTRUMENTS">
             <a:extLst xmlns:a="http://schemas.openxmlformats.org/drawingml/2006/main">
               <a:ext uri="{FF2B5EF4-FFF2-40B4-BE49-F238E27FC236}">
-                <a16:creationId xmlns:a16="http://schemas.microsoft.com/office/drawing/2014/main" id="{B719E325-AC72-440E-8ACD-90C054061810}"/>
+                <a16:creationId xmlns:a16="http://schemas.microsoft.com/office/drawing/2014/main" id="{E2262E5D-552B-4FB7-A87C-E432DF34F217}"/>
               </a:ext>
             </a:extLst>
           </p:cNvPr>
@@ -7155,7 +7170,7 @@
             <a:defPPr algn="l">
               <a:defRPr sz="1238" b="1">
                 <a:solidFill>
-                  <a:srgbClr val="647887"/>
+                  <a:srgbClr val="00355F"/>
                 </a:solidFill>
                 <a:latin typeface="Arial"/>
                 <a:ea typeface="Arial"/>
@@ -7171,7 +7186,7 @@
               <a:buNone/>
               <a:defRPr sz="1238" b="1">
                 <a:solidFill>
-                  <a:srgbClr val="647887"/>
+                  <a:srgbClr val="00355F"/>
                 </a:solidFill>
                 <a:latin typeface="Arial"/>
                 <a:ea typeface="Arial"/>
@@ -7181,7 +7196,7 @@
             <a:r>
               <a:rPr sz="1238" b="1">
                 <a:solidFill>
-                  <a:srgbClr val="647887"/>
+                  <a:srgbClr val="00355F"/>
                 </a:solidFill>
                 <a:latin typeface="Arial"/>
                 <a:ea typeface="Arial"/>
@@ -7197,7 +7212,7 @@
           <p:cNvPr id="66" name="ELISA / plate reader">
             <a:extLst xmlns:a="http://schemas.openxmlformats.org/drawingml/2006/main">
               <a:ext uri="{FF2B5EF4-FFF2-40B4-BE49-F238E27FC236}">
-                <a16:creationId xmlns:a16="http://schemas.microsoft.com/office/drawing/2014/main" id="{99DD8429-5BF2-43F3-AC3D-80333E403C70}"/>
+                <a16:creationId xmlns:a16="http://schemas.microsoft.com/office/drawing/2014/main" id="{9675C2F3-CBC3-4526-ACFA-8DCDA7B05819}"/>
               </a:ext>
             </a:extLst>
           </p:cNvPr>
@@ -7225,7 +7240,7 @@
             <a:defPPr algn="l">
               <a:defRPr sz="1463" b="0">
                 <a:solidFill>
-                  <a:srgbClr val="152C3A"/>
+                  <a:srgbClr val="00355F"/>
                 </a:solidFill>
                 <a:latin typeface="Arial"/>
                 <a:ea typeface="Arial"/>
@@ -7241,7 +7256,7 @@
               <a:buNone/>
               <a:defRPr sz="1463" b="0">
                 <a:solidFill>
-                  <a:srgbClr val="152C3A"/>
+                  <a:srgbClr val="00355F"/>
                 </a:solidFill>
                 <a:latin typeface="Arial"/>
                 <a:ea typeface="Arial"/>
@@ -7251,7 +7266,7 @@
             <a:r>
               <a:rPr sz="1463" b="0">
                 <a:solidFill>
-                  <a:srgbClr val="152C3A"/>
+                  <a:srgbClr val="00355F"/>
                 </a:solidFill>
                 <a:latin typeface="Arial"/>
                 <a:ea typeface="Arial"/>
@@ -7268,7 +7283,7 @@
               <a:buNone/>
               <a:defRPr sz="1463" b="0">
                 <a:solidFill>
-                  <a:srgbClr val="152C3A"/>
+                  <a:srgbClr val="00355F"/>
                 </a:solidFill>
                 <a:latin typeface="Arial"/>
                 <a:ea typeface="Arial"/>
@@ -7278,7 +7293,7 @@
             <a:r>
               <a:rPr sz="1463" b="0">
                 <a:solidFill>
-                  <a:srgbClr val="152C3A"/>
+                  <a:srgbClr val="00355F"/>
                 </a:solidFill>
                 <a:latin typeface="Arial"/>
                 <a:ea typeface="Arial"/>
@@ -7294,7 +7309,7 @@
           <p:cNvPr id="67" name="CONSUMABLES">
             <a:extLst xmlns:a="http://schemas.openxmlformats.org/drawingml/2006/main">
               <a:ext uri="{FF2B5EF4-FFF2-40B4-BE49-F238E27FC236}">
-                <a16:creationId xmlns:a16="http://schemas.microsoft.com/office/drawing/2014/main" id="{BB0FFFC5-8960-4EF9-8EAC-B5F7944718DE}"/>
+                <a16:creationId xmlns:a16="http://schemas.microsoft.com/office/drawing/2014/main" id="{FCA075F6-C062-4D2F-A08B-9F04F7CDE814}"/>
               </a:ext>
             </a:extLst>
           </p:cNvPr>
@@ -7322,7 +7337,7 @@
             <a:defPPr algn="l">
               <a:defRPr sz="1238" b="1">
                 <a:solidFill>
-                  <a:srgbClr val="647887"/>
+                  <a:srgbClr val="00355F"/>
                 </a:solidFill>
                 <a:latin typeface="Arial"/>
                 <a:ea typeface="Arial"/>
@@ -7338,7 +7353,7 @@
               <a:buNone/>
               <a:defRPr sz="1238" b="1">
                 <a:solidFill>
-                  <a:srgbClr val="647887"/>
+                  <a:srgbClr val="00355F"/>
                 </a:solidFill>
                 <a:latin typeface="Arial"/>
                 <a:ea typeface="Arial"/>
@@ -7348,7 +7363,7 @@
             <a:r>
               <a:rPr sz="1238" b="1">
                 <a:solidFill>
-                  <a:srgbClr val="647887"/>
+                  <a:srgbClr val="00355F"/>
                 </a:solidFill>
                 <a:latin typeface="Arial"/>
                 <a:ea typeface="Arial"/>
@@ -7364,7 +7379,7 @@
           <p:cNvPr id="68" name="96 / 384-well plates">
             <a:extLst xmlns:a="http://schemas.openxmlformats.org/drawingml/2006/main">
               <a:ext uri="{FF2B5EF4-FFF2-40B4-BE49-F238E27FC236}">
-                <a16:creationId xmlns:a16="http://schemas.microsoft.com/office/drawing/2014/main" id="{3C85BA81-69F8-4130-90FB-BE89D8DB5566}"/>
+                <a16:creationId xmlns:a16="http://schemas.microsoft.com/office/drawing/2014/main" id="{E5B47375-31C3-4B9E-955D-8683F2660E85}"/>
               </a:ext>
             </a:extLst>
           </p:cNvPr>
@@ -7392,7 +7407,7 @@
             <a:defPPr algn="l">
               <a:defRPr sz="1463" b="0">
                 <a:solidFill>
-                  <a:srgbClr val="152C3A"/>
+                  <a:srgbClr val="00355F"/>
                 </a:solidFill>
                 <a:latin typeface="Arial"/>
                 <a:ea typeface="Arial"/>
@@ -7408,7 +7423,7 @@
               <a:buNone/>
               <a:defRPr sz="1463" b="0">
                 <a:solidFill>
-                  <a:srgbClr val="152C3A"/>
+                  <a:srgbClr val="00355F"/>
                 </a:solidFill>
                 <a:latin typeface="Arial"/>
                 <a:ea typeface="Arial"/>
@@ -7418,7 +7433,7 @@
             <a:r>
               <a:rPr sz="1463" b="0">
                 <a:solidFill>
-                  <a:srgbClr val="152C3A"/>
+                  <a:srgbClr val="00355F"/>
                 </a:solidFill>
                 <a:latin typeface="Arial"/>
                 <a:ea typeface="Arial"/>
@@ -7435,7 +7450,7 @@
               <a:buNone/>
               <a:defRPr sz="1463" b="0">
                 <a:solidFill>
-                  <a:srgbClr val="152C3A"/>
+                  <a:srgbClr val="00355F"/>
                 </a:solidFill>
                 <a:latin typeface="Arial"/>
                 <a:ea typeface="Arial"/>
@@ -7445,7 +7460,7 @@
             <a:r>
               <a:rPr sz="1463" b="0">
                 <a:solidFill>
-                  <a:srgbClr val="152C3A"/>
+                  <a:srgbClr val="00355F"/>
                 </a:solidFill>
                 <a:latin typeface="Arial"/>
                 <a:ea typeface="Arial"/>
@@ -7462,7 +7477,7 @@
               <a:buNone/>
               <a:defRPr sz="1463" b="0">
                 <a:solidFill>
-                  <a:srgbClr val="152C3A"/>
+                  <a:srgbClr val="00355F"/>
                 </a:solidFill>
                 <a:latin typeface="Arial"/>
                 <a:ea typeface="Arial"/>
@@ -7472,7 +7487,7 @@
             <a:r>
               <a:rPr sz="1463" b="0">
                 <a:solidFill>
-                  <a:srgbClr val="152C3A"/>
+                  <a:srgbClr val="00355F"/>
                 </a:solidFill>
                 <a:latin typeface="Arial"/>
                 <a:ea typeface="Arial"/>
@@ -7488,7 +7503,7 @@
           <p:cNvPr id="69" name="">
             <a:extLst xmlns:a="http://schemas.openxmlformats.org/drawingml/2006/main">
               <a:ext uri="{FF2B5EF4-FFF2-40B4-BE49-F238E27FC236}">
-                <a16:creationId xmlns:a16="http://schemas.microsoft.com/office/drawing/2014/main" id="{80C660FB-BDA1-4248-9453-D88ADE0DC198}"/>
+                <a16:creationId xmlns:a16="http://schemas.microsoft.com/office/drawing/2014/main" id="{A4179371-7701-4787-B925-567CBC610AAC}"/>
               </a:ext>
             </a:extLst>
           </p:cNvPr>
@@ -7517,7 +7532,7 @@
           <a:noFill xmlns:a="http://schemas.openxmlformats.org/drawingml/2006/main"/>
           <a:ln xmlns:a="http://schemas.openxmlformats.org/drawingml/2006/main" w="9525">
             <a:solidFill>
-              <a:srgbClr val="D7E3E8"/>
+              <a:srgbClr val="A5A5A5"/>
             </a:solidFill>
           </a:ln>
         </p:spPr>
@@ -7527,7 +7542,7 @@
           <p:cNvPr id="70" name="REPRESENTATIVE SUPPLIERS">
             <a:extLst xmlns:a="http://schemas.openxmlformats.org/drawingml/2006/main">
               <a:ext uri="{FF2B5EF4-FFF2-40B4-BE49-F238E27FC236}">
-                <a16:creationId xmlns:a16="http://schemas.microsoft.com/office/drawing/2014/main" id="{1227D1B1-901E-46E7-8E5C-E45DD8E4FF69}"/>
+                <a16:creationId xmlns:a16="http://schemas.microsoft.com/office/drawing/2014/main" id="{2F8F67D1-98FC-4847-AE53-ECBD1E42E33D}"/>
               </a:ext>
             </a:extLst>
           </p:cNvPr>
@@ -7555,7 +7570,7 @@
             <a:defPPr algn="l">
               <a:defRPr sz="1163" b="1">
                 <a:solidFill>
-                  <a:srgbClr val="647887"/>
+                  <a:srgbClr val="00355F"/>
                 </a:solidFill>
                 <a:latin typeface="Arial"/>
                 <a:ea typeface="Arial"/>
@@ -7571,7 +7586,7 @@
               <a:buNone/>
               <a:defRPr sz="1163" b="1">
                 <a:solidFill>
-                  <a:srgbClr val="647887"/>
+                  <a:srgbClr val="00355F"/>
                 </a:solidFill>
                 <a:latin typeface="Arial"/>
                 <a:ea typeface="Arial"/>
@@ -7581,7 +7596,7 @@
             <a:r>
               <a:rPr sz="1163" b="1">
                 <a:solidFill>
-                  <a:srgbClr val="647887"/>
+                  <a:srgbClr val="00355F"/>
                 </a:solidFill>
                 <a:latin typeface="Arial"/>
                 <a:ea typeface="Arial"/>
@@ -7597,7 +7612,7 @@
           <p:cNvPr id="71" name="">
             <a:extLst xmlns:a="http://schemas.openxmlformats.org/drawingml/2006/main">
               <a:ext uri="{FF2B5EF4-FFF2-40B4-BE49-F238E27FC236}">
-                <a16:creationId xmlns:a16="http://schemas.microsoft.com/office/drawing/2014/main" id="{B3FA91BE-9AC4-4C73-9F9F-12F3F007B9A8}"/>
+                <a16:creationId xmlns:a16="http://schemas.microsoft.com/office/drawing/2014/main" id="{7CD99440-64C3-4FCD-A55E-D5E274E73D37}"/>
               </a:ext>
             </a:extLst>
           </p:cNvPr>
@@ -7607,7 +7622,7 @@
           <p:nvPr/>
         </p:nvPicPr>
         <p:blipFill>
-          <a:blip xmlns:r="http://schemas.openxmlformats.org/officeDocument/2006/relationships" xmlns:a="http://schemas.openxmlformats.org/drawingml/2006/main" r:embed="Rf5e0dfa57d844fc1"/>
+          <a:blip xmlns:r="http://schemas.openxmlformats.org/officeDocument/2006/relationships" xmlns:a="http://schemas.openxmlformats.org/drawingml/2006/main" r:embed="Racfd958878ae4de4"/>
           <a:stretch xmlns:a="http://schemas.openxmlformats.org/drawingml/2006/main"/>
         </p:blipFill>
         <p:spPr>
@@ -7625,7 +7640,7 @@
           <p:cNvPr id="72" name="Sino Biological · Bioss">
             <a:extLst xmlns:a="http://schemas.openxmlformats.org/drawingml/2006/main">
               <a:ext uri="{FF2B5EF4-FFF2-40B4-BE49-F238E27FC236}">
-                <a16:creationId xmlns:a16="http://schemas.microsoft.com/office/drawing/2014/main" id="{41F2831D-94B2-4F8A-9360-00F560101A1C}"/>
+                <a16:creationId xmlns:a16="http://schemas.microsoft.com/office/drawing/2014/main" id="{AAE7778C-4495-4DE9-B4B5-8399B9D701C0}"/>
               </a:ext>
             </a:extLst>
           </p:cNvPr>
@@ -7653,7 +7668,7 @@
             <a:defPPr algn="l">
               <a:defRPr sz="1275" b="0">
                 <a:solidFill>
-                  <a:srgbClr val="647887"/>
+                  <a:srgbClr val="00355F"/>
                 </a:solidFill>
                 <a:latin typeface="Arial"/>
                 <a:ea typeface="Arial"/>
@@ -7669,7 +7684,7 @@
               <a:buNone/>
               <a:defRPr sz="1275" b="0">
                 <a:solidFill>
-                  <a:srgbClr val="647887"/>
+                  <a:srgbClr val="00355F"/>
                 </a:solidFill>
                 <a:latin typeface="Arial"/>
                 <a:ea typeface="Arial"/>
@@ -7679,7 +7694,7 @@
             <a:r>
               <a:rPr sz="1275" b="0">
                 <a:solidFill>
-                  <a:srgbClr val="647887"/>
+                  <a:srgbClr val="00355F"/>
                 </a:solidFill>
                 <a:latin typeface="Arial"/>
                 <a:ea typeface="Arial"/>
@@ -7696,7 +7711,7 @@
               <a:buNone/>
               <a:defRPr sz="1275" b="0">
                 <a:solidFill>
-                  <a:srgbClr val="647887"/>
+                  <a:srgbClr val="00355F"/>
                 </a:solidFill>
                 <a:latin typeface="Arial"/>
                 <a:ea typeface="Arial"/>
@@ -7706,7 +7721,7 @@
             <a:r>
               <a:rPr sz="1275" b="0">
                 <a:solidFill>
-                  <a:srgbClr val="647887"/>
+                  <a:srgbClr val="00355F"/>
                 </a:solidFill>
                 <a:latin typeface="Arial"/>
                 <a:ea typeface="Arial"/>
@@ -7723,7 +7738,7 @@
               <a:buNone/>
               <a:defRPr sz="1275" b="0">
                 <a:solidFill>
-                  <a:srgbClr val="647887"/>
+                  <a:srgbClr val="00355F"/>
                 </a:solidFill>
                 <a:latin typeface="Arial"/>
                 <a:ea typeface="Arial"/>
@@ -7733,7 +7748,7 @@
             <a:r>
               <a:rPr sz="1275" b="0">
                 <a:solidFill>
-                  <a:srgbClr val="647887"/>
+                  <a:srgbClr val="00355F"/>
                 </a:solidFill>
                 <a:latin typeface="Arial"/>
                 <a:ea typeface="Arial"/>
@@ -7749,7 +7764,7 @@
           <p:cNvPr id="73" name="">
             <a:extLst xmlns:a="http://schemas.openxmlformats.org/drawingml/2006/main">
               <a:ext uri="{FF2B5EF4-FFF2-40B4-BE49-F238E27FC236}">
-                <a16:creationId xmlns:a16="http://schemas.microsoft.com/office/drawing/2014/main" id="{3803CE5C-C40B-44B7-ABBD-69996A7540B4}"/>
+                <a16:creationId xmlns:a16="http://schemas.microsoft.com/office/drawing/2014/main" id="{F073BBDE-E500-418B-94F2-982A0B55C8D3}"/>
               </a:ext>
             </a:extLst>
           </p:cNvPr>
@@ -7769,7 +7784,7 @@
             </a:avLst>
           </a:prstGeom>
           <a:solidFill xmlns:a="http://schemas.openxmlformats.org/drawingml/2006/main">
-            <a:srgbClr val="EEF3F4"/>
+            <a:srgbClr val="EEF6FC"/>
           </a:solidFill>
           <a:ln xmlns:a="http://schemas.openxmlformats.org/drawingml/2006/main" w="9525">
             <a:noFill/>
@@ -7781,7 +7796,7 @@
           <p:cNvPr id="74" name="">
             <a:extLst xmlns:a="http://schemas.openxmlformats.org/drawingml/2006/main">
               <a:ext uri="{FF2B5EF4-FFF2-40B4-BE49-F238E27FC236}">
-                <a16:creationId xmlns:a16="http://schemas.microsoft.com/office/drawing/2014/main" id="{3B34786F-7C70-455F-AD8A-916B503A28F9}"/>
+                <a16:creationId xmlns:a16="http://schemas.microsoft.com/office/drawing/2014/main" id="{5ABD6D3F-12FE-4CD0-8CDF-CDFE7191B79C}"/>
               </a:ext>
             </a:extLst>
           </p:cNvPr>
@@ -7805,7 +7820,7 @@
           </a:solidFill>
           <a:ln xmlns:a="http://schemas.openxmlformats.org/drawingml/2006/main" w="16193">
             <a:solidFill>
-              <a:srgbClr val="74B6AC"/>
+              <a:srgbClr val="7399C6"/>
             </a:solidFill>
           </a:ln>
         </p:spPr>
@@ -7815,7 +7830,7 @@
           <p:cNvPr id="75" name="">
             <a:extLst xmlns:a="http://schemas.openxmlformats.org/drawingml/2006/main">
               <a:ext uri="{FF2B5EF4-FFF2-40B4-BE49-F238E27FC236}">
-                <a16:creationId xmlns:a16="http://schemas.microsoft.com/office/drawing/2014/main" id="{7841F2DF-F5FF-477E-9859-E818FA97A8FE}"/>
+                <a16:creationId xmlns:a16="http://schemas.microsoft.com/office/drawing/2014/main" id="{DBC42EAB-8CD5-4C6D-AA8A-DB224C59E6C7}"/>
               </a:ext>
             </a:extLst>
           </p:cNvPr>
@@ -7833,7 +7848,7 @@
             <a:avLst/>
           </a:prstGeom>
           <a:solidFill xmlns:a="http://schemas.openxmlformats.org/drawingml/2006/main">
-            <a:srgbClr val="007D80"/>
+            <a:srgbClr val="00355F"/>
           </a:solidFill>
           <a:ln xmlns:a="http://schemas.openxmlformats.org/drawingml/2006/main" w="9525">
             <a:noFill/>
@@ -7845,7 +7860,7 @@
           <p:cNvPr id="76" name="04  /  TEST">
             <a:extLst xmlns:a="http://schemas.openxmlformats.org/drawingml/2006/main">
               <a:ext uri="{FF2B5EF4-FFF2-40B4-BE49-F238E27FC236}">
-                <a16:creationId xmlns:a16="http://schemas.microsoft.com/office/drawing/2014/main" id="{71029709-B494-4A13-B447-09F435B5371C}"/>
+                <a16:creationId xmlns:a16="http://schemas.microsoft.com/office/drawing/2014/main" id="{7C22D83B-9042-4E88-BF05-E6AD4C343B33}"/>
               </a:ext>
             </a:extLst>
           </p:cNvPr>
@@ -7873,7 +7888,7 @@
             <a:defPPr algn="l">
               <a:defRPr sz="1500" b="1">
                 <a:solidFill>
-                  <a:srgbClr val="007D80"/>
+                  <a:srgbClr val="00355F"/>
                 </a:solidFill>
                 <a:latin typeface="Arial"/>
                 <a:ea typeface="Arial"/>
@@ -7889,7 +7904,7 @@
               <a:buNone/>
               <a:defRPr sz="1500" b="1">
                 <a:solidFill>
-                  <a:srgbClr val="007D80"/>
+                  <a:srgbClr val="00355F"/>
                 </a:solidFill>
                 <a:latin typeface="Arial"/>
                 <a:ea typeface="Arial"/>
@@ -7899,7 +7914,7 @@
             <a:r>
               <a:rPr sz="1500" b="1">
                 <a:solidFill>
-                  <a:srgbClr val="007D80"/>
+                  <a:srgbClr val="00355F"/>
                 </a:solidFill>
                 <a:latin typeface="Arial"/>
                 <a:ea typeface="Arial"/>
@@ -7915,7 +7930,7 @@
           <p:cNvPr id="77" name="">
             <a:extLst xmlns:a="http://schemas.openxmlformats.org/drawingml/2006/main">
               <a:ext uri="{FF2B5EF4-FFF2-40B4-BE49-F238E27FC236}">
-                <a16:creationId xmlns:a16="http://schemas.microsoft.com/office/drawing/2014/main" id="{4892AF35-15C5-47B4-8C06-FF0C7687F1E7}"/>
+                <a16:creationId xmlns:a16="http://schemas.microsoft.com/office/drawing/2014/main" id="{3F3A21D6-840E-4F90-8FEE-DC1C6B9BEFBC}"/>
               </a:ext>
             </a:extLst>
           </p:cNvPr>
@@ -7925,10 +7940,10 @@
           <p:nvPr/>
         </p:nvPicPr>
         <p:blipFill>
-          <a:blip xmlns:r="http://schemas.openxmlformats.org/officeDocument/2006/relationships" xmlns:a="http://schemas.openxmlformats.org/drawingml/2006/main" r:embed="Rdc4019309e404978">
+          <a:blip xmlns:r="http://schemas.openxmlformats.org/officeDocument/2006/relationships" xmlns:a="http://schemas.openxmlformats.org/drawingml/2006/main" r:embed="Rfc2ab140f3d2408e">
             <a:extLst>
               <a:ext uri="{96DAC541-7B7A-43D3-8B79-37D633B846F1}">
-                <asvg:svgBlip xmlns:asvg="http://schemas.microsoft.com/office/drawing/2016/SVG/main" r:embed="R4bed151f2b9745b3"/>
+                <asvg:svgBlip xmlns:asvg="http://schemas.microsoft.com/office/drawing/2016/SVG/main" r:embed="R6de773746d124dba"/>
               </a:ext>
             </a:extLst>
           </a:blip>
@@ -7949,7 +7964,7 @@
           <p:cNvPr id="78" name="Multi-property">
             <a:extLst xmlns:a="http://schemas.openxmlformats.org/drawingml/2006/main">
               <a:ext uri="{FF2B5EF4-FFF2-40B4-BE49-F238E27FC236}">
-                <a16:creationId xmlns:a16="http://schemas.microsoft.com/office/drawing/2014/main" id="{75884417-4A5F-4CC4-AD85-6297234443C2}"/>
+                <a16:creationId xmlns:a16="http://schemas.microsoft.com/office/drawing/2014/main" id="{B9B8ADF1-4EE7-41CF-AAAA-48F24AD0645C}"/>
               </a:ext>
             </a:extLst>
           </p:cNvPr>
@@ -7977,7 +7992,7 @@
             <a:defPPr algn="l">
               <a:defRPr sz="2325" b="1">
                 <a:solidFill>
-                  <a:srgbClr val="152C3A"/>
+                  <a:srgbClr val="00355F"/>
                 </a:solidFill>
                 <a:latin typeface="Arial"/>
                 <a:ea typeface="Arial"/>
@@ -7993,7 +8008,7 @@
               <a:buNone/>
               <a:defRPr sz="2325" b="1">
                 <a:solidFill>
-                  <a:srgbClr val="152C3A"/>
+                  <a:srgbClr val="00355F"/>
                 </a:solidFill>
                 <a:latin typeface="Arial"/>
                 <a:ea typeface="Arial"/>
@@ -8003,7 +8018,7 @@
             <a:r>
               <a:rPr sz="2325" b="1">
                 <a:solidFill>
-                  <a:srgbClr val="152C3A"/>
+                  <a:srgbClr val="00355F"/>
                 </a:solidFill>
                 <a:latin typeface="Arial"/>
                 <a:ea typeface="Arial"/>
@@ -8020,7 +8035,7 @@
               <a:buNone/>
               <a:defRPr sz="2325" b="1">
                 <a:solidFill>
-                  <a:srgbClr val="152C3A"/>
+                  <a:srgbClr val="00355F"/>
                 </a:solidFill>
                 <a:latin typeface="Arial"/>
                 <a:ea typeface="Arial"/>
@@ -8030,7 +8045,7 @@
             <a:r>
               <a:rPr sz="2325" b="1">
                 <a:solidFill>
-                  <a:srgbClr val="152C3A"/>
+                  <a:srgbClr val="00355F"/>
                 </a:solidFill>
                 <a:latin typeface="Arial"/>
                 <a:ea typeface="Arial"/>
@@ -8046,7 +8061,7 @@
           <p:cNvPr id="79" name="Evaluate binding, specificity">
             <a:extLst xmlns:a="http://schemas.openxmlformats.org/drawingml/2006/main">
               <a:ext uri="{FF2B5EF4-FFF2-40B4-BE49-F238E27FC236}">
-                <a16:creationId xmlns:a16="http://schemas.microsoft.com/office/drawing/2014/main" id="{D70DADC0-44E3-43FC-B1F5-0C1811B2D351}"/>
+                <a16:creationId xmlns:a16="http://schemas.microsoft.com/office/drawing/2014/main" id="{8058D861-3863-41C5-A32E-C0EA68F1280C}"/>
               </a:ext>
             </a:extLst>
           </p:cNvPr>
@@ -8074,7 +8089,7 @@
             <a:defPPr algn="l">
               <a:defRPr sz="1575" b="0">
                 <a:solidFill>
-                  <a:srgbClr val="647887"/>
+                  <a:srgbClr val="00355F"/>
                 </a:solidFill>
                 <a:latin typeface="Arial"/>
                 <a:ea typeface="Arial"/>
@@ -8090,7 +8105,7 @@
               <a:buNone/>
               <a:defRPr sz="1575" b="0">
                 <a:solidFill>
-                  <a:srgbClr val="647887"/>
+                  <a:srgbClr val="00355F"/>
                 </a:solidFill>
                 <a:latin typeface="Arial"/>
                 <a:ea typeface="Arial"/>
@@ -8100,7 +8115,7 @@
             <a:r>
               <a:rPr sz="1575" b="0">
                 <a:solidFill>
-                  <a:srgbClr val="647887"/>
+                  <a:srgbClr val="00355F"/>
                 </a:solidFill>
                 <a:latin typeface="Arial"/>
                 <a:ea typeface="Arial"/>
@@ -8117,7 +8132,7 @@
               <a:buNone/>
               <a:defRPr sz="1575" b="0">
                 <a:solidFill>
-                  <a:srgbClr val="647887"/>
+                  <a:srgbClr val="00355F"/>
                 </a:solidFill>
                 <a:latin typeface="Arial"/>
                 <a:ea typeface="Arial"/>
@@ -8127,7 +8142,7 @@
             <a:r>
               <a:rPr sz="1575" b="0">
                 <a:solidFill>
-                  <a:srgbClr val="647887"/>
+                  <a:srgbClr val="00355F"/>
                 </a:solidFill>
                 <a:latin typeface="Arial"/>
                 <a:ea typeface="Arial"/>
@@ -8143,7 +8158,7 @@
           <p:cNvPr id="80" name="">
             <a:extLst xmlns:a="http://schemas.openxmlformats.org/drawingml/2006/main">
               <a:ext uri="{FF2B5EF4-FFF2-40B4-BE49-F238E27FC236}">
-                <a16:creationId xmlns:a16="http://schemas.microsoft.com/office/drawing/2014/main" id="{69783699-36AF-42D0-A5E2-DDBDCFABB807}"/>
+                <a16:creationId xmlns:a16="http://schemas.microsoft.com/office/drawing/2014/main" id="{BCFCB56C-105A-4C15-8D2E-35C9B14AB157}"/>
               </a:ext>
             </a:extLst>
           </p:cNvPr>
@@ -8163,7 +8178,7 @@
             </a:avLst>
           </a:prstGeom>
           <a:solidFill xmlns:a="http://schemas.openxmlformats.org/drawingml/2006/main">
-            <a:srgbClr val="EAF6F4"/>
+            <a:srgbClr val="EEF6FC"/>
           </a:solidFill>
           <a:ln xmlns:a="http://schemas.openxmlformats.org/drawingml/2006/main" w="9525">
             <a:noFill/>
@@ -8175,7 +8190,7 @@
           <p:cNvPr id="81" name="KD · kon · koff · expression†">
             <a:extLst xmlns:a="http://schemas.openxmlformats.org/drawingml/2006/main">
               <a:ext uri="{FF2B5EF4-FFF2-40B4-BE49-F238E27FC236}">
-                <a16:creationId xmlns:a16="http://schemas.microsoft.com/office/drawing/2014/main" id="{511B7262-8352-4385-A8DF-24ACAA35F3FF}"/>
+                <a16:creationId xmlns:a16="http://schemas.microsoft.com/office/drawing/2014/main" id="{E685FBE1-93B7-4B07-B430-7F1CD82D5C68}"/>
               </a:ext>
             </a:extLst>
           </p:cNvPr>
@@ -8203,7 +8218,7 @@
             <a:defPPr algn="l">
               <a:defRPr sz="1388" b="1">
                 <a:solidFill>
-                  <a:srgbClr val="007D80"/>
+                  <a:srgbClr val="00355F"/>
                 </a:solidFill>
                 <a:latin typeface="Arial"/>
                 <a:ea typeface="Arial"/>
@@ -8219,7 +8234,7 @@
               <a:buNone/>
               <a:defRPr sz="1388" b="1">
                 <a:solidFill>
-                  <a:srgbClr val="007D80"/>
+                  <a:srgbClr val="00355F"/>
                 </a:solidFill>
                 <a:latin typeface="Arial"/>
                 <a:ea typeface="Arial"/>
@@ -8229,7 +8244,7 @@
             <a:r>
               <a:rPr sz="1388" b="1">
                 <a:solidFill>
-                  <a:srgbClr val="007D80"/>
+                  <a:srgbClr val="00355F"/>
                 </a:solidFill>
                 <a:latin typeface="Arial"/>
                 <a:ea typeface="Arial"/>
@@ -8246,7 +8261,7 @@
               <a:buNone/>
               <a:defRPr sz="1388" b="1">
                 <a:solidFill>
-                  <a:srgbClr val="007D80"/>
+                  <a:srgbClr val="00355F"/>
                 </a:solidFill>
                 <a:latin typeface="Arial"/>
                 <a:ea typeface="Arial"/>
@@ -8256,7 +8271,7 @@
             <a:r>
               <a:rPr sz="1388" b="1">
                 <a:solidFill>
-                  <a:srgbClr val="007D80"/>
+                  <a:srgbClr val="00355F"/>
                 </a:solidFill>
                 <a:latin typeface="Arial"/>
                 <a:ea typeface="Arial"/>
@@ -8273,7 +8288,7 @@
               <a:buNone/>
               <a:defRPr sz="1388" b="1">
                 <a:solidFill>
-                  <a:srgbClr val="007D80"/>
+                  <a:srgbClr val="00355F"/>
                 </a:solidFill>
                 <a:latin typeface="Arial"/>
                 <a:ea typeface="Arial"/>
@@ -8283,7 +8298,7 @@
             <a:r>
               <a:rPr sz="1388" b="1">
                 <a:solidFill>
-                  <a:srgbClr val="007D80"/>
+                  <a:srgbClr val="00355F"/>
                 </a:solidFill>
                 <a:latin typeface="Arial"/>
                 <a:ea typeface="Arial"/>
@@ -8299,7 +8314,7 @@
           <p:cNvPr id="82" name="REAGENTS">
             <a:extLst xmlns:a="http://schemas.openxmlformats.org/drawingml/2006/main">
               <a:ext uri="{FF2B5EF4-FFF2-40B4-BE49-F238E27FC236}">
-                <a16:creationId xmlns:a16="http://schemas.microsoft.com/office/drawing/2014/main" id="{BAED1A10-018D-4A78-B3ED-F4D02C97BFE1}"/>
+                <a16:creationId xmlns:a16="http://schemas.microsoft.com/office/drawing/2014/main" id="{DE7ACC71-533C-4DC0-8DB9-9693355D418C}"/>
               </a:ext>
             </a:extLst>
           </p:cNvPr>
@@ -8327,7 +8342,7 @@
             <a:defPPr algn="l">
               <a:defRPr sz="1238" b="1">
                 <a:solidFill>
-                  <a:srgbClr val="647887"/>
+                  <a:srgbClr val="00355F"/>
                 </a:solidFill>
                 <a:latin typeface="Arial"/>
                 <a:ea typeface="Arial"/>
@@ -8343,7 +8358,7 @@
               <a:buNone/>
               <a:defRPr sz="1238" b="1">
                 <a:solidFill>
-                  <a:srgbClr val="647887"/>
+                  <a:srgbClr val="00355F"/>
                 </a:solidFill>
                 <a:latin typeface="Arial"/>
                 <a:ea typeface="Arial"/>
@@ -8353,7 +8368,7 @@
             <a:r>
               <a:rPr sz="1238" b="1">
                 <a:solidFill>
-                  <a:srgbClr val="647887"/>
+                  <a:srgbClr val="00355F"/>
                 </a:solidFill>
                 <a:latin typeface="Arial"/>
                 <a:ea typeface="Arial"/>
@@ -8369,7 +8384,7 @@
           <p:cNvPr id="83" name="Reference proteins, dyes">
             <a:extLst xmlns:a="http://schemas.openxmlformats.org/drawingml/2006/main">
               <a:ext uri="{FF2B5EF4-FFF2-40B4-BE49-F238E27FC236}">
-                <a16:creationId xmlns:a16="http://schemas.microsoft.com/office/drawing/2014/main" id="{D2B88EFC-4F7D-4E72-86C5-C5DAE8D8F3BC}"/>
+                <a16:creationId xmlns:a16="http://schemas.microsoft.com/office/drawing/2014/main" id="{9725A7E7-9D07-4C51-9B73-DF20B3F5422F}"/>
               </a:ext>
             </a:extLst>
           </p:cNvPr>
@@ -8397,7 +8412,7 @@
             <a:defPPr algn="l">
               <a:defRPr sz="1463" b="0">
                 <a:solidFill>
-                  <a:srgbClr val="152C3A"/>
+                  <a:srgbClr val="00355F"/>
                 </a:solidFill>
                 <a:latin typeface="Arial"/>
                 <a:ea typeface="Arial"/>
@@ -8413,7 +8428,7 @@
               <a:buNone/>
               <a:defRPr sz="1463" b="0">
                 <a:solidFill>
-                  <a:srgbClr val="152C3A"/>
+                  <a:srgbClr val="00355F"/>
                 </a:solidFill>
                 <a:latin typeface="Arial"/>
                 <a:ea typeface="Arial"/>
@@ -8423,7 +8438,7 @@
             <a:r>
               <a:rPr sz="1463" b="0">
                 <a:solidFill>
-                  <a:srgbClr val="152C3A"/>
+                  <a:srgbClr val="00355F"/>
                 </a:solidFill>
                 <a:latin typeface="Arial"/>
                 <a:ea typeface="Arial"/>
@@ -8440,7 +8455,7 @@
               <a:buNone/>
               <a:defRPr sz="1463" b="0">
                 <a:solidFill>
-                  <a:srgbClr val="152C3A"/>
+                  <a:srgbClr val="00355F"/>
                 </a:solidFill>
                 <a:latin typeface="Arial"/>
                 <a:ea typeface="Arial"/>
@@ -8450,7 +8465,7 @@
             <a:r>
               <a:rPr sz="1463" b="0">
                 <a:solidFill>
-                  <a:srgbClr val="152C3A"/>
+                  <a:srgbClr val="00355F"/>
                 </a:solidFill>
                 <a:latin typeface="Arial"/>
                 <a:ea typeface="Arial"/>
@@ -8467,7 +8482,7 @@
               <a:buNone/>
               <a:defRPr sz="1463" b="0">
                 <a:solidFill>
-                  <a:srgbClr val="152C3A"/>
+                  <a:srgbClr val="00355F"/>
                 </a:solidFill>
                 <a:latin typeface="Arial"/>
                 <a:ea typeface="Arial"/>
@@ -8477,7 +8492,7 @@
             <a:r>
               <a:rPr sz="1463" b="0">
                 <a:solidFill>
-                  <a:srgbClr val="152C3A"/>
+                  <a:srgbClr val="00355F"/>
                 </a:solidFill>
                 <a:latin typeface="Arial"/>
                 <a:ea typeface="Arial"/>
@@ -8493,7 +8508,7 @@
           <p:cNvPr id="84" name="INSTRUMENTS">
             <a:extLst xmlns:a="http://schemas.openxmlformats.org/drawingml/2006/main">
               <a:ext uri="{FF2B5EF4-FFF2-40B4-BE49-F238E27FC236}">
-                <a16:creationId xmlns:a16="http://schemas.microsoft.com/office/drawing/2014/main" id="{E8AECF1F-269D-44BA-B8B5-BC605736E4BA}"/>
+                <a16:creationId xmlns:a16="http://schemas.microsoft.com/office/drawing/2014/main" id="{39DA2ADA-B286-4F8D-A4A1-E519F67B367C}"/>
               </a:ext>
             </a:extLst>
           </p:cNvPr>
@@ -8521,7 +8536,7 @@
             <a:defPPr algn="l">
               <a:defRPr sz="1238" b="1">
                 <a:solidFill>
-                  <a:srgbClr val="647887"/>
+                  <a:srgbClr val="00355F"/>
                 </a:solidFill>
                 <a:latin typeface="Arial"/>
                 <a:ea typeface="Arial"/>
@@ -8537,7 +8552,7 @@
               <a:buNone/>
               <a:defRPr sz="1238" b="1">
                 <a:solidFill>
-                  <a:srgbClr val="647887"/>
+                  <a:srgbClr val="00355F"/>
                 </a:solidFill>
                 <a:latin typeface="Arial"/>
                 <a:ea typeface="Arial"/>
@@ -8547,7 +8562,7 @@
             <a:r>
               <a:rPr sz="1238" b="1">
                 <a:solidFill>
-                  <a:srgbClr val="647887"/>
+                  <a:srgbClr val="00355F"/>
                 </a:solidFill>
                 <a:latin typeface="Arial"/>
                 <a:ea typeface="Arial"/>
@@ -8563,7 +8578,7 @@
           <p:cNvPr id="85" name="SPR / BLI; SEC-HPLC">
             <a:extLst xmlns:a="http://schemas.openxmlformats.org/drawingml/2006/main">
               <a:ext uri="{FF2B5EF4-FFF2-40B4-BE49-F238E27FC236}">
-                <a16:creationId xmlns:a16="http://schemas.microsoft.com/office/drawing/2014/main" id="{DC58F778-F223-4ED1-9562-00CC215161BF}"/>
+                <a16:creationId xmlns:a16="http://schemas.microsoft.com/office/drawing/2014/main" id="{7DE1A282-9FE6-42CC-8194-F7BA34D3C89A}"/>
               </a:ext>
             </a:extLst>
           </p:cNvPr>
@@ -8591,7 +8606,7 @@
             <a:defPPr algn="l">
               <a:defRPr sz="1463" b="0">
                 <a:solidFill>
-                  <a:srgbClr val="152C3A"/>
+                  <a:srgbClr val="00355F"/>
                 </a:solidFill>
                 <a:latin typeface="Arial"/>
                 <a:ea typeface="Arial"/>
@@ -8607,7 +8622,7 @@
               <a:buNone/>
               <a:defRPr sz="1463" b="0">
                 <a:solidFill>
-                  <a:srgbClr val="152C3A"/>
+                  <a:srgbClr val="00355F"/>
                 </a:solidFill>
                 <a:latin typeface="Arial"/>
                 <a:ea typeface="Arial"/>
@@ -8617,7 +8632,7 @@
             <a:r>
               <a:rPr sz="1463" b="0">
                 <a:solidFill>
-                  <a:srgbClr val="152C3A"/>
+                  <a:srgbClr val="00355F"/>
                 </a:solidFill>
                 <a:latin typeface="Arial"/>
                 <a:ea typeface="Arial"/>
@@ -8634,7 +8649,7 @@
               <a:buNone/>
               <a:defRPr sz="1463" b="0">
                 <a:solidFill>
-                  <a:srgbClr val="152C3A"/>
+                  <a:srgbClr val="00355F"/>
                 </a:solidFill>
                 <a:latin typeface="Arial"/>
                 <a:ea typeface="Arial"/>
@@ -8644,7 +8659,7 @@
             <a:r>
               <a:rPr sz="1463" b="0">
                 <a:solidFill>
-                  <a:srgbClr val="152C3A"/>
+                  <a:srgbClr val="00355F"/>
                 </a:solidFill>
                 <a:latin typeface="Arial"/>
                 <a:ea typeface="Arial"/>
@@ -8661,7 +8676,7 @@
               <a:buNone/>
               <a:defRPr sz="1463" b="0">
                 <a:solidFill>
-                  <a:srgbClr val="152C3A"/>
+                  <a:srgbClr val="00355F"/>
                 </a:solidFill>
                 <a:latin typeface="Arial"/>
                 <a:ea typeface="Arial"/>
@@ -8671,7 +8686,7 @@
             <a:r>
               <a:rPr sz="1463" b="0">
                 <a:solidFill>
-                  <a:srgbClr val="152C3A"/>
+                  <a:srgbClr val="00355F"/>
                 </a:solidFill>
                 <a:latin typeface="Arial"/>
                 <a:ea typeface="Arial"/>
@@ -8687,7 +8702,7 @@
           <p:cNvPr id="86" name="CONSUMABLES">
             <a:extLst xmlns:a="http://schemas.openxmlformats.org/drawingml/2006/main">
               <a:ext uri="{FF2B5EF4-FFF2-40B4-BE49-F238E27FC236}">
-                <a16:creationId xmlns:a16="http://schemas.microsoft.com/office/drawing/2014/main" id="{733682AF-3555-4019-AFA8-692997F826B5}"/>
+                <a16:creationId xmlns:a16="http://schemas.microsoft.com/office/drawing/2014/main" id="{DB71CA53-F5C7-491B-B1A1-55CABC4C8E75}"/>
               </a:ext>
             </a:extLst>
           </p:cNvPr>
@@ -8715,7 +8730,7 @@
             <a:defPPr algn="l">
               <a:defRPr sz="1238" b="1">
                 <a:solidFill>
-                  <a:srgbClr val="647887"/>
+                  <a:srgbClr val="00355F"/>
                 </a:solidFill>
                 <a:latin typeface="Arial"/>
                 <a:ea typeface="Arial"/>
@@ -8731,7 +8746,7 @@
               <a:buNone/>
               <a:defRPr sz="1238" b="1">
                 <a:solidFill>
-                  <a:srgbClr val="647887"/>
+                  <a:srgbClr val="00355F"/>
                 </a:solidFill>
                 <a:latin typeface="Arial"/>
                 <a:ea typeface="Arial"/>
@@ -8741,7 +8756,7 @@
             <a:r>
               <a:rPr sz="1238" b="1">
                 <a:solidFill>
-                  <a:srgbClr val="647887"/>
+                  <a:srgbClr val="00355F"/>
                 </a:solidFill>
                 <a:latin typeface="Arial"/>
                 <a:ea typeface="Arial"/>
@@ -8757,7 +8772,7 @@
           <p:cNvPr id="87" name="Columns, capillaries">
             <a:extLst xmlns:a="http://schemas.openxmlformats.org/drawingml/2006/main">
               <a:ext uri="{FF2B5EF4-FFF2-40B4-BE49-F238E27FC236}">
-                <a16:creationId xmlns:a16="http://schemas.microsoft.com/office/drawing/2014/main" id="{C961277F-359A-49DB-ABB7-C08FE7F655F6}"/>
+                <a16:creationId xmlns:a16="http://schemas.microsoft.com/office/drawing/2014/main" id="{C992B60D-F1C1-43B4-8CB0-3F8F9494BD8C}"/>
               </a:ext>
             </a:extLst>
           </p:cNvPr>
@@ -8785,7 +8800,7 @@
             <a:defPPr algn="l">
               <a:defRPr sz="1463" b="0">
                 <a:solidFill>
-                  <a:srgbClr val="152C3A"/>
+                  <a:srgbClr val="00355F"/>
                 </a:solidFill>
                 <a:latin typeface="Arial"/>
                 <a:ea typeface="Arial"/>
@@ -8801,7 +8816,7 @@
               <a:buNone/>
               <a:defRPr sz="1463" b="0">
                 <a:solidFill>
-                  <a:srgbClr val="152C3A"/>
+                  <a:srgbClr val="00355F"/>
                 </a:solidFill>
                 <a:latin typeface="Arial"/>
                 <a:ea typeface="Arial"/>
@@ -8811,7 +8826,7 @@
             <a:r>
               <a:rPr sz="1463" b="0">
                 <a:solidFill>
-                  <a:srgbClr val="152C3A"/>
+                  <a:srgbClr val="00355F"/>
                 </a:solidFill>
                 <a:latin typeface="Arial"/>
                 <a:ea typeface="Arial"/>
@@ -8828,7 +8843,7 @@
               <a:buNone/>
               <a:defRPr sz="1463" b="0">
                 <a:solidFill>
-                  <a:srgbClr val="152C3A"/>
+                  <a:srgbClr val="00355F"/>
                 </a:solidFill>
                 <a:latin typeface="Arial"/>
                 <a:ea typeface="Arial"/>
@@ -8838,7 +8853,7 @@
             <a:r>
               <a:rPr sz="1463" b="0">
                 <a:solidFill>
-                  <a:srgbClr val="152C3A"/>
+                  <a:srgbClr val="00355F"/>
                 </a:solidFill>
                 <a:latin typeface="Arial"/>
                 <a:ea typeface="Arial"/>
@@ -8855,7 +8870,7 @@
               <a:buNone/>
               <a:defRPr sz="1463" b="0">
                 <a:solidFill>
-                  <a:srgbClr val="152C3A"/>
+                  <a:srgbClr val="00355F"/>
                 </a:solidFill>
                 <a:latin typeface="Arial"/>
                 <a:ea typeface="Arial"/>
@@ -8865,7 +8880,7 @@
             <a:r>
               <a:rPr sz="1463" b="0">
                 <a:solidFill>
-                  <a:srgbClr val="152C3A"/>
+                  <a:srgbClr val="00355F"/>
                 </a:solidFill>
                 <a:latin typeface="Arial"/>
                 <a:ea typeface="Arial"/>
@@ -8881,7 +8896,7 @@
           <p:cNvPr id="88" name="">
             <a:extLst xmlns:a="http://schemas.openxmlformats.org/drawingml/2006/main">
               <a:ext uri="{FF2B5EF4-FFF2-40B4-BE49-F238E27FC236}">
-                <a16:creationId xmlns:a16="http://schemas.microsoft.com/office/drawing/2014/main" id="{05670C85-6D11-463C-A8D6-610EA539A3B0}"/>
+                <a16:creationId xmlns:a16="http://schemas.microsoft.com/office/drawing/2014/main" id="{632EB261-16CD-4E71-A60A-D7B03207987F}"/>
               </a:ext>
             </a:extLst>
           </p:cNvPr>
@@ -8910,7 +8925,7 @@
           <a:noFill xmlns:a="http://schemas.openxmlformats.org/drawingml/2006/main"/>
           <a:ln xmlns:a="http://schemas.openxmlformats.org/drawingml/2006/main" w="9525">
             <a:solidFill>
-              <a:srgbClr val="D7E3E8"/>
+              <a:srgbClr val="A5A5A5"/>
             </a:solidFill>
           </a:ln>
         </p:spPr>
@@ -8920,7 +8935,7 @@
           <p:cNvPr id="89" name="REPRESENTATIVE SUPPLIERS">
             <a:extLst xmlns:a="http://schemas.openxmlformats.org/drawingml/2006/main">
               <a:ext uri="{FF2B5EF4-FFF2-40B4-BE49-F238E27FC236}">
-                <a16:creationId xmlns:a16="http://schemas.microsoft.com/office/drawing/2014/main" id="{604EBB11-8848-4C00-A60A-013B670E9BCA}"/>
+                <a16:creationId xmlns:a16="http://schemas.microsoft.com/office/drawing/2014/main" id="{2E8ACE56-A443-4E05-933D-3FFD1581B3D3}"/>
               </a:ext>
             </a:extLst>
           </p:cNvPr>
@@ -8948,7 +8963,7 @@
             <a:defPPr algn="l">
               <a:defRPr sz="1163" b="1">
                 <a:solidFill>
-                  <a:srgbClr val="647887"/>
+                  <a:srgbClr val="00355F"/>
                 </a:solidFill>
                 <a:latin typeface="Arial"/>
                 <a:ea typeface="Arial"/>
@@ -8964,7 +8979,7 @@
               <a:buNone/>
               <a:defRPr sz="1163" b="1">
                 <a:solidFill>
-                  <a:srgbClr val="647887"/>
+                  <a:srgbClr val="00355F"/>
                 </a:solidFill>
                 <a:latin typeface="Arial"/>
                 <a:ea typeface="Arial"/>
@@ -8974,7 +8989,7 @@
             <a:r>
               <a:rPr sz="1163" b="1">
                 <a:solidFill>
-                  <a:srgbClr val="647887"/>
+                  <a:srgbClr val="00355F"/>
                 </a:solidFill>
                 <a:latin typeface="Arial"/>
                 <a:ea typeface="Arial"/>
@@ -8990,7 +9005,7 @@
           <p:cNvPr id="90" name="">
             <a:extLst xmlns:a="http://schemas.openxmlformats.org/drawingml/2006/main">
               <a:ext uri="{FF2B5EF4-FFF2-40B4-BE49-F238E27FC236}">
-                <a16:creationId xmlns:a16="http://schemas.microsoft.com/office/drawing/2014/main" id="{D79F559A-04F5-4F9C-80DE-7195E711DFB0}"/>
+                <a16:creationId xmlns:a16="http://schemas.microsoft.com/office/drawing/2014/main" id="{1880B232-83DA-4DE2-94D8-38D989C078CD}"/>
               </a:ext>
             </a:extLst>
           </p:cNvPr>
@@ -9000,10 +9015,10 @@
           <p:nvPr/>
         </p:nvPicPr>
         <p:blipFill>
-          <a:blip xmlns:r="http://schemas.openxmlformats.org/officeDocument/2006/relationships" xmlns:a="http://schemas.openxmlformats.org/drawingml/2006/main" r:embed="R27d245bc5c99474a">
+          <a:blip xmlns:r="http://schemas.openxmlformats.org/officeDocument/2006/relationships" xmlns:a="http://schemas.openxmlformats.org/drawingml/2006/main" r:embed="R9ed6517bb11d4b65">
             <a:extLst>
               <a:ext uri="{96DAC541-7B7A-43D3-8B79-37D633B846F1}">
-                <asvg:svgBlip xmlns:asvg="http://schemas.microsoft.com/office/drawing/2016/SVG/main" r:embed="R39fa8ff35abe4c5c"/>
+                <asvg:svgBlip xmlns:asvg="http://schemas.microsoft.com/office/drawing/2016/SVG/main" r:embed="R329e813a75db48aa"/>
               </a:ext>
             </a:extLst>
           </a:blip>
@@ -9024,7 +9039,7 @@
           <p:cNvPr id="91" name="NanoMicro">
             <a:extLst xmlns:a="http://schemas.openxmlformats.org/drawingml/2006/main">
               <a:ext uri="{FF2B5EF4-FFF2-40B4-BE49-F238E27FC236}">
-                <a16:creationId xmlns:a16="http://schemas.microsoft.com/office/drawing/2014/main" id="{544626A4-AE53-4816-B95A-79CAF8B33AE3}"/>
+                <a16:creationId xmlns:a16="http://schemas.microsoft.com/office/drawing/2014/main" id="{25CFE924-DD5A-4816-ADBC-5B5F3788A192}"/>
               </a:ext>
             </a:extLst>
           </p:cNvPr>
@@ -9052,7 +9067,7 @@
             <a:defPPr algn="l">
               <a:defRPr sz="1875" b="1">
                 <a:solidFill>
-                  <a:srgbClr val="007D80"/>
+                  <a:srgbClr val="00355F"/>
                 </a:solidFill>
                 <a:latin typeface="Arial"/>
                 <a:ea typeface="Arial"/>
@@ -9068,7 +9083,7 @@
               <a:buNone/>
               <a:defRPr sz="1875" b="1">
                 <a:solidFill>
-                  <a:srgbClr val="007D80"/>
+                  <a:srgbClr val="00355F"/>
                 </a:solidFill>
                 <a:latin typeface="Arial"/>
                 <a:ea typeface="Arial"/>
@@ -9078,7 +9093,7 @@
             <a:r>
               <a:rPr sz="1875" b="1">
                 <a:solidFill>
-                  <a:srgbClr val="007D80"/>
+                  <a:srgbClr val="00355F"/>
                 </a:solidFill>
                 <a:latin typeface="Arial"/>
                 <a:ea typeface="Arial"/>
@@ -9094,7 +9109,7 @@
           <p:cNvPr id="92" name="Waters · Agilent · Thermo Fisher">
             <a:extLst xmlns:a="http://schemas.openxmlformats.org/drawingml/2006/main">
               <a:ext uri="{FF2B5EF4-FFF2-40B4-BE49-F238E27FC236}">
-                <a16:creationId xmlns:a16="http://schemas.microsoft.com/office/drawing/2014/main" id="{D8CD6408-9A45-4B3A-AD0A-CFF954CB3AA2}"/>
+                <a16:creationId xmlns:a16="http://schemas.microsoft.com/office/drawing/2014/main" id="{06FFD3A0-FBC8-4FD0-9487-8A3BB9ED8A46}"/>
               </a:ext>
             </a:extLst>
           </p:cNvPr>
@@ -9122,7 +9137,7 @@
             <a:defPPr algn="l">
               <a:defRPr sz="1238" b="0">
                 <a:solidFill>
-                  <a:srgbClr val="647887"/>
+                  <a:srgbClr val="00355F"/>
                 </a:solidFill>
                 <a:latin typeface="Arial"/>
                 <a:ea typeface="Arial"/>
@@ -9138,7 +9153,7 @@
               <a:buNone/>
               <a:defRPr sz="1238" b="0">
                 <a:solidFill>
-                  <a:srgbClr val="647887"/>
+                  <a:srgbClr val="00355F"/>
                 </a:solidFill>
                 <a:latin typeface="Arial"/>
                 <a:ea typeface="Arial"/>
@@ -9148,7 +9163,7 @@
             <a:r>
               <a:rPr sz="1238" b="0">
                 <a:solidFill>
-                  <a:srgbClr val="647887"/>
+                  <a:srgbClr val="00355F"/>
                 </a:solidFill>
                 <a:latin typeface="Arial"/>
                 <a:ea typeface="Arial"/>
@@ -9165,7 +9180,7 @@
               <a:buNone/>
               <a:defRPr sz="1238" b="0">
                 <a:solidFill>
-                  <a:srgbClr val="647887"/>
+                  <a:srgbClr val="00355F"/>
                 </a:solidFill>
                 <a:latin typeface="Arial"/>
                 <a:ea typeface="Arial"/>
@@ -9175,7 +9190,7 @@
             <a:r>
               <a:rPr sz="1238" b="0">
                 <a:solidFill>
-                  <a:srgbClr val="647887"/>
+                  <a:srgbClr val="00355F"/>
                 </a:solidFill>
                 <a:latin typeface="Arial"/>
                 <a:ea typeface="Arial"/>
@@ -9192,7 +9207,7 @@
               <a:buNone/>
               <a:defRPr sz="1238" b="0">
                 <a:solidFill>
-                  <a:srgbClr val="647887"/>
+                  <a:srgbClr val="00355F"/>
                 </a:solidFill>
                 <a:latin typeface="Arial"/>
                 <a:ea typeface="Arial"/>
@@ -9202,7 +9217,7 @@
             <a:r>
               <a:rPr sz="1238" b="0">
                 <a:solidFill>
-                  <a:srgbClr val="647887"/>
+                  <a:srgbClr val="00355F"/>
                 </a:solidFill>
                 <a:latin typeface="Arial"/>
                 <a:ea typeface="Arial"/>
@@ -9218,7 +9233,7 @@
           <p:cNvPr id="93" name="">
             <a:extLst xmlns:a="http://schemas.openxmlformats.org/drawingml/2006/main">
               <a:ext uri="{FF2B5EF4-FFF2-40B4-BE49-F238E27FC236}">
-                <a16:creationId xmlns:a16="http://schemas.microsoft.com/office/drawing/2014/main" id="{79037BD3-D5DC-4842-974C-861406B459F4}"/>
+                <a16:creationId xmlns:a16="http://schemas.microsoft.com/office/drawing/2014/main" id="{090BD375-CFB1-40CC-BB01-43A63FC1982C}"/>
               </a:ext>
             </a:extLst>
           </p:cNvPr>
@@ -9238,7 +9253,7 @@
             </a:avLst>
           </a:prstGeom>
           <a:solidFill xmlns:a="http://schemas.openxmlformats.org/drawingml/2006/main">
-            <a:srgbClr val="EEF3F4"/>
+            <a:srgbClr val="EEF6FC"/>
           </a:solidFill>
           <a:ln xmlns:a="http://schemas.openxmlformats.org/drawingml/2006/main" w="9525">
             <a:noFill/>
@@ -9250,7 +9265,7 @@
           <p:cNvPr id="94" name="">
             <a:extLst xmlns:a="http://schemas.openxmlformats.org/drawingml/2006/main">
               <a:ext uri="{FF2B5EF4-FFF2-40B4-BE49-F238E27FC236}">
-                <a16:creationId xmlns:a16="http://schemas.microsoft.com/office/drawing/2014/main" id="{4469EFBD-E070-41AD-A44C-89A6B1312D49}"/>
+                <a16:creationId xmlns:a16="http://schemas.microsoft.com/office/drawing/2014/main" id="{50100237-CABA-4FF8-B307-ADCE029D13C6}"/>
               </a:ext>
             </a:extLst>
           </p:cNvPr>
@@ -9274,7 +9289,7 @@
           </a:solidFill>
           <a:ln xmlns:a="http://schemas.openxmlformats.org/drawingml/2006/main" w="16193">
             <a:solidFill>
-              <a:srgbClr val="74B6AC"/>
+              <a:srgbClr val="7399C6"/>
             </a:solidFill>
           </a:ln>
         </p:spPr>
@@ -9284,7 +9299,7 @@
           <p:cNvPr id="95" name="">
             <a:extLst xmlns:a="http://schemas.openxmlformats.org/drawingml/2006/main">
               <a:ext uri="{FF2B5EF4-FFF2-40B4-BE49-F238E27FC236}">
-                <a16:creationId xmlns:a16="http://schemas.microsoft.com/office/drawing/2014/main" id="{16800FFD-0E19-418B-B161-76CCBF0E9B71}"/>
+                <a16:creationId xmlns:a16="http://schemas.microsoft.com/office/drawing/2014/main" id="{FDC99A5D-977A-495A-A4DA-4545DEA555F4}"/>
               </a:ext>
             </a:extLst>
           </p:cNvPr>
@@ -9302,7 +9317,7 @@
             <a:avLst/>
           </a:prstGeom>
           <a:solidFill xmlns:a="http://schemas.openxmlformats.org/drawingml/2006/main">
-            <a:srgbClr val="007D80"/>
+            <a:srgbClr val="00355F"/>
           </a:solidFill>
           <a:ln xmlns:a="http://schemas.openxmlformats.org/drawingml/2006/main" w="9525">
             <a:noFill/>
@@ -9314,7 +9329,7 @@
           <p:cNvPr id="96" name="05  /  TEST">
             <a:extLst xmlns:a="http://schemas.openxmlformats.org/drawingml/2006/main">
               <a:ext uri="{FF2B5EF4-FFF2-40B4-BE49-F238E27FC236}">
-                <a16:creationId xmlns:a16="http://schemas.microsoft.com/office/drawing/2014/main" id="{EC77E0EE-EB6F-4B1A-9511-40B9CD0AC334}"/>
+                <a16:creationId xmlns:a16="http://schemas.microsoft.com/office/drawing/2014/main" id="{3E6E3919-E949-42C2-8A31-4A551BC6397B}"/>
               </a:ext>
             </a:extLst>
           </p:cNvPr>
@@ -9342,7 +9357,7 @@
             <a:defPPr algn="l">
               <a:defRPr sz="1500" b="1">
                 <a:solidFill>
-                  <a:srgbClr val="007D80"/>
+                  <a:srgbClr val="00355F"/>
                 </a:solidFill>
                 <a:latin typeface="Arial"/>
                 <a:ea typeface="Arial"/>
@@ -9358,7 +9373,7 @@
               <a:buNone/>
               <a:defRPr sz="1500" b="1">
                 <a:solidFill>
-                  <a:srgbClr val="007D80"/>
+                  <a:srgbClr val="00355F"/>
                 </a:solidFill>
                 <a:latin typeface="Arial"/>
                 <a:ea typeface="Arial"/>
@@ -9368,7 +9383,7 @@
             <a:r>
               <a:rPr sz="1500" b="1">
                 <a:solidFill>
-                  <a:srgbClr val="007D80"/>
+                  <a:srgbClr val="00355F"/>
                 </a:solidFill>
                 <a:latin typeface="Arial"/>
                 <a:ea typeface="Arial"/>
@@ -9384,7 +9399,7 @@
           <p:cNvPr id="97" name="">
             <a:extLst xmlns:a="http://schemas.openxmlformats.org/drawingml/2006/main">
               <a:ext uri="{FF2B5EF4-FFF2-40B4-BE49-F238E27FC236}">
-                <a16:creationId xmlns:a16="http://schemas.microsoft.com/office/drawing/2014/main" id="{706389DE-0BE1-4286-A57E-80B45691E486}"/>
+                <a16:creationId xmlns:a16="http://schemas.microsoft.com/office/drawing/2014/main" id="{3DFAE4B3-75B3-4FCD-BA81-7FD49730A509}"/>
               </a:ext>
             </a:extLst>
           </p:cNvPr>
@@ -9394,10 +9409,10 @@
           <p:nvPr/>
         </p:nvPicPr>
         <p:blipFill>
-          <a:blip xmlns:r="http://schemas.openxmlformats.org/officeDocument/2006/relationships" xmlns:a="http://schemas.openxmlformats.org/drawingml/2006/main" r:embed="Rab676fc622b44f0f">
+          <a:blip xmlns:r="http://schemas.openxmlformats.org/officeDocument/2006/relationships" xmlns:a="http://schemas.openxmlformats.org/drawingml/2006/main" r:embed="Re382e4855fe64c34">
             <a:extLst>
               <a:ext uri="{96DAC541-7B7A-43D3-8B79-37D633B846F1}">
-                <asvg:svgBlip xmlns:asvg="http://schemas.microsoft.com/office/drawing/2016/SVG/main" r:embed="Rfb349fd7dbe949f9"/>
+                <asvg:svgBlip xmlns:asvg="http://schemas.microsoft.com/office/drawing/2016/SVG/main" r:embed="R605ca3d716684a3d"/>
               </a:ext>
             </a:extLst>
           </a:blip>
@@ -9418,7 +9433,7 @@
           <p:cNvPr id="98" name="Cell-function">
             <a:extLst xmlns:a="http://schemas.openxmlformats.org/drawingml/2006/main">
               <a:ext uri="{FF2B5EF4-FFF2-40B4-BE49-F238E27FC236}">
-                <a16:creationId xmlns:a16="http://schemas.microsoft.com/office/drawing/2014/main" id="{414BCC7A-CA6D-4D21-AD6D-7E9ACECEC5D4}"/>
+                <a16:creationId xmlns:a16="http://schemas.microsoft.com/office/drawing/2014/main" id="{343F2C98-8A98-4882-BCA2-7F805F67BDF6}"/>
               </a:ext>
             </a:extLst>
           </p:cNvPr>
@@ -9446,7 +9461,7 @@
             <a:defPPr algn="l">
               <a:defRPr sz="2325" b="1">
                 <a:solidFill>
-                  <a:srgbClr val="152C3A"/>
+                  <a:srgbClr val="00355F"/>
                 </a:solidFill>
                 <a:latin typeface="Arial"/>
                 <a:ea typeface="Arial"/>
@@ -9462,7 +9477,7 @@
               <a:buNone/>
               <a:defRPr sz="2325" b="1">
                 <a:solidFill>
-                  <a:srgbClr val="152C3A"/>
+                  <a:srgbClr val="00355F"/>
                 </a:solidFill>
                 <a:latin typeface="Arial"/>
                 <a:ea typeface="Arial"/>
@@ -9472,7 +9487,7 @@
             <a:r>
               <a:rPr sz="2325" b="1">
                 <a:solidFill>
-                  <a:srgbClr val="152C3A"/>
+                  <a:srgbClr val="00355F"/>
                 </a:solidFill>
                 <a:latin typeface="Arial"/>
                 <a:ea typeface="Arial"/>
@@ -9489,7 +9504,7 @@
               <a:buNone/>
               <a:defRPr sz="2325" b="1">
                 <a:solidFill>
-                  <a:srgbClr val="152C3A"/>
+                  <a:srgbClr val="00355F"/>
                 </a:solidFill>
                 <a:latin typeface="Arial"/>
                 <a:ea typeface="Arial"/>
@@ -9499,7 +9514,7 @@
             <a:r>
               <a:rPr sz="2325" b="1">
                 <a:solidFill>
-                  <a:srgbClr val="152C3A"/>
+                  <a:srgbClr val="00355F"/>
                 </a:solidFill>
                 <a:latin typeface="Arial"/>
                 <a:ea typeface="Arial"/>
@@ -9515,7 +9530,7 @@
           <p:cNvPr id="99" name="Test activity in a relevant">
             <a:extLst xmlns:a="http://schemas.openxmlformats.org/drawingml/2006/main">
               <a:ext uri="{FF2B5EF4-FFF2-40B4-BE49-F238E27FC236}">
-                <a16:creationId xmlns:a16="http://schemas.microsoft.com/office/drawing/2014/main" id="{1CAED6C7-05B5-428B-B26B-BECC24A4ECCF}"/>
+                <a16:creationId xmlns:a16="http://schemas.microsoft.com/office/drawing/2014/main" id="{B8B07D72-5302-4EFE-BCAA-279CF150DD35}"/>
               </a:ext>
             </a:extLst>
           </p:cNvPr>
@@ -9543,7 +9558,7 @@
             <a:defPPr algn="l">
               <a:defRPr sz="1575" b="0">
                 <a:solidFill>
-                  <a:srgbClr val="647887"/>
+                  <a:srgbClr val="00355F"/>
                 </a:solidFill>
                 <a:latin typeface="Arial"/>
                 <a:ea typeface="Arial"/>
@@ -9559,7 +9574,7 @@
               <a:buNone/>
               <a:defRPr sz="1575" b="0">
                 <a:solidFill>
-                  <a:srgbClr val="647887"/>
+                  <a:srgbClr val="00355F"/>
                 </a:solidFill>
                 <a:latin typeface="Arial"/>
                 <a:ea typeface="Arial"/>
@@ -9569,7 +9584,7 @@
             <a:r>
               <a:rPr sz="1575" b="0">
                 <a:solidFill>
-                  <a:srgbClr val="647887"/>
+                  <a:srgbClr val="00355F"/>
                 </a:solidFill>
                 <a:latin typeface="Arial"/>
                 <a:ea typeface="Arial"/>
@@ -9586,7 +9601,7 @@
               <a:buNone/>
               <a:defRPr sz="1575" b="0">
                 <a:solidFill>
-                  <a:srgbClr val="647887"/>
+                  <a:srgbClr val="00355F"/>
                 </a:solidFill>
                 <a:latin typeface="Arial"/>
                 <a:ea typeface="Arial"/>
@@ -9596,7 +9611,7 @@
             <a:r>
               <a:rPr sz="1575" b="0">
                 <a:solidFill>
-                  <a:srgbClr val="647887"/>
+                  <a:srgbClr val="00355F"/>
                 </a:solidFill>
                 <a:latin typeface="Arial"/>
                 <a:ea typeface="Arial"/>
@@ -9612,7 +9627,7 @@
           <p:cNvPr id="100" name="">
             <a:extLst xmlns:a="http://schemas.openxmlformats.org/drawingml/2006/main">
               <a:ext uri="{FF2B5EF4-FFF2-40B4-BE49-F238E27FC236}">
-                <a16:creationId xmlns:a16="http://schemas.microsoft.com/office/drawing/2014/main" id="{52756193-5081-4580-981E-7799443FB539}"/>
+                <a16:creationId xmlns:a16="http://schemas.microsoft.com/office/drawing/2014/main" id="{8984E1FA-2ADE-4329-82C8-449BF9D0F54E}"/>
               </a:ext>
             </a:extLst>
           </p:cNvPr>
@@ -9632,7 +9647,7 @@
             </a:avLst>
           </a:prstGeom>
           <a:solidFill xmlns:a="http://schemas.openxmlformats.org/drawingml/2006/main">
-            <a:srgbClr val="EAF6F4"/>
+            <a:srgbClr val="EEF6FC"/>
           </a:solidFill>
           <a:ln xmlns:a="http://schemas.openxmlformats.org/drawingml/2006/main" w="9525">
             <a:noFill/>
@@ -9644,7 +9659,7 @@
           <p:cNvPr id="101" name="LABEL">
             <a:extLst xmlns:a="http://schemas.openxmlformats.org/drawingml/2006/main">
               <a:ext uri="{FF2B5EF4-FFF2-40B4-BE49-F238E27FC236}">
-                <a16:creationId xmlns:a16="http://schemas.microsoft.com/office/drawing/2014/main" id="{3D1EE941-B352-4B11-8E5F-C8C2D645C7B2}"/>
+                <a16:creationId xmlns:a16="http://schemas.microsoft.com/office/drawing/2014/main" id="{5298A9CE-FC48-477B-B0A2-705ADCB3CA02}"/>
               </a:ext>
             </a:extLst>
           </p:cNvPr>
@@ -9672,7 +9687,7 @@
             <a:defPPr algn="l">
               <a:defRPr sz="1088" b="1">
                 <a:solidFill>
-                  <a:srgbClr val="647887"/>
+                  <a:srgbClr val="00355F"/>
                 </a:solidFill>
                 <a:latin typeface="Arial"/>
                 <a:ea typeface="Arial"/>
@@ -9688,7 +9703,7 @@
               <a:buNone/>
               <a:defRPr sz="1088" b="1">
                 <a:solidFill>
-                  <a:srgbClr val="647887"/>
+                  <a:srgbClr val="00355F"/>
                 </a:solidFill>
                 <a:latin typeface="Arial"/>
                 <a:ea typeface="Arial"/>
@@ -9698,7 +9713,7 @@
             <a:r>
               <a:rPr sz="1088" b="1">
                 <a:solidFill>
-                  <a:srgbClr val="647887"/>
+                  <a:srgbClr val="00355F"/>
                 </a:solidFill>
                 <a:latin typeface="Arial"/>
                 <a:ea typeface="Arial"/>
@@ -9714,7 +9729,7 @@
           <p:cNvPr id="102" name="Cell potency">
             <a:extLst xmlns:a="http://schemas.openxmlformats.org/drawingml/2006/main">
               <a:ext uri="{FF2B5EF4-FFF2-40B4-BE49-F238E27FC236}">
-                <a16:creationId xmlns:a16="http://schemas.microsoft.com/office/drawing/2014/main" id="{CA537E65-7463-4988-ABD0-38DC06939F0B}"/>
+                <a16:creationId xmlns:a16="http://schemas.microsoft.com/office/drawing/2014/main" id="{87E8C21C-ECD6-4B2A-B049-C505CC29F026}"/>
               </a:ext>
             </a:extLst>
           </p:cNvPr>
@@ -9742,7 +9757,7 @@
             <a:defPPr algn="l">
               <a:defRPr sz="1500" b="1">
                 <a:solidFill>
-                  <a:srgbClr val="007D80"/>
+                  <a:srgbClr val="00355F"/>
                 </a:solidFill>
                 <a:latin typeface="Arial"/>
                 <a:ea typeface="Arial"/>
@@ -9758,7 +9773,7 @@
               <a:buNone/>
               <a:defRPr sz="1500" b="1">
                 <a:solidFill>
-                  <a:srgbClr val="007D80"/>
+                  <a:srgbClr val="00355F"/>
                 </a:solidFill>
                 <a:latin typeface="Arial"/>
                 <a:ea typeface="Arial"/>
@@ -9768,7 +9783,7 @@
             <a:r>
               <a:rPr sz="1500" b="1">
                 <a:solidFill>
-                  <a:srgbClr val="007D80"/>
+                  <a:srgbClr val="00355F"/>
                 </a:solidFill>
                 <a:latin typeface="Arial"/>
                 <a:ea typeface="Arial"/>
@@ -9784,7 +9799,7 @@
           <p:cNvPr id="103" name="REAGENTS">
             <a:extLst xmlns:a="http://schemas.openxmlformats.org/drawingml/2006/main">
               <a:ext uri="{FF2B5EF4-FFF2-40B4-BE49-F238E27FC236}">
-                <a16:creationId xmlns:a16="http://schemas.microsoft.com/office/drawing/2014/main" id="{B4A1848C-4D91-4995-95C7-BB25F87B426A}"/>
+                <a16:creationId xmlns:a16="http://schemas.microsoft.com/office/drawing/2014/main" id="{6C3A72C6-474C-4B78-AFCD-35C5C08B928C}"/>
               </a:ext>
             </a:extLst>
           </p:cNvPr>
@@ -9812,7 +9827,7 @@
             <a:defPPr algn="l">
               <a:defRPr sz="1238" b="1">
                 <a:solidFill>
-                  <a:srgbClr val="647887"/>
+                  <a:srgbClr val="00355F"/>
                 </a:solidFill>
                 <a:latin typeface="Arial"/>
                 <a:ea typeface="Arial"/>
@@ -9828,7 +9843,7 @@
               <a:buNone/>
               <a:defRPr sz="1238" b="1">
                 <a:solidFill>
-                  <a:srgbClr val="647887"/>
+                  <a:srgbClr val="00355F"/>
                 </a:solidFill>
                 <a:latin typeface="Arial"/>
                 <a:ea typeface="Arial"/>
@@ -9838,7 +9853,7 @@
             <a:r>
               <a:rPr sz="1238" b="1">
                 <a:solidFill>
-                  <a:srgbClr val="647887"/>
+                  <a:srgbClr val="00355F"/>
                 </a:solidFill>
                 <a:latin typeface="Arial"/>
                 <a:ea typeface="Arial"/>
@@ -9854,7 +9869,7 @@
           <p:cNvPr id="104" name="Cell models, media, cytokines">
             <a:extLst xmlns:a="http://schemas.openxmlformats.org/drawingml/2006/main">
               <a:ext uri="{FF2B5EF4-FFF2-40B4-BE49-F238E27FC236}">
-                <a16:creationId xmlns:a16="http://schemas.microsoft.com/office/drawing/2014/main" id="{B383F19C-76B5-4D13-803D-F6D258919EC3}"/>
+                <a16:creationId xmlns:a16="http://schemas.microsoft.com/office/drawing/2014/main" id="{621BD2BC-7A16-467B-A68F-DC2CF6628D7E}"/>
               </a:ext>
             </a:extLst>
           </p:cNvPr>
@@ -9882,7 +9897,7 @@
             <a:defPPr algn="l">
               <a:defRPr sz="1463" b="0">
                 <a:solidFill>
-                  <a:srgbClr val="152C3A"/>
+                  <a:srgbClr val="00355F"/>
                 </a:solidFill>
                 <a:latin typeface="Arial"/>
                 <a:ea typeface="Arial"/>
@@ -9898,7 +9913,7 @@
               <a:buNone/>
               <a:defRPr sz="1463" b="0">
                 <a:solidFill>
-                  <a:srgbClr val="152C3A"/>
+                  <a:srgbClr val="00355F"/>
                 </a:solidFill>
                 <a:latin typeface="Arial"/>
                 <a:ea typeface="Arial"/>
@@ -9908,7 +9923,7 @@
             <a:r>
               <a:rPr sz="1463" b="0">
                 <a:solidFill>
-                  <a:srgbClr val="152C3A"/>
+                  <a:srgbClr val="00355F"/>
                 </a:solidFill>
                 <a:latin typeface="Arial"/>
                 <a:ea typeface="Arial"/>
@@ -9925,7 +9940,7 @@
               <a:buNone/>
               <a:defRPr sz="1463" b="0">
                 <a:solidFill>
-                  <a:srgbClr val="152C3A"/>
+                  <a:srgbClr val="00355F"/>
                 </a:solidFill>
                 <a:latin typeface="Arial"/>
                 <a:ea typeface="Arial"/>
@@ -9935,7 +9950,7 @@
             <a:r>
               <a:rPr sz="1463" b="0">
                 <a:solidFill>
-                  <a:srgbClr val="152C3A"/>
+                  <a:srgbClr val="00355F"/>
                 </a:solidFill>
                 <a:latin typeface="Arial"/>
                 <a:ea typeface="Arial"/>
@@ -9952,7 +9967,7 @@
               <a:buNone/>
               <a:defRPr sz="1463" b="0">
                 <a:solidFill>
-                  <a:srgbClr val="152C3A"/>
+                  <a:srgbClr val="00355F"/>
                 </a:solidFill>
                 <a:latin typeface="Arial"/>
                 <a:ea typeface="Arial"/>
@@ -9962,7 +9977,7 @@
             <a:r>
               <a:rPr sz="1463" b="0">
                 <a:solidFill>
-                  <a:srgbClr val="152C3A"/>
+                  <a:srgbClr val="00355F"/>
                 </a:solidFill>
                 <a:latin typeface="Arial"/>
                 <a:ea typeface="Arial"/>
@@ -9978,7 +9993,7 @@
           <p:cNvPr id="105" name="INSTRUMENTS">
             <a:extLst xmlns:a="http://schemas.openxmlformats.org/drawingml/2006/main">
               <a:ext uri="{FF2B5EF4-FFF2-40B4-BE49-F238E27FC236}">
-                <a16:creationId xmlns:a16="http://schemas.microsoft.com/office/drawing/2014/main" id="{14EE12F3-15EE-4928-921B-BF196A7E4362}"/>
+                <a16:creationId xmlns:a16="http://schemas.microsoft.com/office/drawing/2014/main" id="{6B7DD93F-8A47-47C6-AB36-5BDE8B19B59C}"/>
               </a:ext>
             </a:extLst>
           </p:cNvPr>
@@ -10006,7 +10021,7 @@
             <a:defPPr algn="l">
               <a:defRPr sz="1238" b="1">
                 <a:solidFill>
-                  <a:srgbClr val="647887"/>
+                  <a:srgbClr val="00355F"/>
                 </a:solidFill>
                 <a:latin typeface="Arial"/>
                 <a:ea typeface="Arial"/>
@@ -10022,7 +10037,7 @@
               <a:buNone/>
               <a:defRPr sz="1238" b="1">
                 <a:solidFill>
-                  <a:srgbClr val="647887"/>
+                  <a:srgbClr val="00355F"/>
                 </a:solidFill>
                 <a:latin typeface="Arial"/>
                 <a:ea typeface="Arial"/>
@@ -10032,7 +10047,7 @@
             <a:r>
               <a:rPr sz="1238" b="1">
                 <a:solidFill>
-                  <a:srgbClr val="647887"/>
+                  <a:srgbClr val="00355F"/>
                 </a:solidFill>
                 <a:latin typeface="Arial"/>
                 <a:ea typeface="Arial"/>
@@ -10048,7 +10063,7 @@
           <p:cNvPr id="106" name="Flow cytometer">
             <a:extLst xmlns:a="http://schemas.openxmlformats.org/drawingml/2006/main">
               <a:ext uri="{FF2B5EF4-FFF2-40B4-BE49-F238E27FC236}">
-                <a16:creationId xmlns:a16="http://schemas.microsoft.com/office/drawing/2014/main" id="{E1EBE811-3498-4EAD-9EAC-D03D0E5517C5}"/>
+                <a16:creationId xmlns:a16="http://schemas.microsoft.com/office/drawing/2014/main" id="{C6243D4A-2774-409A-BD31-515DAE45EA36}"/>
               </a:ext>
             </a:extLst>
           </p:cNvPr>
@@ -10076,7 +10091,7 @@
             <a:defPPr algn="l">
               <a:defRPr sz="1463" b="0">
                 <a:solidFill>
-                  <a:srgbClr val="152C3A"/>
+                  <a:srgbClr val="00355F"/>
                 </a:solidFill>
                 <a:latin typeface="Arial"/>
                 <a:ea typeface="Arial"/>
@@ -10092,7 +10107,7 @@
               <a:buNone/>
               <a:defRPr sz="1463" b="0">
                 <a:solidFill>
-                  <a:srgbClr val="152C3A"/>
+                  <a:srgbClr val="00355F"/>
                 </a:solidFill>
                 <a:latin typeface="Arial"/>
                 <a:ea typeface="Arial"/>
@@ -10102,7 +10117,7 @@
             <a:r>
               <a:rPr sz="1463" b="0">
                 <a:solidFill>
-                  <a:srgbClr val="152C3A"/>
+                  <a:srgbClr val="00355F"/>
                 </a:solidFill>
                 <a:latin typeface="Arial"/>
                 <a:ea typeface="Arial"/>
@@ -10119,7 +10134,7 @@
               <a:buNone/>
               <a:defRPr sz="1463" b="0">
                 <a:solidFill>
-                  <a:srgbClr val="152C3A"/>
+                  <a:srgbClr val="00355F"/>
                 </a:solidFill>
                 <a:latin typeface="Arial"/>
                 <a:ea typeface="Arial"/>
@@ -10129,7 +10144,7 @@
             <a:r>
               <a:rPr sz="1463" b="0">
                 <a:solidFill>
-                  <a:srgbClr val="152C3A"/>
+                  <a:srgbClr val="00355F"/>
                 </a:solidFill>
                 <a:latin typeface="Arial"/>
                 <a:ea typeface="Arial"/>
@@ -10146,7 +10161,7 @@
               <a:buNone/>
               <a:defRPr sz="1463" b="0">
                 <a:solidFill>
-                  <a:srgbClr val="152C3A"/>
+                  <a:srgbClr val="00355F"/>
                 </a:solidFill>
                 <a:latin typeface="Arial"/>
                 <a:ea typeface="Arial"/>
@@ -10156,7 +10171,7 @@
             <a:r>
               <a:rPr sz="1463" b="0">
                 <a:solidFill>
-                  <a:srgbClr val="152C3A"/>
+                  <a:srgbClr val="00355F"/>
                 </a:solidFill>
                 <a:latin typeface="Arial"/>
                 <a:ea typeface="Arial"/>
@@ -10172,7 +10187,7 @@
           <p:cNvPr id="107" name="CONSUMABLES">
             <a:extLst xmlns:a="http://schemas.openxmlformats.org/drawingml/2006/main">
               <a:ext uri="{FF2B5EF4-FFF2-40B4-BE49-F238E27FC236}">
-                <a16:creationId xmlns:a16="http://schemas.microsoft.com/office/drawing/2014/main" id="{B006FC6F-1EF9-4AB2-8CC0-EC0169F214E5}"/>
+                <a16:creationId xmlns:a16="http://schemas.microsoft.com/office/drawing/2014/main" id="{E650DBC1-3874-4814-8F9F-D05F8205D66B}"/>
               </a:ext>
             </a:extLst>
           </p:cNvPr>
@@ -10200,7 +10215,7 @@
             <a:defPPr algn="l">
               <a:defRPr sz="1238" b="1">
                 <a:solidFill>
-                  <a:srgbClr val="647887"/>
+                  <a:srgbClr val="00355F"/>
                 </a:solidFill>
                 <a:latin typeface="Arial"/>
                 <a:ea typeface="Arial"/>
@@ -10216,7 +10231,7 @@
               <a:buNone/>
               <a:defRPr sz="1238" b="1">
                 <a:solidFill>
-                  <a:srgbClr val="647887"/>
+                  <a:srgbClr val="00355F"/>
                 </a:solidFill>
                 <a:latin typeface="Arial"/>
                 <a:ea typeface="Arial"/>
@@ -10226,7 +10241,7 @@
             <a:r>
               <a:rPr sz="1238" b="1">
                 <a:solidFill>
-                  <a:srgbClr val="647887"/>
+                  <a:srgbClr val="00355F"/>
                 </a:solidFill>
                 <a:latin typeface="Arial"/>
                 <a:ea typeface="Arial"/>
@@ -10242,7 +10257,7 @@
           <p:cNvPr id="108" name="Cell-culture plates / flasks">
             <a:extLst xmlns:a="http://schemas.openxmlformats.org/drawingml/2006/main">
               <a:ext uri="{FF2B5EF4-FFF2-40B4-BE49-F238E27FC236}">
-                <a16:creationId xmlns:a16="http://schemas.microsoft.com/office/drawing/2014/main" id="{333B6321-23E6-43E2-AA01-178E081B362B}"/>
+                <a16:creationId xmlns:a16="http://schemas.microsoft.com/office/drawing/2014/main" id="{EA95ED71-27EF-4333-ABF5-6BD8B7C3CDE1}"/>
               </a:ext>
             </a:extLst>
           </p:cNvPr>
@@ -10270,7 +10285,7 @@
             <a:defPPr algn="l">
               <a:defRPr sz="1463" b="0">
                 <a:solidFill>
-                  <a:srgbClr val="152C3A"/>
+                  <a:srgbClr val="00355F"/>
                 </a:solidFill>
                 <a:latin typeface="Arial"/>
                 <a:ea typeface="Arial"/>
@@ -10286,7 +10301,7 @@
               <a:buNone/>
               <a:defRPr sz="1463" b="0">
                 <a:solidFill>
-                  <a:srgbClr val="152C3A"/>
+                  <a:srgbClr val="00355F"/>
                 </a:solidFill>
                 <a:latin typeface="Arial"/>
                 <a:ea typeface="Arial"/>
@@ -10296,7 +10311,7 @@
             <a:r>
               <a:rPr sz="1463" b="0">
                 <a:solidFill>
-                  <a:srgbClr val="152C3A"/>
+                  <a:srgbClr val="00355F"/>
                 </a:solidFill>
                 <a:latin typeface="Arial"/>
                 <a:ea typeface="Arial"/>
@@ -10313,7 +10328,7 @@
               <a:buNone/>
               <a:defRPr sz="1463" b="0">
                 <a:solidFill>
-                  <a:srgbClr val="152C3A"/>
+                  <a:srgbClr val="00355F"/>
                 </a:solidFill>
                 <a:latin typeface="Arial"/>
                 <a:ea typeface="Arial"/>
@@ -10323,7 +10338,7 @@
             <a:r>
               <a:rPr sz="1463" b="0">
                 <a:solidFill>
-                  <a:srgbClr val="152C3A"/>
+                  <a:srgbClr val="00355F"/>
                 </a:solidFill>
                 <a:latin typeface="Arial"/>
                 <a:ea typeface="Arial"/>
@@ -10339,7 +10354,7 @@
           <p:cNvPr id="109" name="">
             <a:extLst xmlns:a="http://schemas.openxmlformats.org/drawingml/2006/main">
               <a:ext uri="{FF2B5EF4-FFF2-40B4-BE49-F238E27FC236}">
-                <a16:creationId xmlns:a16="http://schemas.microsoft.com/office/drawing/2014/main" id="{C30E8D25-2D67-47A3-B0E3-2FE7EB43A89C}"/>
+                <a16:creationId xmlns:a16="http://schemas.microsoft.com/office/drawing/2014/main" id="{1A159B37-8F6F-4A7B-8D6C-6621DB4D21D9}"/>
               </a:ext>
             </a:extLst>
           </p:cNvPr>
@@ -10368,7 +10383,7 @@
           <a:noFill xmlns:a="http://schemas.openxmlformats.org/drawingml/2006/main"/>
           <a:ln xmlns:a="http://schemas.openxmlformats.org/drawingml/2006/main" w="9525">
             <a:solidFill>
-              <a:srgbClr val="D7E3E8"/>
+              <a:srgbClr val="A5A5A5"/>
             </a:solidFill>
           </a:ln>
         </p:spPr>
@@ -10378,7 +10393,7 @@
           <p:cNvPr id="110" name="REPRESENTATIVE SUPPLIERS">
             <a:extLst xmlns:a="http://schemas.openxmlformats.org/drawingml/2006/main">
               <a:ext uri="{FF2B5EF4-FFF2-40B4-BE49-F238E27FC236}">
-                <a16:creationId xmlns:a16="http://schemas.microsoft.com/office/drawing/2014/main" id="{9F41E447-487F-4D92-B79E-EF069EAEC8EE}"/>
+                <a16:creationId xmlns:a16="http://schemas.microsoft.com/office/drawing/2014/main" id="{0630A08F-AB8A-4129-84F9-C0EABBA8DF68}"/>
               </a:ext>
             </a:extLst>
           </p:cNvPr>
@@ -10406,7 +10421,7 @@
             <a:defPPr algn="l">
               <a:defRPr sz="1163" b="1">
                 <a:solidFill>
-                  <a:srgbClr val="647887"/>
+                  <a:srgbClr val="00355F"/>
                 </a:solidFill>
                 <a:latin typeface="Arial"/>
                 <a:ea typeface="Arial"/>
@@ -10422,7 +10437,7 @@
               <a:buNone/>
               <a:defRPr sz="1163" b="1">
                 <a:solidFill>
-                  <a:srgbClr val="647887"/>
+                  <a:srgbClr val="00355F"/>
                 </a:solidFill>
                 <a:latin typeface="Arial"/>
                 <a:ea typeface="Arial"/>
@@ -10432,7 +10447,7 @@
             <a:r>
               <a:rPr sz="1163" b="1">
                 <a:solidFill>
-                  <a:srgbClr val="647887"/>
+                  <a:srgbClr val="00355F"/>
                 </a:solidFill>
                 <a:latin typeface="Arial"/>
                 <a:ea typeface="Arial"/>
@@ -10448,7 +10463,7 @@
           <p:cNvPr id="111" name="">
             <a:extLst xmlns:a="http://schemas.openxmlformats.org/drawingml/2006/main">
               <a:ext uri="{FF2B5EF4-FFF2-40B4-BE49-F238E27FC236}">
-                <a16:creationId xmlns:a16="http://schemas.microsoft.com/office/drawing/2014/main" id="{A9D2BF06-BC7A-44B4-B4C3-AC2DF4ECF2AC}"/>
+                <a16:creationId xmlns:a16="http://schemas.microsoft.com/office/drawing/2014/main" id="{0E11932F-6C8A-4B61-882A-762C3AB4DDBA}"/>
               </a:ext>
             </a:extLst>
           </p:cNvPr>
@@ -10458,7 +10473,7 @@
           <p:nvPr/>
         </p:nvPicPr>
         <p:blipFill>
-          <a:blip xmlns:r="http://schemas.openxmlformats.org/officeDocument/2006/relationships" xmlns:a="http://schemas.openxmlformats.org/drawingml/2006/main" r:embed="R3c5925ff4e2e413e"/>
+          <a:blip xmlns:r="http://schemas.openxmlformats.org/officeDocument/2006/relationships" xmlns:a="http://schemas.openxmlformats.org/drawingml/2006/main" r:embed="R595bc091799840c1"/>
           <a:stretch xmlns:a="http://schemas.openxmlformats.org/drawingml/2006/main"/>
         </p:blipFill>
         <p:spPr>
@@ -10476,7 +10491,7 @@
           <p:cNvPr id="112" name="Gibco · OPM · Vazyme · Bio-Techne">
             <a:extLst xmlns:a="http://schemas.openxmlformats.org/drawingml/2006/main">
               <a:ext uri="{FF2B5EF4-FFF2-40B4-BE49-F238E27FC236}">
-                <a16:creationId xmlns:a16="http://schemas.microsoft.com/office/drawing/2014/main" id="{E0A608D1-65D5-430C-9ECA-84761F98CE1F}"/>
+                <a16:creationId xmlns:a16="http://schemas.microsoft.com/office/drawing/2014/main" id="{486815F9-8BC3-4E2B-85E2-07C2600BAF0B}"/>
               </a:ext>
             </a:extLst>
           </p:cNvPr>
@@ -10504,7 +10519,7 @@
             <a:defPPr algn="l">
               <a:defRPr sz="1238" b="0">
                 <a:solidFill>
-                  <a:srgbClr val="647887"/>
+                  <a:srgbClr val="00355F"/>
                 </a:solidFill>
                 <a:latin typeface="Arial"/>
                 <a:ea typeface="Arial"/>
@@ -10520,7 +10535,7 @@
               <a:buNone/>
               <a:defRPr sz="1238" b="0">
                 <a:solidFill>
-                  <a:srgbClr val="647887"/>
+                  <a:srgbClr val="00355F"/>
                 </a:solidFill>
                 <a:latin typeface="Arial"/>
                 <a:ea typeface="Arial"/>
@@ -10530,7 +10545,7 @@
             <a:r>
               <a:rPr sz="1238" b="0">
                 <a:solidFill>
-                  <a:srgbClr val="647887"/>
+                  <a:srgbClr val="00355F"/>
                 </a:solidFill>
                 <a:latin typeface="Arial"/>
                 <a:ea typeface="Arial"/>
@@ -10547,7 +10562,7 @@
               <a:buNone/>
               <a:defRPr sz="1238" b="0">
                 <a:solidFill>
-                  <a:srgbClr val="647887"/>
+                  <a:srgbClr val="00355F"/>
                 </a:solidFill>
                 <a:latin typeface="Arial"/>
                 <a:ea typeface="Arial"/>
@@ -10557,7 +10572,7 @@
             <a:r>
               <a:rPr sz="1238" b="0">
                 <a:solidFill>
-                  <a:srgbClr val="647887"/>
+                  <a:srgbClr val="00355F"/>
                 </a:solidFill>
                 <a:latin typeface="Arial"/>
                 <a:ea typeface="Arial"/>
@@ -10574,7 +10589,7 @@
               <a:buNone/>
               <a:defRPr sz="1238" b="0">
                 <a:solidFill>
-                  <a:srgbClr val="647887"/>
+                  <a:srgbClr val="00355F"/>
                 </a:solidFill>
                 <a:latin typeface="Arial"/>
                 <a:ea typeface="Arial"/>
@@ -10584,7 +10599,7 @@
             <a:r>
               <a:rPr sz="1238" b="0">
                 <a:solidFill>
-                  <a:srgbClr val="647887"/>
+                  <a:srgbClr val="00355F"/>
                 </a:solidFill>
                 <a:latin typeface="Arial"/>
                 <a:ea typeface="Arial"/>
@@ -10600,7 +10615,7 @@
           <p:cNvPr id="113" name="">
             <a:extLst xmlns:a="http://schemas.openxmlformats.org/drawingml/2006/main">
               <a:ext uri="{FF2B5EF4-FFF2-40B4-BE49-F238E27FC236}">
-                <a16:creationId xmlns:a16="http://schemas.microsoft.com/office/drawing/2014/main" id="{214B2795-1113-48E5-9EFC-D71DE7B3F7B3}"/>
+                <a16:creationId xmlns:a16="http://schemas.microsoft.com/office/drawing/2014/main" id="{6B9ED834-8E17-472E-B51F-FAD311B420C8}"/>
               </a:ext>
             </a:extLst>
           </p:cNvPr>
@@ -10620,7 +10635,7 @@
             </a:avLst>
           </a:prstGeom>
           <a:solidFill xmlns:a="http://schemas.openxmlformats.org/drawingml/2006/main">
-            <a:srgbClr val="EEF3F4"/>
+            <a:srgbClr val="EEF6FC"/>
           </a:solidFill>
           <a:ln xmlns:a="http://schemas.openxmlformats.org/drawingml/2006/main" w="9525">
             <a:noFill/>
@@ -10632,7 +10647,7 @@
           <p:cNvPr id="114" name="">
             <a:extLst xmlns:a="http://schemas.openxmlformats.org/drawingml/2006/main">
               <a:ext uri="{FF2B5EF4-FFF2-40B4-BE49-F238E27FC236}">
-                <a16:creationId xmlns:a16="http://schemas.microsoft.com/office/drawing/2014/main" id="{43C16B81-3A9C-47FE-AD74-32121A10C36A}"/>
+                <a16:creationId xmlns:a16="http://schemas.microsoft.com/office/drawing/2014/main" id="{917F760A-E788-4723-BAA1-C2E15759651A}"/>
               </a:ext>
             </a:extLst>
           </p:cNvPr>
@@ -10656,7 +10671,7 @@
           </a:solidFill>
           <a:ln xmlns:a="http://schemas.openxmlformats.org/drawingml/2006/main" w="10478">
             <a:solidFill>
-              <a:srgbClr val="D7E3E8"/>
+              <a:srgbClr val="A5A5A5"/>
             </a:solidFill>
           </a:ln>
         </p:spPr>
@@ -10666,7 +10681,7 @@
           <p:cNvPr id="115" name="">
             <a:extLst xmlns:a="http://schemas.openxmlformats.org/drawingml/2006/main">
               <a:ext uri="{FF2B5EF4-FFF2-40B4-BE49-F238E27FC236}">
-                <a16:creationId xmlns:a16="http://schemas.microsoft.com/office/drawing/2014/main" id="{4DE1FE0C-696B-4F2B-9ACD-A5872F16AA00}"/>
+                <a16:creationId xmlns:a16="http://schemas.microsoft.com/office/drawing/2014/main" id="{6D77926A-320E-469F-81A3-E0B8157E4ADB}"/>
               </a:ext>
             </a:extLst>
           </p:cNvPr>
@@ -10684,7 +10699,7 @@
             <a:avLst/>
           </a:prstGeom>
           <a:solidFill xmlns:a="http://schemas.openxmlformats.org/drawingml/2006/main">
-            <a:srgbClr val="4D8574"/>
+            <a:srgbClr val="00355F"/>
           </a:solidFill>
           <a:ln xmlns:a="http://schemas.openxmlformats.org/drawingml/2006/main" w="9525">
             <a:noFill/>
@@ -10696,7 +10711,7 @@
           <p:cNvPr id="116" name="06  /  LEARN">
             <a:extLst xmlns:a="http://schemas.openxmlformats.org/drawingml/2006/main">
               <a:ext uri="{FF2B5EF4-FFF2-40B4-BE49-F238E27FC236}">
-                <a16:creationId xmlns:a16="http://schemas.microsoft.com/office/drawing/2014/main" id="{1331C9AF-8997-48A7-A9FB-F97A83C8532A}"/>
+                <a16:creationId xmlns:a16="http://schemas.microsoft.com/office/drawing/2014/main" id="{89059223-3F06-452C-987E-B9463C383812}"/>
               </a:ext>
             </a:extLst>
           </p:cNvPr>
@@ -10724,7 +10739,7 @@
             <a:defPPr algn="l">
               <a:defRPr sz="1500" b="1">
                 <a:solidFill>
-                  <a:srgbClr val="647887"/>
+                  <a:srgbClr val="00355F"/>
                 </a:solidFill>
                 <a:latin typeface="Arial"/>
                 <a:ea typeface="Arial"/>
@@ -10740,7 +10755,7 @@
               <a:buNone/>
               <a:defRPr sz="1500" b="1">
                 <a:solidFill>
-                  <a:srgbClr val="647887"/>
+                  <a:srgbClr val="00355F"/>
                 </a:solidFill>
                 <a:latin typeface="Arial"/>
                 <a:ea typeface="Arial"/>
@@ -10750,7 +10765,7 @@
             <a:r>
               <a:rPr sz="1500" b="1">
                 <a:solidFill>
-                  <a:srgbClr val="647887"/>
+                  <a:srgbClr val="00355F"/>
                 </a:solidFill>
                 <a:latin typeface="Arial"/>
                 <a:ea typeface="Arial"/>
@@ -10766,7 +10781,7 @@
           <p:cNvPr id="117" name="">
             <a:extLst xmlns:a="http://schemas.openxmlformats.org/drawingml/2006/main">
               <a:ext uri="{FF2B5EF4-FFF2-40B4-BE49-F238E27FC236}">
-                <a16:creationId xmlns:a16="http://schemas.microsoft.com/office/drawing/2014/main" id="{C2A418B2-16D0-4572-B12D-D8C33E49C7FA}"/>
+                <a16:creationId xmlns:a16="http://schemas.microsoft.com/office/drawing/2014/main" id="{F6686B7E-1E70-4300-B34D-A3C6D874A9AC}"/>
               </a:ext>
             </a:extLst>
           </p:cNvPr>
@@ -10776,10 +10791,10 @@
           <p:nvPr/>
         </p:nvPicPr>
         <p:blipFill>
-          <a:blip xmlns:r="http://schemas.openxmlformats.org/officeDocument/2006/relationships" xmlns:a="http://schemas.openxmlformats.org/drawingml/2006/main" r:embed="R672c80e33cca409f">
+          <a:blip xmlns:r="http://schemas.openxmlformats.org/officeDocument/2006/relationships" xmlns:a="http://schemas.openxmlformats.org/drawingml/2006/main" r:embed="Re04fb7b9564a418f">
             <a:extLst>
               <a:ext uri="{96DAC541-7B7A-43D3-8B79-37D633B846F1}">
-                <asvg:svgBlip xmlns:asvg="http://schemas.microsoft.com/office/drawing/2016/SVG/main" r:embed="R5866bd14fd594adb"/>
+                <asvg:svgBlip xmlns:asvg="http://schemas.microsoft.com/office/drawing/2016/SVG/main" r:embed="R13eae86e71ae45d3"/>
               </a:ext>
             </a:extLst>
           </a:blip>
@@ -10800,7 +10815,7 @@
           <p:cNvPr id="118" name="Data integration">
             <a:extLst xmlns:a="http://schemas.openxmlformats.org/drawingml/2006/main">
               <a:ext uri="{FF2B5EF4-FFF2-40B4-BE49-F238E27FC236}">
-                <a16:creationId xmlns:a16="http://schemas.microsoft.com/office/drawing/2014/main" id="{26A1B74D-7A6E-46F7-853B-F35D6E721EDB}"/>
+                <a16:creationId xmlns:a16="http://schemas.microsoft.com/office/drawing/2014/main" id="{43705AFE-210B-41BD-9B07-B8A9123522B2}"/>
               </a:ext>
             </a:extLst>
           </p:cNvPr>
@@ -10828,7 +10843,7 @@
             <a:defPPr algn="l">
               <a:defRPr sz="2100" b="1">
                 <a:solidFill>
-                  <a:srgbClr val="152C3A"/>
+                  <a:srgbClr val="00355F"/>
                 </a:solidFill>
                 <a:latin typeface="Arial"/>
                 <a:ea typeface="Arial"/>
@@ -10844,7 +10859,7 @@
               <a:buNone/>
               <a:defRPr sz="2100" b="1">
                 <a:solidFill>
-                  <a:srgbClr val="152C3A"/>
+                  <a:srgbClr val="00355F"/>
                 </a:solidFill>
                 <a:latin typeface="Arial"/>
                 <a:ea typeface="Arial"/>
@@ -10854,7 +10869,7 @@
             <a:r>
               <a:rPr sz="2100" b="1">
                 <a:solidFill>
-                  <a:srgbClr val="152C3A"/>
+                  <a:srgbClr val="00355F"/>
                 </a:solidFill>
                 <a:latin typeface="Arial"/>
                 <a:ea typeface="Arial"/>
@@ -10871,7 +10886,7 @@
               <a:buNone/>
               <a:defRPr sz="2100" b="1">
                 <a:solidFill>
-                  <a:srgbClr val="152C3A"/>
+                  <a:srgbClr val="00355F"/>
                 </a:solidFill>
                 <a:latin typeface="Arial"/>
                 <a:ea typeface="Arial"/>
@@ -10881,7 +10896,7 @@
             <a:r>
               <a:rPr sz="2100" b="1">
                 <a:solidFill>
-                  <a:srgbClr val="152C3A"/>
+                  <a:srgbClr val="00355F"/>
                 </a:solidFill>
                 <a:latin typeface="Arial"/>
                 <a:ea typeface="Arial"/>
@@ -10897,7 +10912,7 @@
           <p:cNvPr id="119" name="Link assay results">
             <a:extLst xmlns:a="http://schemas.openxmlformats.org/drawingml/2006/main">
               <a:ext uri="{FF2B5EF4-FFF2-40B4-BE49-F238E27FC236}">
-                <a16:creationId xmlns:a16="http://schemas.microsoft.com/office/drawing/2014/main" id="{ED24B09F-7AE4-4FC9-99DC-481F94D6A129}"/>
+                <a16:creationId xmlns:a16="http://schemas.microsoft.com/office/drawing/2014/main" id="{C0B80F66-55CB-44EE-ADC6-C350A3E40673}"/>
               </a:ext>
             </a:extLst>
           </p:cNvPr>
@@ -10925,7 +10940,7 @@
             <a:defPPr algn="l">
               <a:defRPr sz="1500" b="0">
                 <a:solidFill>
-                  <a:srgbClr val="647887"/>
+                  <a:srgbClr val="00355F"/>
                 </a:solidFill>
                 <a:latin typeface="Arial"/>
                 <a:ea typeface="Arial"/>
@@ -10941,7 +10956,7 @@
               <a:buNone/>
               <a:defRPr sz="1500" b="0">
                 <a:solidFill>
-                  <a:srgbClr val="647887"/>
+                  <a:srgbClr val="00355F"/>
                 </a:solidFill>
                 <a:latin typeface="Arial"/>
                 <a:ea typeface="Arial"/>
@@ -10951,7 +10966,7 @@
             <a:r>
               <a:rPr sz="1500" b="0">
                 <a:solidFill>
-                  <a:srgbClr val="647887"/>
+                  <a:srgbClr val="00355F"/>
                 </a:solidFill>
                 <a:latin typeface="Arial"/>
                 <a:ea typeface="Arial"/>
@@ -10968,7 +10983,7 @@
               <a:buNone/>
               <a:defRPr sz="1500" b="0">
                 <a:solidFill>
-                  <a:srgbClr val="647887"/>
+                  <a:srgbClr val="00355F"/>
                 </a:solidFill>
                 <a:latin typeface="Arial"/>
                 <a:ea typeface="Arial"/>
@@ -10978,7 +10993,7 @@
             <a:r>
               <a:rPr sz="1500" b="0">
                 <a:solidFill>
-                  <a:srgbClr val="647887"/>
+                  <a:srgbClr val="00355F"/>
                 </a:solidFill>
                 <a:latin typeface="Arial"/>
                 <a:ea typeface="Arial"/>
@@ -10994,7 +11009,7 @@
           <p:cNvPr id="120" name="">
             <a:extLst xmlns:a="http://schemas.openxmlformats.org/drawingml/2006/main">
               <a:ext uri="{FF2B5EF4-FFF2-40B4-BE49-F238E27FC236}">
-                <a16:creationId xmlns:a16="http://schemas.microsoft.com/office/drawing/2014/main" id="{7E512624-42B4-4A61-B665-7FAA45E62AF2}"/>
+                <a16:creationId xmlns:a16="http://schemas.microsoft.com/office/drawing/2014/main" id="{447289AB-7B81-4D69-A3A3-513C585DED43}"/>
               </a:ext>
             </a:extLst>
           </p:cNvPr>
@@ -11014,7 +11029,7 @@
             </a:avLst>
           </a:prstGeom>
           <a:solidFill xmlns:a="http://schemas.openxmlformats.org/drawingml/2006/main">
-            <a:srgbClr val="F5F8F9"/>
+            <a:srgbClr val="F4F9FD"/>
           </a:solidFill>
           <a:ln xmlns:a="http://schemas.openxmlformats.org/drawingml/2006/main" w="9525">
             <a:noFill/>
@@ -11026,7 +11041,7 @@
           <p:cNvPr id="121" name="OUTPUT">
             <a:extLst xmlns:a="http://schemas.openxmlformats.org/drawingml/2006/main">
               <a:ext uri="{FF2B5EF4-FFF2-40B4-BE49-F238E27FC236}">
-                <a16:creationId xmlns:a16="http://schemas.microsoft.com/office/drawing/2014/main" id="{042D80A4-31FB-44FA-9E28-2FCE559A95DA}"/>
+                <a16:creationId xmlns:a16="http://schemas.microsoft.com/office/drawing/2014/main" id="{382C23B7-8E93-4DC5-ADFC-CE4D0E95091A}"/>
               </a:ext>
             </a:extLst>
           </p:cNvPr>
@@ -11054,7 +11069,7 @@
             <a:defPPr algn="l">
               <a:defRPr sz="1088" b="1">
                 <a:solidFill>
-                  <a:srgbClr val="647887"/>
+                  <a:srgbClr val="00355F"/>
                 </a:solidFill>
                 <a:latin typeface="Arial"/>
                 <a:ea typeface="Arial"/>
@@ -11070,7 +11085,7 @@
               <a:buNone/>
               <a:defRPr sz="1088" b="1">
                 <a:solidFill>
-                  <a:srgbClr val="647887"/>
+                  <a:srgbClr val="00355F"/>
                 </a:solidFill>
                 <a:latin typeface="Arial"/>
                 <a:ea typeface="Arial"/>
@@ -11080,7 +11095,7 @@
             <a:r>
               <a:rPr sz="1088" b="1">
                 <a:solidFill>
-                  <a:srgbClr val="647887"/>
+                  <a:srgbClr val="00355F"/>
                 </a:solidFill>
                 <a:latin typeface="Arial"/>
                 <a:ea typeface="Arial"/>
@@ -11096,7 +11111,7 @@
           <p:cNvPr id="122" name="Traceable training data">
             <a:extLst xmlns:a="http://schemas.openxmlformats.org/drawingml/2006/main">
               <a:ext uri="{FF2B5EF4-FFF2-40B4-BE49-F238E27FC236}">
-                <a16:creationId xmlns:a16="http://schemas.microsoft.com/office/drawing/2014/main" id="{62B575F5-9DBD-4F7C-80E7-ADEA6BBE7142}"/>
+                <a16:creationId xmlns:a16="http://schemas.microsoft.com/office/drawing/2014/main" id="{1DFEF348-87E3-4B0C-BA8A-1AD7711DC97B}"/>
               </a:ext>
             </a:extLst>
           </p:cNvPr>
@@ -11124,7 +11139,7 @@
             <a:defPPr algn="l">
               <a:defRPr sz="1350" b="1">
                 <a:solidFill>
-                  <a:srgbClr val="007D80"/>
+                  <a:srgbClr val="00355F"/>
                 </a:solidFill>
                 <a:latin typeface="Arial"/>
                 <a:ea typeface="Arial"/>
@@ -11140,7 +11155,7 @@
               <a:buNone/>
               <a:defRPr sz="1350" b="1">
                 <a:solidFill>
-                  <a:srgbClr val="007D80"/>
+                  <a:srgbClr val="00355F"/>
                 </a:solidFill>
                 <a:latin typeface="Arial"/>
                 <a:ea typeface="Arial"/>
@@ -11150,7 +11165,7 @@
             <a:r>
               <a:rPr sz="1350" b="1">
                 <a:solidFill>
-                  <a:srgbClr val="007D80"/>
+                  <a:srgbClr val="00355F"/>
                 </a:solidFill>
                 <a:latin typeface="Arial"/>
                 <a:ea typeface="Arial"/>
@@ -11166,7 +11181,7 @@
           <p:cNvPr id="123" name="REAGENTS">
             <a:extLst xmlns:a="http://schemas.openxmlformats.org/drawingml/2006/main">
               <a:ext uri="{FF2B5EF4-FFF2-40B4-BE49-F238E27FC236}">
-                <a16:creationId xmlns:a16="http://schemas.microsoft.com/office/drawing/2014/main" id="{7450DC27-790E-409D-B9BB-41D42A0DE863}"/>
+                <a16:creationId xmlns:a16="http://schemas.microsoft.com/office/drawing/2014/main" id="{3EF68BC8-3235-4C0A-AB6B-AD21C9EF23C0}"/>
               </a:ext>
             </a:extLst>
           </p:cNvPr>
@@ -11194,7 +11209,7 @@
             <a:defPPr algn="l">
               <a:defRPr sz="1238" b="1">
                 <a:solidFill>
-                  <a:srgbClr val="647887"/>
+                  <a:srgbClr val="00355F"/>
                 </a:solidFill>
                 <a:latin typeface="Arial"/>
                 <a:ea typeface="Arial"/>
@@ -11210,7 +11225,7 @@
               <a:buNone/>
               <a:defRPr sz="1238" b="1">
                 <a:solidFill>
-                  <a:srgbClr val="647887"/>
+                  <a:srgbClr val="00355F"/>
                 </a:solidFill>
                 <a:latin typeface="Arial"/>
                 <a:ea typeface="Arial"/>
@@ -11220,7 +11235,7 @@
             <a:r>
               <a:rPr sz="1238" b="1">
                 <a:solidFill>
-                  <a:srgbClr val="647887"/>
+                  <a:srgbClr val="00355F"/>
                 </a:solidFill>
                 <a:latin typeface="Arial"/>
                 <a:ea typeface="Arial"/>
@@ -11236,7 +11251,7 @@
           <p:cNvPr id="124" name="No direct">
             <a:extLst xmlns:a="http://schemas.openxmlformats.org/drawingml/2006/main">
               <a:ext uri="{FF2B5EF4-FFF2-40B4-BE49-F238E27FC236}">
-                <a16:creationId xmlns:a16="http://schemas.microsoft.com/office/drawing/2014/main" id="{6C48083D-2460-46C7-AD77-D8B477B024A9}"/>
+                <a16:creationId xmlns:a16="http://schemas.microsoft.com/office/drawing/2014/main" id="{4994ADB5-B3BA-48A2-80C8-FB02159F505D}"/>
               </a:ext>
             </a:extLst>
           </p:cNvPr>
@@ -11264,7 +11279,7 @@
             <a:defPPr algn="l">
               <a:defRPr sz="1350" b="0">
                 <a:solidFill>
-                  <a:srgbClr val="152C3A"/>
+                  <a:srgbClr val="00355F"/>
                 </a:solidFill>
                 <a:latin typeface="Arial"/>
                 <a:ea typeface="Arial"/>
@@ -11280,7 +11295,7 @@
               <a:buNone/>
               <a:defRPr sz="1350" b="0">
                 <a:solidFill>
-                  <a:srgbClr val="152C3A"/>
+                  <a:srgbClr val="00355F"/>
                 </a:solidFill>
                 <a:latin typeface="Arial"/>
                 <a:ea typeface="Arial"/>
@@ -11290,7 +11305,7 @@
             <a:r>
               <a:rPr sz="1350" b="0">
                 <a:solidFill>
-                  <a:srgbClr val="152C3A"/>
+                  <a:srgbClr val="00355F"/>
                 </a:solidFill>
                 <a:latin typeface="Arial"/>
                 <a:ea typeface="Arial"/>
@@ -11307,7 +11322,7 @@
               <a:buNone/>
               <a:defRPr sz="1350" b="0">
                 <a:solidFill>
-                  <a:srgbClr val="152C3A"/>
+                  <a:srgbClr val="00355F"/>
                 </a:solidFill>
                 <a:latin typeface="Arial"/>
                 <a:ea typeface="Arial"/>
@@ -11317,7 +11332,7 @@
             <a:r>
               <a:rPr sz="1350" b="0">
                 <a:solidFill>
-                  <a:srgbClr val="152C3A"/>
+                  <a:srgbClr val="00355F"/>
                 </a:solidFill>
                 <a:latin typeface="Arial"/>
                 <a:ea typeface="Arial"/>
@@ -11333,7 +11348,7 @@
           <p:cNvPr id="125" name="SYSTEMS / SOFTWARE">
             <a:extLst xmlns:a="http://schemas.openxmlformats.org/drawingml/2006/main">
               <a:ext uri="{FF2B5EF4-FFF2-40B4-BE49-F238E27FC236}">
-                <a16:creationId xmlns:a16="http://schemas.microsoft.com/office/drawing/2014/main" id="{E0641618-0CBB-4720-9593-1F2CA0F1AEE2}"/>
+                <a16:creationId xmlns:a16="http://schemas.microsoft.com/office/drawing/2014/main" id="{7A39E575-E937-44EE-A8CF-FF49E35DE4A3}"/>
               </a:ext>
             </a:extLst>
           </p:cNvPr>
@@ -11361,7 +11376,7 @@
             <a:defPPr algn="l">
               <a:defRPr sz="1238" b="1">
                 <a:solidFill>
-                  <a:srgbClr val="647887"/>
+                  <a:srgbClr val="00355F"/>
                 </a:solidFill>
                 <a:latin typeface="Arial"/>
                 <a:ea typeface="Arial"/>
@@ -11377,7 +11392,7 @@
               <a:buNone/>
               <a:defRPr sz="1238" b="1">
                 <a:solidFill>
-                  <a:srgbClr val="647887"/>
+                  <a:srgbClr val="00355F"/>
                 </a:solidFill>
                 <a:latin typeface="Arial"/>
                 <a:ea typeface="Arial"/>
@@ -11387,7 +11402,7 @@
             <a:r>
               <a:rPr sz="1238" b="1">
                 <a:solidFill>
-                  <a:srgbClr val="647887"/>
+                  <a:srgbClr val="00355F"/>
                 </a:solidFill>
                 <a:latin typeface="Arial"/>
                 <a:ea typeface="Arial"/>
@@ -11403,7 +11418,7 @@
           <p:cNvPr id="126" name="LIMS / ELN">
             <a:extLst xmlns:a="http://schemas.openxmlformats.org/drawingml/2006/main">
               <a:ext uri="{FF2B5EF4-FFF2-40B4-BE49-F238E27FC236}">
-                <a16:creationId xmlns:a16="http://schemas.microsoft.com/office/drawing/2014/main" id="{30EA729E-1116-4B7D-A055-C4D129521C27}"/>
+                <a16:creationId xmlns:a16="http://schemas.microsoft.com/office/drawing/2014/main" id="{93EFB91A-EA41-4304-9220-A424748CA0A4}"/>
               </a:ext>
             </a:extLst>
           </p:cNvPr>
@@ -11431,7 +11446,7 @@
             <a:defPPr algn="l">
               <a:defRPr sz="1350" b="0">
                 <a:solidFill>
-                  <a:srgbClr val="152C3A"/>
+                  <a:srgbClr val="00355F"/>
                 </a:solidFill>
                 <a:latin typeface="Arial"/>
                 <a:ea typeface="Arial"/>
@@ -11447,7 +11462,7 @@
               <a:buNone/>
               <a:defRPr sz="1350" b="0">
                 <a:solidFill>
-                  <a:srgbClr val="152C3A"/>
+                  <a:srgbClr val="00355F"/>
                 </a:solidFill>
                 <a:latin typeface="Arial"/>
                 <a:ea typeface="Arial"/>
@@ -11457,7 +11472,7 @@
             <a:r>
               <a:rPr sz="1350" b="0">
                 <a:solidFill>
-                  <a:srgbClr val="152C3A"/>
+                  <a:srgbClr val="00355F"/>
                 </a:solidFill>
                 <a:latin typeface="Arial"/>
                 <a:ea typeface="Arial"/>
@@ -11474,7 +11489,7 @@
               <a:buNone/>
               <a:defRPr sz="1350" b="0">
                 <a:solidFill>
-                  <a:srgbClr val="152C3A"/>
+                  <a:srgbClr val="00355F"/>
                 </a:solidFill>
                 <a:latin typeface="Arial"/>
                 <a:ea typeface="Arial"/>
@@ -11484,7 +11499,7 @@
             <a:r>
               <a:rPr sz="1350" b="0">
                 <a:solidFill>
-                  <a:srgbClr val="152C3A"/>
+                  <a:srgbClr val="00355F"/>
                 </a:solidFill>
                 <a:latin typeface="Arial"/>
                 <a:ea typeface="Arial"/>
@@ -11501,7 +11516,7 @@
               <a:buNone/>
               <a:defRPr sz="1350" b="0">
                 <a:solidFill>
-                  <a:srgbClr val="152C3A"/>
+                  <a:srgbClr val="00355F"/>
                 </a:solidFill>
                 <a:latin typeface="Arial"/>
                 <a:ea typeface="Arial"/>
@@ -11511,7 +11526,7 @@
             <a:r>
               <a:rPr sz="1350" b="0">
                 <a:solidFill>
-                  <a:srgbClr val="152C3A"/>
+                  <a:srgbClr val="00355F"/>
                 </a:solidFill>
                 <a:latin typeface="Arial"/>
                 <a:ea typeface="Arial"/>
@@ -11527,7 +11542,7 @@
           <p:cNvPr id="127" name="CONSUMABLES">
             <a:extLst xmlns:a="http://schemas.openxmlformats.org/drawingml/2006/main">
               <a:ext uri="{FF2B5EF4-FFF2-40B4-BE49-F238E27FC236}">
-                <a16:creationId xmlns:a16="http://schemas.microsoft.com/office/drawing/2014/main" id="{03BD5C36-D98A-4EC1-8BAC-03C859D24D1C}"/>
+                <a16:creationId xmlns:a16="http://schemas.microsoft.com/office/drawing/2014/main" id="{46016F0C-9E6B-401F-8D67-E7A7B51E415B}"/>
               </a:ext>
             </a:extLst>
           </p:cNvPr>
@@ -11555,7 +11570,7 @@
             <a:defPPr algn="l">
               <a:defRPr sz="1238" b="1">
                 <a:solidFill>
-                  <a:srgbClr val="647887"/>
+                  <a:srgbClr val="00355F"/>
                 </a:solidFill>
                 <a:latin typeface="Arial"/>
                 <a:ea typeface="Arial"/>
@@ -11571,7 +11586,7 @@
               <a:buNone/>
               <a:defRPr sz="1238" b="1">
                 <a:solidFill>
-                  <a:srgbClr val="647887"/>
+                  <a:srgbClr val="00355F"/>
                 </a:solidFill>
                 <a:latin typeface="Arial"/>
                 <a:ea typeface="Arial"/>
@@ -11581,7 +11596,7 @@
             <a:r>
               <a:rPr sz="1238" b="1">
                 <a:solidFill>
-                  <a:srgbClr val="647887"/>
+                  <a:srgbClr val="00355F"/>
                 </a:solidFill>
                 <a:latin typeface="Arial"/>
                 <a:ea typeface="Arial"/>
@@ -11597,7 +11612,7 @@
           <p:cNvPr id="128" name="No direct">
             <a:extLst xmlns:a="http://schemas.openxmlformats.org/drawingml/2006/main">
               <a:ext uri="{FF2B5EF4-FFF2-40B4-BE49-F238E27FC236}">
-                <a16:creationId xmlns:a16="http://schemas.microsoft.com/office/drawing/2014/main" id="{7B013B94-A901-493B-8566-74D95387D51E}"/>
+                <a16:creationId xmlns:a16="http://schemas.microsoft.com/office/drawing/2014/main" id="{2ECEAD6C-7C0E-4601-951F-246131E3F947}"/>
               </a:ext>
             </a:extLst>
           </p:cNvPr>
@@ -11625,7 +11640,7 @@
             <a:defPPr algn="l">
               <a:defRPr sz="1350" b="0">
                 <a:solidFill>
-                  <a:srgbClr val="152C3A"/>
+                  <a:srgbClr val="00355F"/>
                 </a:solidFill>
                 <a:latin typeface="Arial"/>
                 <a:ea typeface="Arial"/>
@@ -11641,7 +11656,7 @@
               <a:buNone/>
               <a:defRPr sz="1350" b="0">
                 <a:solidFill>
-                  <a:srgbClr val="152C3A"/>
+                  <a:srgbClr val="00355F"/>
                 </a:solidFill>
                 <a:latin typeface="Arial"/>
                 <a:ea typeface="Arial"/>
@@ -11651,7 +11666,7 @@
             <a:r>
               <a:rPr sz="1350" b="0">
                 <a:solidFill>
-                  <a:srgbClr val="152C3A"/>
+                  <a:srgbClr val="00355F"/>
                 </a:solidFill>
                 <a:latin typeface="Arial"/>
                 <a:ea typeface="Arial"/>
@@ -11668,7 +11683,7 @@
               <a:buNone/>
               <a:defRPr sz="1350" b="0">
                 <a:solidFill>
-                  <a:srgbClr val="152C3A"/>
+                  <a:srgbClr val="00355F"/>
                 </a:solidFill>
                 <a:latin typeface="Arial"/>
                 <a:ea typeface="Arial"/>
@@ -11678,7 +11693,7 @@
             <a:r>
               <a:rPr sz="1350" b="0">
                 <a:solidFill>
-                  <a:srgbClr val="152C3A"/>
+                  <a:srgbClr val="00355F"/>
                 </a:solidFill>
                 <a:latin typeface="Arial"/>
                 <a:ea typeface="Arial"/>
@@ -11694,7 +11709,7 @@
           <p:cNvPr id="129" name="">
             <a:extLst xmlns:a="http://schemas.openxmlformats.org/drawingml/2006/main">
               <a:ext uri="{FF2B5EF4-FFF2-40B4-BE49-F238E27FC236}">
-                <a16:creationId xmlns:a16="http://schemas.microsoft.com/office/drawing/2014/main" id="{9CF1F974-1B03-465E-B99E-3EC0F87BD5B1}"/>
+                <a16:creationId xmlns:a16="http://schemas.microsoft.com/office/drawing/2014/main" id="{35F4782B-2D08-4AF1-9D56-D9C858044651}"/>
               </a:ext>
             </a:extLst>
           </p:cNvPr>
@@ -11723,7 +11738,7 @@
           <a:noFill xmlns:a="http://schemas.openxmlformats.org/drawingml/2006/main"/>
           <a:ln xmlns:a="http://schemas.openxmlformats.org/drawingml/2006/main" w="9525">
             <a:solidFill>
-              <a:srgbClr val="D7E3E8"/>
+              <a:srgbClr val="A5A5A5"/>
             </a:solidFill>
           </a:ln>
         </p:spPr>
@@ -11733,7 +11748,7 @@
           <p:cNvPr id="130" name="REPRESENTATIVE SUPPLIERS">
             <a:extLst xmlns:a="http://schemas.openxmlformats.org/drawingml/2006/main">
               <a:ext uri="{FF2B5EF4-FFF2-40B4-BE49-F238E27FC236}">
-                <a16:creationId xmlns:a16="http://schemas.microsoft.com/office/drawing/2014/main" id="{DB122AD0-8BA1-4594-944A-033E25925964}"/>
+                <a16:creationId xmlns:a16="http://schemas.microsoft.com/office/drawing/2014/main" id="{C859C7E1-DD79-44F8-BC4A-B39EAC027026}"/>
               </a:ext>
             </a:extLst>
           </p:cNvPr>
@@ -11761,7 +11776,7 @@
             <a:defPPr algn="l">
               <a:defRPr sz="1050" b="1">
                 <a:solidFill>
-                  <a:srgbClr val="647887"/>
+                  <a:srgbClr val="00355F"/>
                 </a:solidFill>
                 <a:latin typeface="Arial"/>
                 <a:ea typeface="Arial"/>
@@ -11777,7 +11792,7 @@
               <a:buNone/>
               <a:defRPr sz="1050" b="1">
                 <a:solidFill>
-                  <a:srgbClr val="647887"/>
+                  <a:srgbClr val="00355F"/>
                 </a:solidFill>
                 <a:latin typeface="Arial"/>
                 <a:ea typeface="Arial"/>
@@ -11787,7 +11802,7 @@
             <a:r>
               <a:rPr sz="1050" b="1">
                 <a:solidFill>
-                  <a:srgbClr val="647887"/>
+                  <a:srgbClr val="00355F"/>
                 </a:solidFill>
                 <a:latin typeface="Arial"/>
                 <a:ea typeface="Arial"/>
@@ -11803,7 +11818,7 @@
           <p:cNvPr id="131" name="">
             <a:extLst xmlns:a="http://schemas.openxmlformats.org/drawingml/2006/main">
               <a:ext uri="{FF2B5EF4-FFF2-40B4-BE49-F238E27FC236}">
-                <a16:creationId xmlns:a16="http://schemas.microsoft.com/office/drawing/2014/main" id="{B60395B9-58F0-4BF6-9A30-5577B8F60AA8}"/>
+                <a16:creationId xmlns:a16="http://schemas.microsoft.com/office/drawing/2014/main" id="{C216E37B-E5CE-4D44-9DF2-15666B177256}"/>
               </a:ext>
             </a:extLst>
           </p:cNvPr>
@@ -11813,7 +11828,7 @@
           <p:nvPr/>
         </p:nvPicPr>
         <p:blipFill>
-          <a:blip xmlns:r="http://schemas.openxmlformats.org/officeDocument/2006/relationships" xmlns:a="http://schemas.openxmlformats.org/drawingml/2006/main" r:embed="R7ca3056c428348b2"/>
+          <a:blip xmlns:r="http://schemas.openxmlformats.org/officeDocument/2006/relationships" xmlns:a="http://schemas.openxmlformats.org/drawingml/2006/main" r:embed="R1e748bebb07e4bb6"/>
           <a:stretch xmlns:a="http://schemas.openxmlformats.org/drawingml/2006/main"/>
         </p:blipFill>
         <p:spPr>
@@ -11831,7 +11846,7 @@
           <p:cNvPr id="132" name="Hamilton">
             <a:extLst xmlns:a="http://schemas.openxmlformats.org/drawingml/2006/main">
               <a:ext uri="{FF2B5EF4-FFF2-40B4-BE49-F238E27FC236}">
-                <a16:creationId xmlns:a16="http://schemas.microsoft.com/office/drawing/2014/main" id="{3C916F28-34BF-4588-8163-6770D76AC823}"/>
+                <a16:creationId xmlns:a16="http://schemas.microsoft.com/office/drawing/2014/main" id="{16FAF6B7-4976-4986-B0DB-557B7A0EC0D1}"/>
               </a:ext>
             </a:extLst>
           </p:cNvPr>
@@ -11859,7 +11874,7 @@
             <a:defPPr algn="l">
               <a:defRPr sz="1275" b="0">
                 <a:solidFill>
-                  <a:srgbClr val="647887"/>
+                  <a:srgbClr val="00355F"/>
                 </a:solidFill>
                 <a:latin typeface="Arial"/>
                 <a:ea typeface="Arial"/>
@@ -11875,7 +11890,7 @@
               <a:buNone/>
               <a:defRPr sz="1275" b="0">
                 <a:solidFill>
-                  <a:srgbClr val="647887"/>
+                  <a:srgbClr val="00355F"/>
                 </a:solidFill>
                 <a:latin typeface="Arial"/>
                 <a:ea typeface="Arial"/>
@@ -11885,7 +11900,7 @@
             <a:r>
               <a:rPr sz="1275" b="0">
                 <a:solidFill>
-                  <a:srgbClr val="647887"/>
+                  <a:srgbClr val="00355F"/>
                 </a:solidFill>
                 <a:latin typeface="Arial"/>
                 <a:ea typeface="Arial"/>
@@ -11902,7 +11917,7 @@
               <a:buNone/>
               <a:defRPr sz="1275" b="0">
                 <a:solidFill>
-                  <a:srgbClr val="647887"/>
+                  <a:srgbClr val="00355F"/>
                 </a:solidFill>
                 <a:latin typeface="Arial"/>
                 <a:ea typeface="Arial"/>
@@ -11912,7 +11927,7 @@
             <a:r>
               <a:rPr sz="1275" b="0">
                 <a:solidFill>
-                  <a:srgbClr val="647887"/>
+                  <a:srgbClr val="00355F"/>
                 </a:solidFill>
                 <a:latin typeface="Arial"/>
                 <a:ea typeface="Arial"/>
@@ -11928,7 +11943,7 @@
           <p:cNvPr id="133" name="">
             <a:extLst xmlns:a="http://schemas.openxmlformats.org/drawingml/2006/main">
               <a:ext uri="{FF2B5EF4-FFF2-40B4-BE49-F238E27FC236}">
-                <a16:creationId xmlns:a16="http://schemas.microsoft.com/office/drawing/2014/main" id="{5C79FFE9-AC1E-418C-9EA1-868791AD407F}"/>
+                <a16:creationId xmlns:a16="http://schemas.microsoft.com/office/drawing/2014/main" id="{EC7857AE-2558-44E4-87E7-FF7A78924980}"/>
               </a:ext>
             </a:extLst>
           </p:cNvPr>
@@ -11957,7 +11972,7 @@
           <a:noFill xmlns:a="http://schemas.openxmlformats.org/drawingml/2006/main"/>
           <a:ln xmlns:a="http://schemas.openxmlformats.org/drawingml/2006/main" w="20955">
             <a:solidFill>
-              <a:srgbClr val="007D80"/>
+              <a:srgbClr val="00355F"/>
             </a:solidFill>
           </a:ln>
         </p:spPr>
@@ -11967,7 +11982,7 @@
           <p:cNvPr id="134" name="">
             <a:extLst xmlns:a="http://schemas.openxmlformats.org/drawingml/2006/main">
               <a:ext uri="{FF2B5EF4-FFF2-40B4-BE49-F238E27FC236}">
-                <a16:creationId xmlns:a16="http://schemas.microsoft.com/office/drawing/2014/main" id="{FC94D9E0-D958-4A1B-83FE-F09016529FEB}"/>
+                <a16:creationId xmlns:a16="http://schemas.microsoft.com/office/drawing/2014/main" id="{32724D9F-FD67-47D9-9EC1-6822BC958E7E}"/>
               </a:ext>
             </a:extLst>
           </p:cNvPr>
@@ -11998,7 +12013,7 @@
             </a:pathLst>
           </a:custGeom>
           <a:solidFill xmlns:a="http://schemas.openxmlformats.org/drawingml/2006/main">
-            <a:srgbClr val="007D80"/>
+            <a:srgbClr val="00355F"/>
           </a:solidFill>
           <a:ln xmlns:a="http://schemas.openxmlformats.org/drawingml/2006/main" w="0">
             <a:noFill/>
@@ -12010,7 +12025,7 @@
           <p:cNvPr id="135" name="">
             <a:extLst xmlns:a="http://schemas.openxmlformats.org/drawingml/2006/main">
               <a:ext uri="{FF2B5EF4-FFF2-40B4-BE49-F238E27FC236}">
-                <a16:creationId xmlns:a16="http://schemas.microsoft.com/office/drawing/2014/main" id="{18DC88AE-BA1C-4D44-BAC4-8FF72B633B2E}"/>
+                <a16:creationId xmlns:a16="http://schemas.microsoft.com/office/drawing/2014/main" id="{B1F33567-04AB-4E13-966B-E5C4235B61AC}"/>
               </a:ext>
             </a:extLst>
           </p:cNvPr>
@@ -12039,7 +12054,7 @@
           <a:noFill xmlns:a="http://schemas.openxmlformats.org/drawingml/2006/main"/>
           <a:ln xmlns:a="http://schemas.openxmlformats.org/drawingml/2006/main" w="20955">
             <a:solidFill>
-              <a:srgbClr val="007D80"/>
+              <a:srgbClr val="00355F"/>
             </a:solidFill>
           </a:ln>
         </p:spPr>
@@ -12049,7 +12064,7 @@
           <p:cNvPr id="136" name="">
             <a:extLst xmlns:a="http://schemas.openxmlformats.org/drawingml/2006/main">
               <a:ext uri="{FF2B5EF4-FFF2-40B4-BE49-F238E27FC236}">
-                <a16:creationId xmlns:a16="http://schemas.microsoft.com/office/drawing/2014/main" id="{A5E24776-06AF-4094-8BD6-5E4FC0E0E4C3}"/>
+                <a16:creationId xmlns:a16="http://schemas.microsoft.com/office/drawing/2014/main" id="{D5456E12-A034-4624-8031-69D9468179DD}"/>
               </a:ext>
             </a:extLst>
           </p:cNvPr>
@@ -12080,7 +12095,7 @@
             </a:pathLst>
           </a:custGeom>
           <a:solidFill xmlns:a="http://schemas.openxmlformats.org/drawingml/2006/main">
-            <a:srgbClr val="007D80"/>
+            <a:srgbClr val="00355F"/>
           </a:solidFill>
           <a:ln xmlns:a="http://schemas.openxmlformats.org/drawingml/2006/main" w="0">
             <a:noFill/>
@@ -12092,7 +12107,7 @@
           <p:cNvPr id="137" name="">
             <a:extLst xmlns:a="http://schemas.openxmlformats.org/drawingml/2006/main">
               <a:ext uri="{FF2B5EF4-FFF2-40B4-BE49-F238E27FC236}">
-                <a16:creationId xmlns:a16="http://schemas.microsoft.com/office/drawing/2014/main" id="{CCAD2002-72DB-4D89-BDDB-8481A2D35C42}"/>
+                <a16:creationId xmlns:a16="http://schemas.microsoft.com/office/drawing/2014/main" id="{D146F9CC-E741-4A7E-9E69-FF53F22AD1C1}"/>
               </a:ext>
             </a:extLst>
           </p:cNvPr>
@@ -12121,7 +12136,7 @@
           <a:noFill xmlns:a="http://schemas.openxmlformats.org/drawingml/2006/main"/>
           <a:ln xmlns:a="http://schemas.openxmlformats.org/drawingml/2006/main" w="20955">
             <a:solidFill>
-              <a:srgbClr val="007D80"/>
+              <a:srgbClr val="00355F"/>
             </a:solidFill>
           </a:ln>
         </p:spPr>
@@ -12131,7 +12146,7 @@
           <p:cNvPr id="138" name="">
             <a:extLst xmlns:a="http://schemas.openxmlformats.org/drawingml/2006/main">
               <a:ext uri="{FF2B5EF4-FFF2-40B4-BE49-F238E27FC236}">
-                <a16:creationId xmlns:a16="http://schemas.microsoft.com/office/drawing/2014/main" id="{8C393896-22C0-4DA2-8057-B7866236A3E2}"/>
+                <a16:creationId xmlns:a16="http://schemas.microsoft.com/office/drawing/2014/main" id="{10E280F3-B2CD-4FBF-9463-DCC6DBE6B77E}"/>
               </a:ext>
             </a:extLst>
           </p:cNvPr>
@@ -12162,7 +12177,7 @@
             </a:pathLst>
           </a:custGeom>
           <a:solidFill xmlns:a="http://schemas.openxmlformats.org/drawingml/2006/main">
-            <a:srgbClr val="007D80"/>
+            <a:srgbClr val="00355F"/>
           </a:solidFill>
           <a:ln xmlns:a="http://schemas.openxmlformats.org/drawingml/2006/main" w="0">
             <a:noFill/>
@@ -12174,7 +12189,7 @@
           <p:cNvPr id="139" name="">
             <a:extLst xmlns:a="http://schemas.openxmlformats.org/drawingml/2006/main">
               <a:ext uri="{FF2B5EF4-FFF2-40B4-BE49-F238E27FC236}">
-                <a16:creationId xmlns:a16="http://schemas.microsoft.com/office/drawing/2014/main" id="{EF655786-7605-43B3-8298-1A0312732537}"/>
+                <a16:creationId xmlns:a16="http://schemas.microsoft.com/office/drawing/2014/main" id="{83B436EC-541B-4442-9466-077677ABD6B7}"/>
               </a:ext>
             </a:extLst>
           </p:cNvPr>
@@ -12203,7 +12218,7 @@
           <a:noFill xmlns:a="http://schemas.openxmlformats.org/drawingml/2006/main"/>
           <a:ln xmlns:a="http://schemas.openxmlformats.org/drawingml/2006/main" w="20955">
             <a:solidFill>
-              <a:srgbClr val="007D80"/>
+              <a:srgbClr val="00355F"/>
             </a:solidFill>
           </a:ln>
         </p:spPr>
@@ -12213,7 +12228,7 @@
           <p:cNvPr id="140" name="">
             <a:extLst xmlns:a="http://schemas.openxmlformats.org/drawingml/2006/main">
               <a:ext uri="{FF2B5EF4-FFF2-40B4-BE49-F238E27FC236}">
-                <a16:creationId xmlns:a16="http://schemas.microsoft.com/office/drawing/2014/main" id="{8875F774-8F4F-489B-A2FF-1AE6577131A2}"/>
+                <a16:creationId xmlns:a16="http://schemas.microsoft.com/office/drawing/2014/main" id="{CE2405B0-C3C6-41C5-BA98-D71F2FEAE78A}"/>
               </a:ext>
             </a:extLst>
           </p:cNvPr>
@@ -12244,7 +12259,7 @@
             </a:pathLst>
           </a:custGeom>
           <a:solidFill xmlns:a="http://schemas.openxmlformats.org/drawingml/2006/main">
-            <a:srgbClr val="007D80"/>
+            <a:srgbClr val="00355F"/>
           </a:solidFill>
           <a:ln xmlns:a="http://schemas.openxmlformats.org/drawingml/2006/main" w="0">
             <a:noFill/>
@@ -12256,7 +12271,7 @@
           <p:cNvPr id="141" name="">
             <a:extLst xmlns:a="http://schemas.openxmlformats.org/drawingml/2006/main">
               <a:ext uri="{FF2B5EF4-FFF2-40B4-BE49-F238E27FC236}">
-                <a16:creationId xmlns:a16="http://schemas.microsoft.com/office/drawing/2014/main" id="{6EA39CC0-B9AD-49D9-928F-A241C06CC9D0}"/>
+                <a16:creationId xmlns:a16="http://schemas.microsoft.com/office/drawing/2014/main" id="{85019B52-D3BF-4BD8-A15E-E6EC1B3767CC}"/>
               </a:ext>
             </a:extLst>
           </p:cNvPr>
@@ -12285,7 +12300,7 @@
           <a:noFill xmlns:a="http://schemas.openxmlformats.org/drawingml/2006/main"/>
           <a:ln xmlns:a="http://schemas.openxmlformats.org/drawingml/2006/main" w="20955">
             <a:solidFill>
-              <a:srgbClr val="007D80"/>
+              <a:srgbClr val="00355F"/>
             </a:solidFill>
           </a:ln>
         </p:spPr>
@@ -12295,7 +12310,7 @@
           <p:cNvPr id="142" name="">
             <a:extLst xmlns:a="http://schemas.openxmlformats.org/drawingml/2006/main">
               <a:ext uri="{FF2B5EF4-FFF2-40B4-BE49-F238E27FC236}">
-                <a16:creationId xmlns:a16="http://schemas.microsoft.com/office/drawing/2014/main" id="{3ACBDF48-DB73-4925-97C5-2C32AA8E78BA}"/>
+                <a16:creationId xmlns:a16="http://schemas.microsoft.com/office/drawing/2014/main" id="{E4148636-40C2-4F06-BDC7-17A2D1F60254}"/>
               </a:ext>
             </a:extLst>
           </p:cNvPr>
@@ -12326,7 +12341,7 @@
             </a:pathLst>
           </a:custGeom>
           <a:solidFill xmlns:a="http://schemas.openxmlformats.org/drawingml/2006/main">
-            <a:srgbClr val="007D80"/>
+            <a:srgbClr val="00355F"/>
           </a:solidFill>
           <a:ln xmlns:a="http://schemas.openxmlformats.org/drawingml/2006/main" w="0">
             <a:noFill/>
@@ -12338,7 +12353,7 @@
           <p:cNvPr id="143" name="Assay feedback to next design cycle">
             <a:extLst xmlns:a="http://schemas.openxmlformats.org/drawingml/2006/main">
               <a:ext uri="{FF2B5EF4-FFF2-40B4-BE49-F238E27FC236}">
-                <a16:creationId xmlns:a16="http://schemas.microsoft.com/office/drawing/2014/main" id="{8CB8ACB7-B253-4EFE-A515-475CC902F792}"/>
+                <a16:creationId xmlns:a16="http://schemas.microsoft.com/office/drawing/2014/main" id="{13E4B28B-EE29-47AD-A0B5-F1760E589C3A}"/>
               </a:ext>
             </a:extLst>
           </p:cNvPr>
@@ -12377,7 +12392,7 @@
           <a:noFill xmlns:a="http://schemas.openxmlformats.org/drawingml/2006/main"/>
           <a:ln xmlns:a="http://schemas.openxmlformats.org/drawingml/2006/main" w="19050">
             <a:solidFill>
-              <a:srgbClr val="007D80"/>
+              <a:srgbClr val="00355F"/>
             </a:solidFill>
           </a:ln>
         </p:spPr>
@@ -12387,7 +12402,7 @@
           <p:cNvPr id="144" name="">
             <a:extLst xmlns:a="http://schemas.openxmlformats.org/drawingml/2006/main">
               <a:ext uri="{FF2B5EF4-FFF2-40B4-BE49-F238E27FC236}">
-                <a16:creationId xmlns:a16="http://schemas.microsoft.com/office/drawing/2014/main" id="{C7140EDA-0AB3-4181-A3E9-0F6FFE7F54C3}"/>
+                <a16:creationId xmlns:a16="http://schemas.microsoft.com/office/drawing/2014/main" id="{250C6C0A-D862-4FCB-AA3F-C8C8E06807BB}"/>
               </a:ext>
             </a:extLst>
           </p:cNvPr>
@@ -12418,7 +12433,7 @@
             </a:pathLst>
           </a:custGeom>
           <a:solidFill xmlns:a="http://schemas.openxmlformats.org/drawingml/2006/main">
-            <a:srgbClr val="007D80"/>
+            <a:srgbClr val="00355F"/>
           </a:solidFill>
           <a:ln xmlns:a="http://schemas.openxmlformats.org/drawingml/2006/main" w="0">
             <a:noFill/>
@@ -12430,7 +12445,7 @@
           <p:cNvPr id="145" name="">
             <a:extLst xmlns:a="http://schemas.openxmlformats.org/drawingml/2006/main">
               <a:ext uri="{FF2B5EF4-FFF2-40B4-BE49-F238E27FC236}">
-                <a16:creationId xmlns:a16="http://schemas.microsoft.com/office/drawing/2014/main" id="{AE2A70A4-3640-486D-A09A-2E09BE45E5E7}"/>
+                <a16:creationId xmlns:a16="http://schemas.microsoft.com/office/drawing/2014/main" id="{B3B38668-0E37-4985-BF39-24B36CB02666}"/>
               </a:ext>
             </a:extLst>
           </p:cNvPr>
@@ -12460,7 +12475,7 @@
           <p:cNvPr id="146" name="Sequence + assay context + results → next design cycle">
             <a:extLst xmlns:a="http://schemas.openxmlformats.org/drawingml/2006/main">
               <a:ext uri="{FF2B5EF4-FFF2-40B4-BE49-F238E27FC236}">
-                <a16:creationId xmlns:a16="http://schemas.microsoft.com/office/drawing/2014/main" id="{3967A058-95BC-447C-8611-960F8AD4CACB}"/>
+                <a16:creationId xmlns:a16="http://schemas.microsoft.com/office/drawing/2014/main" id="{9CA3B0FE-BE38-40C2-A91C-593462FBFCF8}"/>
               </a:ext>
             </a:extLst>
           </p:cNvPr>
@@ -12488,7 +12503,7 @@
             <a:defPPr algn="ctr">
               <a:defRPr sz="1650" b="0">
                 <a:solidFill>
-                  <a:srgbClr val="007D80"/>
+                  <a:srgbClr val="00355F"/>
                 </a:solidFill>
                 <a:latin typeface="Arial"/>
                 <a:ea typeface="Arial"/>
@@ -12504,7 +12519,7 @@
               <a:buNone/>
               <a:defRPr sz="1650" b="0">
                 <a:solidFill>
-                  <a:srgbClr val="007D80"/>
+                  <a:srgbClr val="00355F"/>
                 </a:solidFill>
                 <a:latin typeface="Arial"/>
                 <a:ea typeface="Arial"/>
@@ -12514,7 +12529,7 @@
             <a:r>
               <a:rPr sz="1650" b="0">
                 <a:solidFill>
-                  <a:srgbClr val="007D80"/>
+                  <a:srgbClr val="00355F"/>
                 </a:solidFill>
                 <a:latin typeface="Arial"/>
                 <a:ea typeface="Arial"/>
@@ -12530,7 +12545,7 @@
           <p:cNvPr id="147" name="">
             <a:extLst xmlns:a="http://schemas.openxmlformats.org/drawingml/2006/main">
               <a:ext uri="{FF2B5EF4-FFF2-40B4-BE49-F238E27FC236}">
-                <a16:creationId xmlns:a16="http://schemas.microsoft.com/office/drawing/2014/main" id="{C4334ADD-EAF2-4FC4-9AFC-25A683513FA0}"/>
+                <a16:creationId xmlns:a16="http://schemas.microsoft.com/office/drawing/2014/main" id="{7703482D-815C-412D-A51B-1407DBB77145}"/>
               </a:ext>
             </a:extLst>
           </p:cNvPr>
@@ -12550,7 +12565,7 @@
             </a:avLst>
           </a:prstGeom>
           <a:solidFill xmlns:a="http://schemas.openxmlformats.org/drawingml/2006/main">
-            <a:srgbClr val="152C3A"/>
+            <a:srgbClr val="00355F"/>
           </a:solidFill>
           <a:ln xmlns:a="http://schemas.openxmlformats.org/drawingml/2006/main" w="9525">
             <a:noFill/>
@@ -12562,7 +12577,7 @@
           <p:cNvPr id="148" name="">
             <a:extLst xmlns:a="http://schemas.openxmlformats.org/drawingml/2006/main">
               <a:ext uri="{FF2B5EF4-FFF2-40B4-BE49-F238E27FC236}">
-                <a16:creationId xmlns:a16="http://schemas.microsoft.com/office/drawing/2014/main" id="{9C35B7A7-C912-41B5-9195-B8A1AF3AA8AE}"/>
+                <a16:creationId xmlns:a16="http://schemas.microsoft.com/office/drawing/2014/main" id="{79E64480-230A-4A72-8B47-9B4F7F666734}"/>
               </a:ext>
             </a:extLst>
           </p:cNvPr>
@@ -12572,10 +12587,10 @@
           <p:nvPr/>
         </p:nvPicPr>
         <p:blipFill>
-          <a:blip xmlns:r="http://schemas.openxmlformats.org/officeDocument/2006/relationships" xmlns:a="http://schemas.openxmlformats.org/drawingml/2006/main" r:embed="Rfec64a05f7874d46">
+          <a:blip xmlns:r="http://schemas.openxmlformats.org/officeDocument/2006/relationships" xmlns:a="http://schemas.openxmlformats.org/drawingml/2006/main" r:embed="R615b4b0ecdc649cf">
             <a:extLst>
               <a:ext uri="{96DAC541-7B7A-43D3-8B79-37D633B846F1}">
-                <asvg:svgBlip xmlns:asvg="http://schemas.microsoft.com/office/drawing/2016/SVG/main" r:embed="Rc3d36728e879443d"/>
+                <asvg:svgBlip xmlns:asvg="http://schemas.microsoft.com/office/drawing/2016/SVG/main" r:embed="Rd17c44b7f67d470e"/>
               </a:ext>
             </a:extLst>
           </a:blip>
@@ -12596,7 +12611,7 @@
           <p:cNvPr id="149" name="Automation + data orchestration span every step">
             <a:extLst xmlns:a="http://schemas.openxmlformats.org/drawingml/2006/main">
               <a:ext uri="{FF2B5EF4-FFF2-40B4-BE49-F238E27FC236}">
-                <a16:creationId xmlns:a16="http://schemas.microsoft.com/office/drawing/2014/main" id="{87F79D04-1F30-408D-8119-1BC1B48B1041}"/>
+                <a16:creationId xmlns:a16="http://schemas.microsoft.com/office/drawing/2014/main" id="{369E306B-6F19-404D-8F96-AF2A8BD69822}"/>
               </a:ext>
             </a:extLst>
           </p:cNvPr>
@@ -12666,7 +12681,7 @@
           <p:cNvPr id="150" name="Wet lab = build + test. AI may test fewer molecules while increasing characterization depth per molecule.">
             <a:extLst xmlns:a="http://schemas.openxmlformats.org/drawingml/2006/main">
               <a:ext uri="{FF2B5EF4-FFF2-40B4-BE49-F238E27FC236}">
-                <a16:creationId xmlns:a16="http://schemas.microsoft.com/office/drawing/2014/main" id="{FDF10886-B95D-4081-BE49-C3829C191D06}"/>
+                <a16:creationId xmlns:a16="http://schemas.microsoft.com/office/drawing/2014/main" id="{E3439B78-5E0C-493E-8D78-4AA33D66A913}"/>
               </a:ext>
             </a:extLst>
           </p:cNvPr>
@@ -12694,7 +12709,7 @@
             <a:defPPr algn="l">
               <a:defRPr sz="1725" b="1">
                 <a:solidFill>
-                  <a:srgbClr val="152C3A"/>
+                  <a:srgbClr val="00355F"/>
                 </a:solidFill>
                 <a:latin typeface="Arial"/>
                 <a:ea typeface="Arial"/>
@@ -12710,7 +12725,7 @@
               <a:buNone/>
               <a:defRPr sz="1725" b="1">
                 <a:solidFill>
-                  <a:srgbClr val="152C3A"/>
+                  <a:srgbClr val="00355F"/>
                 </a:solidFill>
                 <a:latin typeface="Arial"/>
                 <a:ea typeface="Arial"/>
@@ -12720,7 +12735,7 @@
             <a:r>
               <a:rPr sz="1725" b="1">
                 <a:solidFill>
-                  <a:srgbClr val="152C3A"/>
+                  <a:srgbClr val="00355F"/>
                 </a:solidFill>
                 <a:latin typeface="Arial"/>
                 <a:ea typeface="Arial"/>
@@ -12736,7 +12751,7 @@
           <p:cNvPr id="151" name="LST demand depends on molecule count × assay depth × net inputs per assay; instrument investment is separate.">
             <a:extLst xmlns:a="http://schemas.openxmlformats.org/drawingml/2006/main">
               <a:ext uri="{FF2B5EF4-FFF2-40B4-BE49-F238E27FC236}">
-                <a16:creationId xmlns:a16="http://schemas.microsoft.com/office/drawing/2014/main" id="{C45205DD-AB4E-456A-B4CA-1D1D1672CEEA}"/>
+                <a16:creationId xmlns:a16="http://schemas.microsoft.com/office/drawing/2014/main" id="{AADCCB94-5D5D-4725-ACEC-29C69D3D468A}"/>
               </a:ext>
             </a:extLst>
           </p:cNvPr>
@@ -12764,7 +12779,7 @@
             <a:defPPr algn="l">
               <a:defRPr sz="1500" b="0">
                 <a:solidFill>
-                  <a:srgbClr val="647887"/>
+                  <a:srgbClr val="00355F"/>
                 </a:solidFill>
                 <a:latin typeface="Arial"/>
                 <a:ea typeface="Arial"/>
@@ -12780,7 +12795,7 @@
               <a:buNone/>
               <a:defRPr sz="1500" b="0">
                 <a:solidFill>
-                  <a:srgbClr val="647887"/>
+                  <a:srgbClr val="00355F"/>
                 </a:solidFill>
                 <a:latin typeface="Arial"/>
                 <a:ea typeface="Arial"/>
@@ -12790,7 +12805,7 @@
             <a:r>
               <a:rPr sz="1500" b="0">
                 <a:solidFill>
-                  <a:srgbClr val="647887"/>
+                  <a:srgbClr val="00355F"/>
                 </a:solidFill>
                 <a:latin typeface="Arial"/>
                 <a:ea typeface="Arial"/>
@@ -12806,7 +12821,7 @@
           <p:cNvPr id="152" name="Illustrative workflow; assays may run in parallel. * Scale-dependent. † Expression comes from stage 2. Supplier examples and primary sources: SOURCES.md.">
             <a:extLst xmlns:a="http://schemas.openxmlformats.org/drawingml/2006/main">
               <a:ext uri="{FF2B5EF4-FFF2-40B4-BE49-F238E27FC236}">
-                <a16:creationId xmlns:a16="http://schemas.microsoft.com/office/drawing/2014/main" id="{DA7FBF96-8EBE-43F6-AA8E-C5505B83F1F2}"/>
+                <a16:creationId xmlns:a16="http://schemas.microsoft.com/office/drawing/2014/main" id="{C8467B95-0FA2-47A9-8603-8FAC3EC872B7}"/>
               </a:ext>
             </a:extLst>
           </p:cNvPr>
@@ -12834,7 +12849,7 @@
             <a:defPPr algn="l">
               <a:defRPr sz="1050" b="0">
                 <a:solidFill>
-                  <a:srgbClr val="647887"/>
+                  <a:srgbClr val="00355F"/>
                 </a:solidFill>
                 <a:latin typeface="Arial"/>
                 <a:ea typeface="Arial"/>
@@ -12850,7 +12865,7 @@
               <a:buNone/>
               <a:defRPr sz="1050" b="0">
                 <a:solidFill>
-                  <a:srgbClr val="647887"/>
+                  <a:srgbClr val="00355F"/>
                 </a:solidFill>
                 <a:latin typeface="Arial"/>
                 <a:ea typeface="Arial"/>
@@ -12860,7 +12875,7 @@
             <a:r>
               <a:rPr sz="1050" b="0">
                 <a:solidFill>
-                  <a:srgbClr val="647887"/>
+                  <a:srgbClr val="00355F"/>
                 </a:solidFill>
                 <a:latin typeface="Arial"/>
                 <a:ea typeface="Arial"/>
@@ -12874,7 +12889,7 @@
     </p:spTree>
     <p:extLst>
       <p:ext uri="{BB962C8B-B14F-4D97-AF65-F5344CB8AC3E}">
-        <p14:creationId xmlns:p14="http://schemas.microsoft.com/office/powerpoint/2010/main" val="1429800180"/>
+        <p14:creationId xmlns:p14="http://schemas.microsoft.com/office/powerpoint/2010/main" val="1593567"/>
       </p:ext>
     </p:extLst>
   </p:cSld>
